--- a/presentation/BloodBridge-AI-Presentation.pptx
+++ b/presentation/BloodBridge-AI-Presentation.pptx
@@ -15,9 +15,10 @@
     <p:sldId id="263" r:id="rId9"/>
     <p:sldId id="264" r:id="rId10"/>
     <p:sldId id="265" r:id="rId11"/>
+    <p:sldId id="266" r:id="rId12"/>
   </p:sldIdLst>
   <p:notesMasterIdLst>
-    <p:notesMasterId r:id="rId12"/>
+    <p:notesMasterId r:id="rId13"/>
   </p:notesMasterIdLst>
   <p:sldSz cx="12192000" cy="6858000"/>
   <p:notesSz cx="6858000" cy="12192000"/>
@@ -623,6 +624,94 @@
             <a:fld id="{F7021451-1387-4CA6-816F-3879F97B5CBC}" type="slidenum">
               <a:rPr lang="en-US"/>
               <a:t>10</a:t>
+            </a:fld>
+            <a:endParaRPr lang="en-US"/>
+          </a:p>
+        </p:txBody>
+      </p:sp>
+    </p:spTree>
+    <p:extLst>
+      <p:ext uri="{BB962C8B-B14F-4D97-AF65-F5344CB8AC3E}">
+        <p14:creationId xmlns:p14="http://schemas.microsoft.com/office/powerpoint/2010/main" val="1024086991"/>
+      </p:ext>
+    </p:extLst>
+  </p:cSld>
+  <p:clrMapOvr>
+    <a:masterClrMapping/>
+  </p:clrMapOvr>
+</p:notes>
+</file>
+
+<file path=ppt/notesSlides/notesSlide11.xml><?xml version="1.0" encoding="utf-8"?>
+<p:notes xmlns:a="http://schemas.openxmlformats.org/drawingml/2006/main" xmlns:r="http://schemas.openxmlformats.org/officeDocument/2006/relationships" xmlns:p="http://schemas.openxmlformats.org/presentationml/2006/main">
+  <p:cSld>
+    <p:spTree>
+      <p:nvGrpSpPr>
+        <p:cNvPr id="1" name=""/>
+        <p:cNvGrpSpPr/>
+        <p:nvPr/>
+      </p:nvGrpSpPr>
+      <p:grpSpPr>
+        <a:xfrm>
+          <a:off x="0" y="0"/>
+          <a:ext cx="0" cy="0"/>
+          <a:chOff x="0" y="0"/>
+          <a:chExt cx="0" cy="0"/>
+        </a:xfrm>
+      </p:grpSpPr>
+      <p:sp>
+        <p:nvSpPr>
+          <p:cNvPr id="2" name="Slide Image Placeholder 1"/>
+          <p:cNvSpPr>
+            <a:spLocks noGrp="1" noRot="1" noChangeAspect="1"/>
+          </p:cNvSpPr>
+          <p:nvPr>
+            <p:ph type="sldImg"/>
+          </p:nvPr>
+        </p:nvSpPr>
+        <p:spPr/>
+      </p:sp>
+      <p:sp>
+        <p:nvSpPr>
+          <p:cNvPr id="3" name="Notes Placeholder 2"/>
+          <p:cNvSpPr>
+            <a:spLocks noGrp="1"/>
+          </p:cNvSpPr>
+          <p:nvPr>
+            <p:ph type="body" idx="1"/>
+          </p:nvPr>
+        </p:nvSpPr>
+        <p:spPr/>
+        <p:txBody>
+          <a:bodyPr/>
+          <a:lstStyle/>
+          <a:p>
+            <a:r>
+              <a:rPr lang="en-US" dirty="0"/>
+              <a:t/>
+            </a:r>
+            <a:endParaRPr lang="en-US" dirty="0"/>
+          </a:p>
+        </p:txBody>
+      </p:sp>
+      <p:sp>
+        <p:nvSpPr>
+          <p:cNvPr id="4" name="Slide Number Placeholder 3"/>
+          <p:cNvSpPr>
+            <a:spLocks noGrp="1"/>
+          </p:cNvSpPr>
+          <p:nvPr>
+            <p:ph type="sldNum" sz="quarter" idx="10"/>
+          </p:nvPr>
+        </p:nvSpPr>
+        <p:spPr/>
+        <p:txBody>
+          <a:bodyPr/>
+          <a:lstStyle/>
+          <a:p>
+            <a:fld id="{F7021451-1387-4CA6-816F-3879F97B5CBC}" type="slidenum">
+              <a:rPr lang="en-US"/>
+              <a:t>11</a:t>
             </a:fld>
             <a:endParaRPr lang="en-US"/>
           </a:p>
@@ -1726,7 +1815,7 @@
                   <a:srgbClr val="C31F2E"/>
                 </a:solidFill>
               </a:rPr>
-              <a:t>ALIBABA CLOUD AI HACKATHON PAKISTAN 2026 · HEALTHCARE</a:t>
+              <a:t>AI-POWERED EMERGENCY BLOOD COORDINATION SYSTEM · PAKISTAN</a:t>
             </a:r>
             <a:endParaRPr lang="en-US" sz="1250" dirty="0"/>
           </a:p>
@@ -1855,7 +1944,7 @@
         <p:spPr>
           <a:xfrm>
             <a:off x="566928" y="4343400"/>
-            <a:ext cx="2331720" cy="384048"/>
+            <a:ext cx="2651760" cy="384048"/>
           </a:xfrm>
           <a:prstGeom prst="roundRect">
             <a:avLst>
@@ -1877,7 +1966,7 @@
         <p:spPr>
           <a:xfrm>
             <a:off x="566928" y="4343400"/>
-            <a:ext cx="2331720" cy="384048"/>
+            <a:ext cx="2651760" cy="384048"/>
           </a:xfrm>
           <a:prstGeom prst="rect">
             <a:avLst/>
@@ -1898,7 +1987,7 @@
                   <a:srgbClr val="8F1620"/>
                 </a:solidFill>
               </a:rPr>
-              <a:t>Safety-first donor matching</a:t>
+              <a:t>Verified staff · screened donors</a:t>
             </a:r>
             <a:endParaRPr lang="en-US" sz="1150" dirty="0"/>
           </a:p>
@@ -1912,8 +2001,8 @@
         </p:nvSpPr>
         <p:spPr>
           <a:xfrm>
-            <a:off x="3063240" y="4343400"/>
-            <a:ext cx="2788920" cy="384048"/>
+            <a:off x="3383280" y="4343400"/>
+            <a:ext cx="2468880" cy="384048"/>
           </a:xfrm>
           <a:prstGeom prst="roundRect">
             <a:avLst>
@@ -1934,8 +2023,8 @@
         </p:nvSpPr>
         <p:spPr>
           <a:xfrm>
-            <a:off x="3063240" y="4343400"/>
-            <a:ext cx="2788920" cy="384048"/>
+            <a:off x="3383280" y="4343400"/>
+            <a:ext cx="2468880" cy="384048"/>
           </a:xfrm>
           <a:prstGeom prst="rect">
             <a:avLst/>
@@ -1956,7 +2045,7 @@
                   <a:srgbClr val="0F766E"/>
                 </a:solidFill>
               </a:rPr>
-              <a:t>Self-verifying demand forecasts</a:t>
+              <a:t>Safety-first AI matching</a:t>
             </a:r>
             <a:endParaRPr lang="en-US" sz="1150" dirty="0"/>
           </a:p>
@@ -2050,7 +2139,7 @@
                   <a:srgbClr val="8B8B87"/>
                 </a:solidFill>
               </a:rPr>
-              <a:t>Team BloodBridge — working product, seeded with 6 cities across Pakistan</a:t>
+              <a:t>Live product: bloodbridge-ai-two.vercel.app  ·  Source: github.com/sana1234-tech/bloodbridge-AI</a:t>
             </a:r>
             <a:endParaRPr lang="en-US" sz="1200" dirty="0"/>
           </a:p>
@@ -2138,6 +2227,851 @@
                   <a:srgbClr val="C31F2E"/>
                 </a:solidFill>
               </a:rPr>
+              <a:t>FEASIBILITY · WHAT WE ACTUALLY BUILT</a:t>
+            </a:r>
+            <a:endParaRPr lang="en-US" sz="1100" dirty="0"/>
+          </a:p>
+        </p:txBody>
+      </p:sp>
+      <p:sp>
+        <p:nvSpPr>
+          <p:cNvPr id="4" name="Text 2"/>
+          <p:cNvSpPr/>
+          <p:nvPr/>
+        </p:nvSpPr>
+        <p:spPr>
+          <a:xfrm>
+            <a:off x="566928" y="749808"/>
+            <a:ext cx="11055096" cy="777240"/>
+          </a:xfrm>
+          <a:prstGeom prst="rect">
+            <a:avLst/>
+          </a:prstGeom>
+          <a:noFill/>
+          <a:ln/>
+        </p:spPr>
+        <p:txBody>
+          <a:bodyPr wrap="square" rtlCol="0" anchor="ctr"/>
+          <a:lstStyle/>
+          <a:p>
+            <a:pPr indent="0" marL="0">
+              <a:lnSpc>
+                <a:spcPts val="3000"/>
+              </a:lnSpc>
+              <a:buNone/>
+            </a:pPr>
+            <a:r>
+              <a:rPr lang="en-US" sz="2600" b="1" dirty="0">
+                <a:solidFill>
+                  <a:srgbClr val="1B1B1D"/>
+                </a:solidFill>
+              </a:rPr>
+              <a:t>Everything in this deck </a:t>
+            </a:r>
+            <a:pPr indent="0" marL="0">
+              <a:lnSpc>
+                <a:spcPts val="3000"/>
+              </a:lnSpc>
+              <a:buNone/>
+            </a:pPr>
+            <a:r>
+              <a:rPr lang="en-US" sz="2600" b="1" dirty="0">
+                <a:solidFill>
+                  <a:srgbClr val="C31F2E"/>
+                </a:solidFill>
+              </a:rPr>
+              <a:t>runs today</a:t>
+            </a:r>
+            <a:pPr indent="0" marL="0">
+              <a:lnSpc>
+                <a:spcPts val="3000"/>
+              </a:lnSpc>
+              <a:buNone/>
+            </a:pPr>
+            <a:r>
+              <a:rPr lang="en-US" sz="2600" b="1" dirty="0">
+                <a:solidFill>
+                  <a:srgbClr val="1B1B1D"/>
+                </a:solidFill>
+              </a:rPr>
+              <a:t> — live on the internet.</a:t>
+            </a:r>
+            <a:endParaRPr lang="en-US" sz="2600" dirty="0"/>
+          </a:p>
+        </p:txBody>
+      </p:sp>
+      <p:sp>
+        <p:nvSpPr>
+          <p:cNvPr id="5" name="Shape 3"/>
+          <p:cNvSpPr/>
+          <p:nvPr/>
+        </p:nvSpPr>
+        <p:spPr>
+          <a:xfrm>
+            <a:off x="566928" y="1737360"/>
+            <a:ext cx="6309360" cy="4297680"/>
+          </a:xfrm>
+          <a:prstGeom prst="roundRect">
+            <a:avLst>
+              <a:gd name="adj" fmla="val 2128"/>
+            </a:avLst>
+          </a:prstGeom>
+          <a:solidFill>
+            <a:srgbClr val="FAFAF8"/>
+          </a:solidFill>
+          <a:ln w="15875">
+            <a:solidFill>
+              <a:srgbClr val="E7E5E0"/>
+            </a:solidFill>
+            <a:prstDash val="solid"/>
+          </a:ln>
+        </p:spPr>
+      </p:sp>
+      <p:sp>
+        <p:nvSpPr>
+          <p:cNvPr id="6" name="Text 4"/>
+          <p:cNvSpPr/>
+          <p:nvPr/>
+        </p:nvSpPr>
+        <p:spPr>
+          <a:xfrm>
+            <a:off x="822960" y="1938528"/>
+            <a:ext cx="5797296" cy="777240"/>
+          </a:xfrm>
+          <a:prstGeom prst="rect">
+            <a:avLst/>
+          </a:prstGeom>
+          <a:noFill/>
+          <a:ln/>
+        </p:spPr>
+        <p:txBody>
+          <a:bodyPr wrap="square" rtlCol="0" anchor="t"/>
+          <a:lstStyle/>
+          <a:p>
+            <a:pPr indent="0" marL="0">
+              <a:lnSpc>
+                <a:spcPts val="1500"/>
+              </a:lnSpc>
+              <a:buNone/>
+            </a:pPr>
+            <a:r>
+              <a:rPr lang="en-US" sz="1300" b="1" dirty="0">
+                <a:solidFill>
+                  <a:srgbClr val="0F766E"/>
+                </a:solidFill>
+              </a:rPr>
+              <a:t>✓  </a:t>
+            </a:r>
+            <a:pPr indent="0" marL="0">
+              <a:lnSpc>
+                <a:spcPts val="1500"/>
+              </a:lnSpc>
+              <a:buNone/>
+            </a:pPr>
+            <a:r>
+              <a:rPr lang="en-US" sz="1150" b="1" dirty="0">
+                <a:solidFill>
+                  <a:srgbClr val="1B1B1D"/>
+                </a:solidFill>
+              </a:rPr>
+              <a:t>Full working app, deployed</a:t>
+            </a:r>
+            <a:pPr indent="0" marL="0">
+              <a:lnSpc>
+                <a:spcPts val="1500"/>
+              </a:lnSpc>
+              <a:buNone/>
+            </a:pPr>
+            <a:r>
+              <a:rPr lang="en-US" sz="1150" dirty="0">
+                <a:solidFill>
+                  <a:srgbClr val="5B5B58"/>
+                </a:solidFill>
+              </a:rPr>
+              <a:t> — 12+ routes, 20+ API endpoints, chatbot, matching &amp; forecasting — live on Vercel right now</a:t>
+            </a:r>
+            <a:endParaRPr lang="en-US" sz="1150" dirty="0"/>
+          </a:p>
+        </p:txBody>
+      </p:sp>
+      <p:sp>
+        <p:nvSpPr>
+          <p:cNvPr id="7" name="Text 5"/>
+          <p:cNvSpPr/>
+          <p:nvPr/>
+        </p:nvSpPr>
+        <p:spPr>
+          <a:xfrm>
+            <a:off x="822960" y="2743200"/>
+            <a:ext cx="5797296" cy="777240"/>
+          </a:xfrm>
+          <a:prstGeom prst="rect">
+            <a:avLst/>
+          </a:prstGeom>
+          <a:noFill/>
+          <a:ln/>
+        </p:spPr>
+        <p:txBody>
+          <a:bodyPr wrap="square" rtlCol="0" anchor="t"/>
+          <a:lstStyle/>
+          <a:p>
+            <a:pPr indent="0" marL="0">
+              <a:lnSpc>
+                <a:spcPts val="1500"/>
+              </a:lnSpc>
+              <a:buNone/>
+            </a:pPr>
+            <a:r>
+              <a:rPr lang="en-US" sz="1300" b="1" dirty="0">
+                <a:solidFill>
+                  <a:srgbClr val="0F766E"/>
+                </a:solidFill>
+              </a:rPr>
+              <a:t>✓  </a:t>
+            </a:r>
+            <a:pPr indent="0" marL="0">
+              <a:lnSpc>
+                <a:spcPts val="1500"/>
+              </a:lnSpc>
+              <a:buNone/>
+            </a:pPr>
+            <a:r>
+              <a:rPr lang="en-US" sz="1150" b="1" dirty="0">
+                <a:solidFill>
+                  <a:srgbClr val="1B1B1D"/>
+                </a:solidFill>
+              </a:rPr>
+              <a:t>Complete verified lifecycle</a:t>
+            </a:r>
+            <a:pPr indent="0" marL="0">
+              <a:lnSpc>
+                <a:spcPts val="1500"/>
+              </a:lnSpc>
+              <a:buNone/>
+            </a:pPr>
+            <a:r>
+              <a:rPr lang="en-US" sz="1150" dirty="0">
+                <a:solidFill>
+                  <a:srgbClr val="5B5B58"/>
+                </a:solidFill>
+              </a:rPr>
+              <a:t> — admin login → post request → AI match → donor responds → staff see contacts &amp; health flags → fulfillment → resting window</a:t>
+            </a:r>
+            <a:endParaRPr lang="en-US" sz="1150" dirty="0"/>
+          </a:p>
+        </p:txBody>
+      </p:sp>
+      <p:sp>
+        <p:nvSpPr>
+          <p:cNvPr id="8" name="Text 6"/>
+          <p:cNvSpPr/>
+          <p:nvPr/>
+        </p:nvSpPr>
+        <p:spPr>
+          <a:xfrm>
+            <a:off x="822960" y="3547872"/>
+            <a:ext cx="5797296" cy="777240"/>
+          </a:xfrm>
+          <a:prstGeom prst="rect">
+            <a:avLst/>
+          </a:prstGeom>
+          <a:noFill/>
+          <a:ln/>
+        </p:spPr>
+        <p:txBody>
+          <a:bodyPr wrap="square" rtlCol="0" anchor="t"/>
+          <a:lstStyle/>
+          <a:p>
+            <a:pPr indent="0" marL="0">
+              <a:lnSpc>
+                <a:spcPts val="1500"/>
+              </a:lnSpc>
+              <a:buNone/>
+            </a:pPr>
+            <a:r>
+              <a:rPr lang="en-US" sz="1300" b="1" dirty="0">
+                <a:solidFill>
+                  <a:srgbClr val="0F766E"/>
+                </a:solidFill>
+              </a:rPr>
+              <a:t>✓  </a:t>
+            </a:r>
+            <a:pPr indent="0" marL="0">
+              <a:lnSpc>
+                <a:spcPts val="1500"/>
+              </a:lnSpc>
+              <a:buNone/>
+            </a:pPr>
+            <a:r>
+              <a:rPr lang="en-US" sz="1150" b="1" dirty="0">
+                <a:solidFill>
+                  <a:srgbClr val="1B1B1D"/>
+                </a:solidFill>
+              </a:rPr>
+              <a:t>Tested end-to-end</a:t>
+            </a:r>
+            <a:pPr indent="0" marL="0">
+              <a:lnSpc>
+                <a:spcPts val="1500"/>
+              </a:lnSpc>
+              <a:buNone/>
+            </a:pPr>
+            <a:r>
+              <a:rPr lang="en-US" sz="1150" dirty="0">
+                <a:solidFill>
+                  <a:srgbClr val="5B5B58"/>
+                </a:solidFill>
+              </a:rPr>
+              <a:t> — automated API smoke tests for auth, signup, verification, matching (including the new-donor guarantee) and privacy redaction</a:t>
+            </a:r>
+            <a:endParaRPr lang="en-US" sz="1150" dirty="0"/>
+          </a:p>
+        </p:txBody>
+      </p:sp>
+      <p:sp>
+        <p:nvSpPr>
+          <p:cNvPr id="9" name="Text 7"/>
+          <p:cNvSpPr/>
+          <p:nvPr/>
+        </p:nvSpPr>
+        <p:spPr>
+          <a:xfrm>
+            <a:off x="822960" y="4352544"/>
+            <a:ext cx="5797296" cy="777240"/>
+          </a:xfrm>
+          <a:prstGeom prst="rect">
+            <a:avLst/>
+          </a:prstGeom>
+          <a:noFill/>
+          <a:ln/>
+        </p:spPr>
+        <p:txBody>
+          <a:bodyPr wrap="square" rtlCol="0" anchor="t"/>
+          <a:lstStyle/>
+          <a:p>
+            <a:pPr indent="0" marL="0">
+              <a:lnSpc>
+                <a:spcPts val="1500"/>
+              </a:lnSpc>
+              <a:buNone/>
+            </a:pPr>
+            <a:r>
+              <a:rPr lang="en-US" sz="1300" b="1" dirty="0">
+                <a:solidFill>
+                  <a:srgbClr val="0F766E"/>
+                </a:solidFill>
+              </a:rPr>
+              <a:t>✓  </a:t>
+            </a:r>
+            <a:pPr indent="0" marL="0">
+              <a:lnSpc>
+                <a:spcPts val="1500"/>
+              </a:lnSpc>
+              <a:buNone/>
+            </a:pPr>
+            <a:r>
+              <a:rPr lang="en-US" sz="1150" b="1" dirty="0">
+                <a:solidFill>
+                  <a:srgbClr val="1B1B1D"/>
+                </a:solidFill>
+              </a:rPr>
+              <a:t>Real bugs found &amp; fixed in the field</a:t>
+            </a:r>
+            <a:pPr indent="0" marL="0">
+              <a:lnSpc>
+                <a:spcPts val="1500"/>
+              </a:lnSpc>
+              <a:buNone/>
+            </a:pPr>
+            <a:r>
+              <a:rPr lang="en-US" sz="1150" dirty="0">
+                <a:solidFill>
+                  <a:srgbClr val="5B5B58"/>
+                </a:solidFill>
+              </a:rPr>
+              <a:t> — negative resting countdowns, patient-name leakage, and new donors excluded from matching: all reproduced, fixed and re-verified on production</a:t>
+            </a:r>
+            <a:endParaRPr lang="en-US" sz="1150" dirty="0"/>
+          </a:p>
+        </p:txBody>
+      </p:sp>
+      <p:sp>
+        <p:nvSpPr>
+          <p:cNvPr id="10" name="Text 8"/>
+          <p:cNvSpPr/>
+          <p:nvPr/>
+        </p:nvSpPr>
+        <p:spPr>
+          <a:xfrm>
+            <a:off x="822960" y="5157216"/>
+            <a:ext cx="5797296" cy="777240"/>
+          </a:xfrm>
+          <a:prstGeom prst="rect">
+            <a:avLst/>
+          </a:prstGeom>
+          <a:noFill/>
+          <a:ln/>
+        </p:spPr>
+        <p:txBody>
+          <a:bodyPr wrap="square" rtlCol="0" anchor="t"/>
+          <a:lstStyle/>
+          <a:p>
+            <a:pPr indent="0" marL="0">
+              <a:lnSpc>
+                <a:spcPts val="1500"/>
+              </a:lnSpc>
+              <a:buNone/>
+            </a:pPr>
+            <a:r>
+              <a:rPr lang="en-US" sz="1300" b="1" dirty="0">
+                <a:solidFill>
+                  <a:srgbClr val="0F766E"/>
+                </a:solidFill>
+              </a:rPr>
+              <a:t>✓  </a:t>
+            </a:r>
+            <a:pPr indent="0" marL="0">
+              <a:lnSpc>
+                <a:spcPts val="1500"/>
+              </a:lnSpc>
+              <a:buNone/>
+            </a:pPr>
+            <a:r>
+              <a:rPr lang="en-US" sz="1150" b="1" dirty="0">
+                <a:solidFill>
+                  <a:srgbClr val="1B1B1D"/>
+                </a:solidFill>
+              </a:rPr>
+              <a:t>Honest scope</a:t>
+            </a:r>
+            <a:pPr indent="0" marL="0">
+              <a:lnSpc>
+                <a:spcPts val="1500"/>
+              </a:lnSpc>
+              <a:buNone/>
+            </a:pPr>
+            <a:r>
+              <a:rPr lang="en-US" sz="1150" dirty="0">
+                <a:solidFill>
+                  <a:srgbClr val="5B5B58"/>
+                </a:solidFill>
+              </a:rPr>
+              <a:t> — in-memory prototype storage; production needs a real database and SMS alerts. We say so in the README — and the roadmap is concrete.</a:t>
+            </a:r>
+            <a:endParaRPr lang="en-US" sz="1150" dirty="0"/>
+          </a:p>
+        </p:txBody>
+      </p:sp>
+      <p:sp>
+        <p:nvSpPr>
+          <p:cNvPr id="11" name="Shape 9"/>
+          <p:cNvSpPr/>
+          <p:nvPr/>
+        </p:nvSpPr>
+        <p:spPr>
+          <a:xfrm>
+            <a:off x="7168896" y="1737360"/>
+            <a:ext cx="4453128" cy="4297680"/>
+          </a:xfrm>
+          <a:prstGeom prst="roundRect">
+            <a:avLst>
+              <a:gd name="adj" fmla="val 2128"/>
+            </a:avLst>
+          </a:prstGeom>
+          <a:solidFill>
+            <a:srgbClr val="E6F5F3"/>
+          </a:solidFill>
+          <a:ln w="15875">
+            <a:solidFill>
+              <a:srgbClr val="BFE3DF"/>
+            </a:solidFill>
+            <a:prstDash val="solid"/>
+          </a:ln>
+        </p:spPr>
+      </p:sp>
+      <p:sp>
+        <p:nvSpPr>
+          <p:cNvPr id="12" name="Text 10"/>
+          <p:cNvSpPr/>
+          <p:nvPr/>
+        </p:nvSpPr>
+        <p:spPr>
+          <a:xfrm>
+            <a:off x="7388352" y="1901952"/>
+            <a:ext cx="4014216" cy="365760"/>
+          </a:xfrm>
+          <a:prstGeom prst="rect">
+            <a:avLst/>
+          </a:prstGeom>
+          <a:noFill/>
+          <a:ln/>
+        </p:spPr>
+        <p:txBody>
+          <a:bodyPr wrap="square" rtlCol="0" anchor="ctr"/>
+          <a:lstStyle/>
+          <a:p>
+            <a:pPr indent="0" marL="0">
+              <a:buNone/>
+            </a:pPr>
+            <a:r>
+              <a:rPr lang="en-US" sz="1450" b="1" dirty="0">
+                <a:solidFill>
+                  <a:srgbClr val="0F766E"/>
+                </a:solidFill>
+              </a:rPr>
+              <a:t>Verify it in 2 minutes</a:t>
+            </a:r>
+            <a:endParaRPr lang="en-US" sz="1450" dirty="0"/>
+          </a:p>
+        </p:txBody>
+      </p:sp>
+      <p:sp>
+        <p:nvSpPr>
+          <p:cNvPr id="13" name="Text 11"/>
+          <p:cNvSpPr/>
+          <p:nvPr/>
+        </p:nvSpPr>
+        <p:spPr>
+          <a:xfrm>
+            <a:off x="7424928" y="2359152"/>
+            <a:ext cx="3941064" cy="621792"/>
+          </a:xfrm>
+          <a:prstGeom prst="rect">
+            <a:avLst/>
+          </a:prstGeom>
+          <a:noFill/>
+          <a:ln/>
+        </p:spPr>
+        <p:txBody>
+          <a:bodyPr wrap="square" rtlCol="0" anchor="t"/>
+          <a:lstStyle/>
+          <a:p>
+            <a:pPr indent="0" marL="0">
+              <a:lnSpc>
+                <a:spcPts val="1400"/>
+              </a:lnSpc>
+              <a:buNone/>
+            </a:pPr>
+            <a:r>
+              <a:rPr lang="en-US" sz="1150" b="1" dirty="0">
+                <a:solidFill>
+                  <a:srgbClr val="0F766E"/>
+                </a:solidFill>
+              </a:rPr>
+              <a:t>1.  </a:t>
+            </a:r>
+            <a:pPr indent="0" marL="0">
+              <a:lnSpc>
+                <a:spcPts val="1400"/>
+              </a:lnSpc>
+              <a:buNone/>
+            </a:pPr>
+            <a:r>
+              <a:rPr lang="en-US" sz="1150" dirty="0">
+                <a:solidFill>
+                  <a:srgbClr val="0B4A44"/>
+                </a:solidFill>
+              </a:rPr>
+              <a:t>Open bloodbridge-ai-two.vercel.app</a:t>
+            </a:r>
+            <a:endParaRPr lang="en-US" sz="1150" dirty="0"/>
+          </a:p>
+        </p:txBody>
+      </p:sp>
+      <p:sp>
+        <p:nvSpPr>
+          <p:cNvPr id="14" name="Text 12"/>
+          <p:cNvSpPr/>
+          <p:nvPr/>
+        </p:nvSpPr>
+        <p:spPr>
+          <a:xfrm>
+            <a:off x="7424928" y="3017520"/>
+            <a:ext cx="3941064" cy="621792"/>
+          </a:xfrm>
+          <a:prstGeom prst="rect">
+            <a:avLst/>
+          </a:prstGeom>
+          <a:noFill/>
+          <a:ln/>
+        </p:spPr>
+        <p:txBody>
+          <a:bodyPr wrap="square" rtlCol="0" anchor="t"/>
+          <a:lstStyle/>
+          <a:p>
+            <a:pPr indent="0" marL="0">
+              <a:lnSpc>
+                <a:spcPts val="1400"/>
+              </a:lnSpc>
+              <a:buNone/>
+            </a:pPr>
+            <a:r>
+              <a:rPr lang="en-US" sz="1150" b="1" dirty="0">
+                <a:solidFill>
+                  <a:srgbClr val="0F766E"/>
+                </a:solidFill>
+              </a:rPr>
+              <a:t>2.  </a:t>
+            </a:r>
+            <a:pPr indent="0" marL="0">
+              <a:lnSpc>
+                <a:spcPts val="1400"/>
+              </a:lnSpc>
+              <a:buNone/>
+            </a:pPr>
+            <a:r>
+              <a:rPr lang="en-US" sz="1150" dirty="0">
+                <a:solidFill>
+                  <a:srgbClr val="0B4A44"/>
+                </a:solidFill>
+              </a:rPr>
+              <a:t>Login as admin: 03000000001 / admin123</a:t>
+            </a:r>
+            <a:endParaRPr lang="en-US" sz="1150" dirty="0"/>
+          </a:p>
+        </p:txBody>
+      </p:sp>
+      <p:sp>
+        <p:nvSpPr>
+          <p:cNvPr id="15" name="Text 13"/>
+          <p:cNvSpPr/>
+          <p:nvPr/>
+        </p:nvSpPr>
+        <p:spPr>
+          <a:xfrm>
+            <a:off x="7424928" y="3675888"/>
+            <a:ext cx="3941064" cy="621792"/>
+          </a:xfrm>
+          <a:prstGeom prst="rect">
+            <a:avLst/>
+          </a:prstGeom>
+          <a:noFill/>
+          <a:ln/>
+        </p:spPr>
+        <p:txBody>
+          <a:bodyPr wrap="square" rtlCol="0" anchor="t"/>
+          <a:lstStyle/>
+          <a:p>
+            <a:pPr indent="0" marL="0">
+              <a:lnSpc>
+                <a:spcPts val="1400"/>
+              </a:lnSpc>
+              <a:buNone/>
+            </a:pPr>
+            <a:r>
+              <a:rPr lang="en-US" sz="1150" b="1" dirty="0">
+                <a:solidFill>
+                  <a:srgbClr val="0F766E"/>
+                </a:solidFill>
+              </a:rPr>
+              <a:t>3.  </a:t>
+            </a:r>
+            <a:pPr indent="0" marL="0">
+              <a:lnSpc>
+                <a:spcPts val="1400"/>
+              </a:lnSpc>
+              <a:buNone/>
+            </a:pPr>
+            <a:r>
+              <a:rPr lang="en-US" sz="1150" dirty="0">
+                <a:solidFill>
+                  <a:srgbClr val="0B4A44"/>
+                </a:solidFill>
+              </a:rPr>
+              <a:t>Post an emergency request — watch the AI match</a:t>
+            </a:r>
+            <a:endParaRPr lang="en-US" sz="1150" dirty="0"/>
+          </a:p>
+        </p:txBody>
+      </p:sp>
+      <p:sp>
+        <p:nvSpPr>
+          <p:cNvPr id="16" name="Text 14"/>
+          <p:cNvSpPr/>
+          <p:nvPr/>
+        </p:nvSpPr>
+        <p:spPr>
+          <a:xfrm>
+            <a:off x="7424928" y="4334256"/>
+            <a:ext cx="3941064" cy="621792"/>
+          </a:xfrm>
+          <a:prstGeom prst="rect">
+            <a:avLst/>
+          </a:prstGeom>
+          <a:noFill/>
+          <a:ln/>
+        </p:spPr>
+        <p:txBody>
+          <a:bodyPr wrap="square" rtlCol="0" anchor="t"/>
+          <a:lstStyle/>
+          <a:p>
+            <a:pPr indent="0" marL="0">
+              <a:lnSpc>
+                <a:spcPts val="1400"/>
+              </a:lnSpc>
+              <a:buNone/>
+            </a:pPr>
+            <a:r>
+              <a:rPr lang="en-US" sz="1150" b="1" dirty="0">
+                <a:solidFill>
+                  <a:srgbClr val="0F766E"/>
+                </a:solidFill>
+              </a:rPr>
+              <a:t>4.  </a:t>
+            </a:r>
+            <a:pPr indent="0" marL="0">
+              <a:lnSpc>
+                <a:spcPts val="1400"/>
+              </a:lnSpc>
+              <a:buNone/>
+            </a:pPr>
+            <a:r>
+              <a:rPr lang="en-US" sz="1150" dirty="0">
+                <a:solidFill>
+                  <a:srgbClr val="0B4A44"/>
+                </a:solidFill>
+              </a:rPr>
+              <a:t>Register as a donor — 8-question screening</a:t>
+            </a:r>
+            <a:endParaRPr lang="en-US" sz="1150" dirty="0"/>
+          </a:p>
+        </p:txBody>
+      </p:sp>
+      <p:sp>
+        <p:nvSpPr>
+          <p:cNvPr id="17" name="Text 15"/>
+          <p:cNvSpPr/>
+          <p:nvPr/>
+        </p:nvSpPr>
+        <p:spPr>
+          <a:xfrm>
+            <a:off x="7424928" y="4992624"/>
+            <a:ext cx="3941064" cy="621792"/>
+          </a:xfrm>
+          <a:prstGeom prst="rect">
+            <a:avLst/>
+          </a:prstGeom>
+          <a:noFill/>
+          <a:ln/>
+        </p:spPr>
+        <p:txBody>
+          <a:bodyPr wrap="square" rtlCol="0" anchor="t"/>
+          <a:lstStyle/>
+          <a:p>
+            <a:pPr indent="0" marL="0">
+              <a:lnSpc>
+                <a:spcPts val="1400"/>
+              </a:lnSpc>
+              <a:buNone/>
+            </a:pPr>
+            <a:r>
+              <a:rPr lang="en-US" sz="1150" b="1" dirty="0">
+                <a:solidFill>
+                  <a:srgbClr val="0F766E"/>
+                </a:solidFill>
+              </a:rPr>
+              <a:t>5.  </a:t>
+            </a:r>
+            <a:pPr indent="0" marL="0">
+              <a:lnSpc>
+                <a:spcPts val="1400"/>
+              </a:lnSpc>
+              <a:buNone/>
+            </a:pPr>
+            <a:r>
+              <a:rPr lang="en-US" sz="1150" dirty="0">
+                <a:solidFill>
+                  <a:srgbClr val="0B4A44"/>
+                </a:solidFill>
+              </a:rPr>
+              <a:t>Browse the repo: github.com/sana1234-tech/bloodbridge-AI</a:t>
+            </a:r>
+            <a:endParaRPr lang="en-US" sz="1150" dirty="0"/>
+          </a:p>
+        </p:txBody>
+      </p:sp>
+    </p:spTree>
+  </p:cSld>
+  <p:clrMapOvr>
+    <a:masterClrMapping/>
+  </p:clrMapOvr>
+</p:sld>
+</file>
+
+<file path=ppt/slides/slide11.xml><?xml version="1.0" encoding="utf-8"?>
+<p:sld xmlns:a="http://schemas.openxmlformats.org/drawingml/2006/main" xmlns:r="http://schemas.openxmlformats.org/officeDocument/2006/relationships" xmlns:p="http://schemas.openxmlformats.org/presentationml/2006/main">
+  <p:cSld name="Slide 11">
+    <p:bg>
+      <p:bgPr>
+        <a:solidFill>
+          <a:srgbClr val="FFFFFF"/>
+        </a:solidFill>
+      </p:bgPr>
+    </p:bg>
+    <p:spTree>
+      <p:nvGrpSpPr>
+        <p:cNvPr id="1" name=""/>
+        <p:cNvGrpSpPr/>
+        <p:nvPr/>
+      </p:nvGrpSpPr>
+      <p:grpSpPr>
+        <a:xfrm>
+          <a:off x="0" y="0"/>
+          <a:ext cx="0" cy="0"/>
+          <a:chOff x="0" y="0"/>
+          <a:chExt cx="0" cy="0"/>
+        </a:xfrm>
+      </p:grpSpPr>
+      <p:sp>
+        <p:nvSpPr>
+          <p:cNvPr id="2" name="Shape 0"/>
+          <p:cNvSpPr/>
+          <p:nvPr/>
+        </p:nvSpPr>
+        <p:spPr>
+          <a:xfrm>
+            <a:off x="0" y="0"/>
+            <a:ext cx="82296" cy="6858000"/>
+          </a:xfrm>
+          <a:prstGeom prst="rect">
+            <a:avLst/>
+          </a:prstGeom>
+          <a:solidFill>
+            <a:srgbClr val="C31F2E"/>
+          </a:solidFill>
+          <a:ln/>
+        </p:spPr>
+      </p:sp>
+      <p:sp>
+        <p:nvSpPr>
+          <p:cNvPr id="3" name="Text 1"/>
+          <p:cNvSpPr/>
+          <p:nvPr/>
+        </p:nvSpPr>
+        <p:spPr>
+          <a:xfrm>
+            <a:off x="566928" y="384048"/>
+            <a:ext cx="11055096" cy="310896"/>
+          </a:xfrm>
+          <a:prstGeom prst="rect">
+            <a:avLst/>
+          </a:prstGeom>
+          <a:noFill/>
+          <a:ln/>
+        </p:spPr>
+        <p:txBody>
+          <a:bodyPr wrap="square" rtlCol="0" anchor="ctr"/>
+          <a:lstStyle/>
+          <a:p>
+            <a:pPr indent="0" marL="0">
+              <a:buNone/>
+            </a:pPr>
+            <a:r>
+              <a:rPr lang="en-US" sz="1100" b="1" spc="300" kern="0" dirty="0">
+                <a:solidFill>
+                  <a:srgbClr val="C31F2E"/>
+                </a:solidFill>
+              </a:rPr>
               <a:t>ROADMAP &amp; CLOSE</a:t>
             </a:r>
             <a:endParaRPr lang="en-US" sz="1100" dirty="0"/>
@@ -2177,7 +3111,7 @@
                   <a:srgbClr val="1B1B1D"/>
                 </a:solidFill>
               </a:rPr>
-              <a:t>Next: SMS/WhatsApp alerts, map view,</a:t>
+              <a:t>Next: MongoDB persistence, SMS/WhatsApp alerts,</a:t>
             </a:r>
             <a:endParaRPr lang="en-US" sz="2700" dirty="0"/>
           </a:p>
@@ -2194,7 +3128,7 @@
                   <a:srgbClr val="1B1B1D"/>
                 </a:solidFill>
               </a:rPr>
-              <a:t>blood-unit expiry tracking, MongoDB + auth.</a:t>
+              <a:t>map view, blood-unit expiry tracking.</a:t>
             </a:r>
             <a:endParaRPr lang="en-US" sz="2700" dirty="0"/>
           </a:p>
@@ -2233,7 +3167,7 @@
                   <a:srgbClr val="5B5B58"/>
                 </a:solidFill>
               </a:rPr>
-              <a:t>The coordinates, eligibility data and forecast loop are already in place — the roadmap builds on what runs today, not on promises.</a:t>
+              <a:t>Authentication, verification, health screening, privacy and the forecast loop already run in production — the roadmap builds on what runs today, not on promises.</a:t>
             </a:r>
             <a:endParaRPr lang="en-US" sz="1500" dirty="0"/>
           </a:p>
@@ -2316,7 +3250,7 @@
                   <a:srgbClr val="8B8B87"/>
                 </a:solidFill>
               </a:rPr>
-              <a:t>BloodBridge AI — Alibaba Cloud AI Hackathon Pakistan 2026 · Healthcare · Thank you</a:t>
+              <a:t>BloodBridge AI — Project Presentation  ·  Live: bloodbridge-ai-two.vercel.app  ·  GitHub: github.com/sana1234-tech/bloodbridge-AI  ·  Thank you</a:t>
             </a:r>
             <a:endParaRPr lang="en-US" sz="1200" dirty="0"/>
           </a:p>
@@ -2898,7 +3832,7 @@
                   <a:srgbClr val="1B1B1D"/>
                 </a:solidFill>
               </a:rPr>
-              <a:t>Blood banks can’t see demand coming</a:t>
+              <a:t>Anyone can post anything</a:t>
             </a:r>
             <a:endParaRPr lang="en-US" sz="1400" dirty="0"/>
           </a:p>
@@ -2937,7 +3871,7 @@
                   <a:srgbClr val="5B5B58"/>
                 </a:solidFill>
               </a:rPr>
-              <a:t>Inventory decisions are made on instinct. Rare groups run out without warning — while donor phone numbers circulate publicly and get misused.</a:t>
+              <a:t>Unverified requests circulate publicly with patient names and donor phone numbers attached — no way to tell a genuine hospital need from spam, and privacy is traded away in the panic.</a:t>
             </a:r>
             <a:endParaRPr lang="en-US" sz="1050" dirty="0"/>
           </a:p>
@@ -3427,7 +4361,7 @@
                   <a:srgbClr val="5B5B58"/>
                 </a:solidFill>
               </a:rPr>
-              <a:t>Ranks compatible donors by blood type, distance, donation recency and reliability — and hard-blocks anyone inside the mandatory resting window.</a:t>
+              <a:t>Ranks compatible donors by blood type, distance, donation recency and reliability — hard-blocks anyone inside the mandatory resting window, and guarantees newly registered donors are visible immediately.</a:t>
             </a:r>
             <a:endParaRPr lang="en-US" sz="1050" dirty="0"/>
           </a:p>
@@ -3747,7 +4681,7 @@
                   <a:srgbClr val="5B5B58"/>
                 </a:solidFill>
               </a:rPr>
-              <a:t>Instant answers on compatibility, eligibility rules, live inventory and how to submit a request.</a:t>
+              <a:t>Instant answers on compatibility, eligibility rules, live inventory and how requests work — staff-only posting is explained right in the chat.</a:t>
             </a:r>
             <a:endParaRPr lang="en-US" sz="1050" dirty="0"/>
           </a:p>
@@ -3800,7 +4734,7 @@
                   <a:srgbClr val="5B5B58"/>
                 </a:solidFill>
               </a:rPr>
-              <a:t>hospital &amp; blood-bank staff post verified requests · voluntary donors register and respond · coordinators forecast and plan stock.</a:t>
+              <a:t>verified hospital &amp; blood-bank staff post requests · screened donors register and respond · admins approve institutions and plan stock.</a:t>
             </a:r>
             <a:endParaRPr lang="en-US" sz="1050" dirty="0"/>
           </a:p>
@@ -3887,7 +4821,7 @@
                   <a:srgbClr val="8B8B87"/>
                 </a:solidFill>
               </a:rPr>
-              <a:t>Live dashboard — inventory, donors by city, requests (patient names masked)</a:t>
+              <a:t>Live dashboard — inventory, donors by city, requests (patient names never shown)</a:t>
             </a:r>
             <a:endParaRPr lang="en-US" sz="950" dirty="0"/>
           </a:p>
@@ -3975,7 +4909,7 @@
                   <a:srgbClr val="C31F2E"/>
                 </a:solidFill>
               </a:rPr>
-              <a:t>THE NEED · THE IMPACT IT MAKES</a:t>
+              <a:t>ACCESS CONTROL · WHO CAN DO WHAT</a:t>
             </a:r>
             <a:endParaRPr lang="en-US" sz="1100" dirty="0"/>
           </a:p>
@@ -4014,7 +4948,7 @@
                   <a:srgbClr val="1B1B1D"/>
                 </a:solidFill>
               </a:rPr>
-              <a:t>From a phone tree to a </a:t>
+              <a:t>Two account types, </a:t>
             </a:r>
             <a:pPr indent="0" marL="0">
               <a:lnSpc>
@@ -4028,21 +4962,7 @@
                   <a:srgbClr val="C31F2E"/>
                 </a:solidFill>
               </a:rPr>
-              <a:t>match in seconds</a:t>
-            </a:r>
-            <a:pPr indent="0" marL="0">
-              <a:lnSpc>
-                <a:spcPts val="3000"/>
-              </a:lnSpc>
-              <a:buNone/>
-            </a:pPr>
-            <a:r>
-              <a:rPr lang="en-US" sz="2600" b="1" dirty="0">
-                <a:solidFill>
-                  <a:srgbClr val="1B1B1D"/>
-                </a:solidFill>
-              </a:rPr>
-              <a:t> — with safety enforced by design.</a:t>
+              <a:t>verified before they can act.</a:t>
             </a:r>
             <a:endParaRPr lang="en-US" sz="2600" dirty="0"/>
           </a:p>
@@ -4056,16 +4976,16 @@
         </p:nvSpPr>
         <p:spPr>
           <a:xfrm>
-            <a:off x="566928" y="1783080"/>
-            <a:ext cx="2612898" cy="2377440"/>
+            <a:off x="512064" y="1682496"/>
+            <a:ext cx="4590288" cy="2910078"/>
           </a:xfrm>
           <a:prstGeom prst="roundRect">
             <a:avLst>
-              <a:gd name="adj" fmla="val 3846"/>
+              <a:gd name="adj" fmla="val 2514"/>
             </a:avLst>
           </a:prstGeom>
           <a:solidFill>
-            <a:srgbClr val="FFFFFF"/>
+            <a:srgbClr val="FAFAF8"/>
           </a:solidFill>
           <a:ln w="15875">
             <a:solidFill>
@@ -4075,16 +4995,40 @@
           </a:ln>
         </p:spPr>
       </p:sp>
-      <p:sp>
-        <p:nvSpPr>
-          <p:cNvPr id="6" name="Text 4"/>
-          <p:cNvSpPr/>
-          <p:nvPr/>
-        </p:nvSpPr>
-        <p:spPr>
-          <a:xfrm>
-            <a:off x="566928" y="2011680"/>
-            <a:ext cx="2612898" cy="822960"/>
+      <p:pic>
+        <p:nvPicPr>
+          <p:cNvPr id="6" name="Image 0" descr="C:\Users\SANA KHAN\Documents\Qoder\2026-09-03\chat-1\bloodbridge-ai\assets\login.png">    </p:cNvPr>
+          <p:cNvPicPr>
+            <a:picLocks noChangeAspect="1"/>
+          </p:cNvPicPr>
+          <p:nvPr/>
+        </p:nvPicPr>
+        <p:blipFill>
+          <a:blip r:embed="rId1"/>
+          <a:stretch>
+            <a:fillRect/>
+          </a:stretch>
+        </p:blipFill>
+        <p:spPr>
+          <a:xfrm>
+            <a:off x="566928" y="1737360"/>
+            <a:ext cx="4480560" cy="2800350"/>
+          </a:xfrm>
+          <a:prstGeom prst="rect">
+            <a:avLst/>
+          </a:prstGeom>
+        </p:spPr>
+      </p:pic>
+      <p:sp>
+        <p:nvSpPr>
+          <p:cNvPr id="7" name="Text 4"/>
+          <p:cNvSpPr/>
+          <p:nvPr/>
+        </p:nvSpPr>
+        <p:spPr>
+          <a:xfrm>
+            <a:off x="512064" y="4647438"/>
+            <a:ext cx="4590288" cy="274320"/>
           </a:xfrm>
           <a:prstGeom prst="rect">
             <a:avLst/>
@@ -4100,78 +5044,39 @@
               <a:buNone/>
             </a:pPr>
             <a:r>
-              <a:rPr lang="en-US" sz="3800" b="1" dirty="0">
-                <a:solidFill>
-                  <a:srgbClr val="C31F2E"/>
-                </a:solidFill>
-              </a:rPr>
-              <a:t>10</a:t>
-            </a:r>
-            <a:endParaRPr lang="en-US" sz="3800" dirty="0"/>
-          </a:p>
-        </p:txBody>
-      </p:sp>
-      <p:sp>
-        <p:nvSpPr>
-          <p:cNvPr id="7" name="Text 5"/>
-          <p:cNvSpPr/>
-          <p:nvPr/>
-        </p:nvSpPr>
-        <p:spPr>
-          <a:xfrm>
-            <a:off x="731520" y="2834640"/>
-            <a:ext cx="2283714" cy="1188720"/>
-          </a:xfrm>
-          <a:prstGeom prst="rect">
-            <a:avLst/>
-          </a:prstGeom>
-          <a:noFill/>
-          <a:ln/>
-        </p:spPr>
-        <p:txBody>
-          <a:bodyPr wrap="square" rtlCol="0" anchor="ctr"/>
-          <a:lstStyle/>
-          <a:p>
-            <a:pPr algn="ctr" indent="0" marL="0">
-              <a:lnSpc>
-                <a:spcPts val="1350"/>
-              </a:lnSpc>
-              <a:buNone/>
-            </a:pPr>
-            <a:r>
-              <a:rPr lang="en-US" sz="1000" dirty="0">
-                <a:solidFill>
-                  <a:srgbClr val="5B5B58"/>
-                </a:solidFill>
-              </a:rPr>
-              <a:t>ranked, medically eligible donors surfaced instantly per request — ranked by compatibility, distance &amp; ETA</a:t>
-            </a:r>
-            <a:endParaRPr lang="en-US" sz="1000" dirty="0"/>
-          </a:p>
-        </p:txBody>
-      </p:sp>
-      <p:sp>
-        <p:nvSpPr>
-          <p:cNvPr id="8" name="Shape 6"/>
-          <p:cNvSpPr/>
-          <p:nvPr/>
-        </p:nvSpPr>
-        <p:spPr>
-          <a:xfrm>
-            <a:off x="3380994" y="1783080"/>
-            <a:ext cx="2612898" cy="2377440"/>
+              <a:rPr lang="en-US" sz="950" dirty="0">
+                <a:solidFill>
+                  <a:srgbClr val="8B8B87"/>
+                </a:solidFill>
+              </a:rPr>
+              <a:t>Login — role selection (Hospital Staff / Donor)</a:t>
+            </a:r>
+            <a:endParaRPr lang="en-US" sz="950" dirty="0"/>
+          </a:p>
+        </p:txBody>
+      </p:sp>
+      <p:sp>
+        <p:nvSpPr>
+          <p:cNvPr id="8" name="Shape 5"/>
+          <p:cNvSpPr/>
+          <p:nvPr/>
+        </p:nvSpPr>
+        <p:spPr>
+          <a:xfrm>
+            <a:off x="5367528" y="1691640"/>
+            <a:ext cx="6254496" cy="1389888"/>
           </a:xfrm>
           <a:prstGeom prst="roundRect">
             <a:avLst>
-              <a:gd name="adj" fmla="val 3846"/>
+              <a:gd name="adj" fmla="val 6579"/>
             </a:avLst>
           </a:prstGeom>
           <a:solidFill>
-            <a:srgbClr val="FFFFFF"/>
+            <a:srgbClr val="FDECEE"/>
           </a:solidFill>
           <a:ln w="15875">
             <a:solidFill>
-              <a:srgbClr val="E7E5E0"/>
+              <a:srgbClr val="F0C7CB"/>
             </a:solidFill>
             <a:prstDash val="solid"/>
           </a:ln>
@@ -4179,14 +5084,14 @@
       </p:sp>
       <p:sp>
         <p:nvSpPr>
-          <p:cNvPr id="9" name="Text 7"/>
-          <p:cNvSpPr/>
-          <p:nvPr/>
-        </p:nvSpPr>
-        <p:spPr>
-          <a:xfrm>
-            <a:off x="3380994" y="2011680"/>
-            <a:ext cx="2612898" cy="822960"/>
+          <p:cNvPr id="9" name="Text 6"/>
+          <p:cNvSpPr/>
+          <p:nvPr/>
+        </p:nvSpPr>
+        <p:spPr>
+          <a:xfrm>
+            <a:off x="5586984" y="1819656"/>
+            <a:ext cx="5815584" cy="329184"/>
           </a:xfrm>
           <a:prstGeom prst="rect">
             <a:avLst/>
@@ -4198,278 +5103,74 @@
           <a:bodyPr wrap="square" rtlCol="0" anchor="ctr"/>
           <a:lstStyle/>
           <a:p>
-            <a:pPr algn="ctr" indent="0" marL="0">
-              <a:buNone/>
-            </a:pPr>
-            <a:r>
-              <a:rPr lang="en-US" sz="3800" b="1" dirty="0">
-                <a:solidFill>
-                  <a:srgbClr val="C31F2E"/>
-                </a:solidFill>
-              </a:rPr>
-              <a:t>17</a:t>
-            </a:r>
-            <a:endParaRPr lang="en-US" sz="3800" dirty="0"/>
-          </a:p>
-        </p:txBody>
-      </p:sp>
-      <p:sp>
-        <p:nvSpPr>
-          <p:cNvPr id="10" name="Text 8"/>
-          <p:cNvSpPr/>
-          <p:nvPr/>
-        </p:nvSpPr>
-        <p:spPr>
-          <a:xfrm>
-            <a:off x="3545586" y="2834640"/>
-            <a:ext cx="2283714" cy="1188720"/>
-          </a:xfrm>
-          <a:prstGeom prst="rect">
-            <a:avLst/>
-          </a:prstGeom>
-          <a:noFill/>
-          <a:ln/>
-        </p:spPr>
-        <p:txBody>
-          <a:bodyPr wrap="square" rtlCol="0" anchor="ctr"/>
-          <a:lstStyle/>
-          <a:p>
-            <a:pPr algn="ctr" indent="0" marL="0">
-              <a:lnSpc>
-                <a:spcPts val="1350"/>
-              </a:lnSpc>
-              <a:buNone/>
-            </a:pPr>
-            <a:r>
-              <a:rPr lang="en-US" sz="1000" dirty="0">
-                <a:solidFill>
-                  <a:srgbClr val="5B5B58"/>
-                </a:solidFill>
-              </a:rPr>
-              <a:t>donors automatically blocked in one live demo request for being inside the 90/120-day resting window</a:t>
-            </a:r>
-            <a:endParaRPr lang="en-US" sz="1000" dirty="0"/>
-          </a:p>
-        </p:txBody>
-      </p:sp>
-      <p:sp>
-        <p:nvSpPr>
-          <p:cNvPr id="11" name="Shape 9"/>
-          <p:cNvSpPr/>
-          <p:nvPr/>
-        </p:nvSpPr>
-        <p:spPr>
-          <a:xfrm>
-            <a:off x="6195060" y="1783080"/>
-            <a:ext cx="2612898" cy="2377440"/>
+            <a:pPr indent="0" marL="0">
+              <a:buNone/>
+            </a:pPr>
+            <a:r>
+              <a:rPr lang="en-US" sz="1400" b="1" dirty="0">
+                <a:solidFill>
+                  <a:srgbClr val="8F1620"/>
+                </a:solidFill>
+              </a:rPr>
+              <a:t>Hospital / blood-bank staff</a:t>
+            </a:r>
+            <a:endParaRPr lang="en-US" sz="1400" dirty="0"/>
+          </a:p>
+        </p:txBody>
+      </p:sp>
+      <p:sp>
+        <p:nvSpPr>
+          <p:cNvPr id="10" name="Text 7"/>
+          <p:cNvSpPr/>
+          <p:nvPr/>
+        </p:nvSpPr>
+        <p:spPr>
+          <a:xfrm>
+            <a:off x="5586984" y="2148840"/>
+            <a:ext cx="5815584" cy="786384"/>
+          </a:xfrm>
+          <a:prstGeom prst="rect">
+            <a:avLst/>
+          </a:prstGeom>
+          <a:noFill/>
+          <a:ln/>
+        </p:spPr>
+        <p:txBody>
+          <a:bodyPr wrap="square" rtlCol="0" anchor="t"/>
+          <a:lstStyle/>
+          <a:p>
+            <a:pPr indent="0" marL="0">
+              <a:lnSpc>
+                <a:spcPts val="1500"/>
+              </a:lnSpc>
+              <a:buNone/>
+            </a:pPr>
+            <a:r>
+              <a:rPr lang="en-US" sz="1100" dirty="0">
+                <a:solidFill>
+                  <a:srgbClr val="7A1119"/>
+                </a:solidFill>
+              </a:rPr>
+              <a:t>Register with institution name + license number → status PENDING. A verified admin approves or rejects them in the Verification Panel. Only approved staff can post requests; approved staff are the admins.</a:t>
+            </a:r>
+            <a:endParaRPr lang="en-US" sz="1100" dirty="0"/>
+          </a:p>
+        </p:txBody>
+      </p:sp>
+      <p:sp>
+        <p:nvSpPr>
+          <p:cNvPr id="11" name="Shape 8"/>
+          <p:cNvSpPr/>
+          <p:nvPr/>
+        </p:nvSpPr>
+        <p:spPr>
+          <a:xfrm>
+            <a:off x="5367528" y="3264408"/>
+            <a:ext cx="6254496" cy="1389888"/>
           </a:xfrm>
           <a:prstGeom prst="roundRect">
             <a:avLst>
-              <a:gd name="adj" fmla="val 3846"/>
-            </a:avLst>
-          </a:prstGeom>
-          <a:solidFill>
-            <a:srgbClr val="FFFFFF"/>
-          </a:solidFill>
-          <a:ln w="15875">
-            <a:solidFill>
-              <a:srgbClr val="E7E5E0"/>
-            </a:solidFill>
-            <a:prstDash val="solid"/>
-          </a:ln>
-        </p:spPr>
-      </p:sp>
-      <p:sp>
-        <p:nvSpPr>
-          <p:cNvPr id="12" name="Text 10"/>
-          <p:cNvSpPr/>
-          <p:nvPr/>
-        </p:nvSpPr>
-        <p:spPr>
-          <a:xfrm>
-            <a:off x="6195060" y="2011680"/>
-            <a:ext cx="2612898" cy="822960"/>
-          </a:xfrm>
-          <a:prstGeom prst="rect">
-            <a:avLst/>
-          </a:prstGeom>
-          <a:noFill/>
-          <a:ln/>
-        </p:spPr>
-        <p:txBody>
-          <a:bodyPr wrap="square" rtlCol="0" anchor="ctr"/>
-          <a:lstStyle/>
-          <a:p>
-            <a:pPr algn="ctr" indent="0" marL="0">
-              <a:buNone/>
-            </a:pPr>
-            <a:r>
-              <a:rPr lang="en-US" sz="3800" b="1" dirty="0">
-                <a:solidFill>
-                  <a:srgbClr val="C31F2E"/>
-                </a:solidFill>
-              </a:rPr>
-              <a:t>7 days</a:t>
-            </a:r>
-            <a:endParaRPr lang="en-US" sz="3800" dirty="0"/>
-          </a:p>
-        </p:txBody>
-      </p:sp>
-      <p:sp>
-        <p:nvSpPr>
-          <p:cNvPr id="13" name="Text 11"/>
-          <p:cNvSpPr/>
-          <p:nvPr/>
-        </p:nvSpPr>
-        <p:spPr>
-          <a:xfrm>
-            <a:off x="6359652" y="2834640"/>
-            <a:ext cx="2283714" cy="1188720"/>
-          </a:xfrm>
-          <a:prstGeom prst="rect">
-            <a:avLst/>
-          </a:prstGeom>
-          <a:noFill/>
-          <a:ln/>
-        </p:spPr>
-        <p:txBody>
-          <a:bodyPr wrap="square" rtlCol="0" anchor="ctr"/>
-          <a:lstStyle/>
-          <a:p>
-            <a:pPr algn="ctr" indent="0" marL="0">
-              <a:lnSpc>
-                <a:spcPts val="1350"/>
-              </a:lnSpc>
-              <a:buNone/>
-            </a:pPr>
-            <a:r>
-              <a:rPr lang="en-US" sz="1000" dirty="0">
-                <a:solidFill>
-                  <a:srgbClr val="5B5B58"/>
-                </a:solidFill>
-              </a:rPr>
-              <a:t>of demand forecast per city &amp; blood group, with shortage warnings before banks run dry</a:t>
-            </a:r>
-            <a:endParaRPr lang="en-US" sz="1000" dirty="0"/>
-          </a:p>
-        </p:txBody>
-      </p:sp>
-      <p:sp>
-        <p:nvSpPr>
-          <p:cNvPr id="14" name="Shape 12"/>
-          <p:cNvSpPr/>
-          <p:nvPr/>
-        </p:nvSpPr>
-        <p:spPr>
-          <a:xfrm>
-            <a:off x="9009126" y="1783080"/>
-            <a:ext cx="2612898" cy="2377440"/>
-          </a:xfrm>
-          <a:prstGeom prst="roundRect">
-            <a:avLst>
-              <a:gd name="adj" fmla="val 3846"/>
-            </a:avLst>
-          </a:prstGeom>
-          <a:solidFill>
-            <a:srgbClr val="FFFFFF"/>
-          </a:solidFill>
-          <a:ln w="15875">
-            <a:solidFill>
-              <a:srgbClr val="E7E5E0"/>
-            </a:solidFill>
-            <a:prstDash val="solid"/>
-          </a:ln>
-        </p:spPr>
-      </p:sp>
-      <p:sp>
-        <p:nvSpPr>
-          <p:cNvPr id="15" name="Text 13"/>
-          <p:cNvSpPr/>
-          <p:nvPr/>
-        </p:nvSpPr>
-        <p:spPr>
-          <a:xfrm>
-            <a:off x="9009126" y="2011680"/>
-            <a:ext cx="2612898" cy="822960"/>
-          </a:xfrm>
-          <a:prstGeom prst="rect">
-            <a:avLst/>
-          </a:prstGeom>
-          <a:noFill/>
-          <a:ln/>
-        </p:spPr>
-        <p:txBody>
-          <a:bodyPr wrap="square" rtlCol="0" anchor="ctr"/>
-          <a:lstStyle/>
-          <a:p>
-            <a:pPr algn="ctr" indent="0" marL="0">
-              <a:buNone/>
-            </a:pPr>
-            <a:r>
-              <a:rPr lang="en-US" sz="3800" b="1" dirty="0">
-                <a:solidFill>
-                  <a:srgbClr val="C31F2E"/>
-                </a:solidFill>
-              </a:rPr>
-              <a:t>0</a:t>
-            </a:r>
-            <a:endParaRPr lang="en-US" sz="3800" dirty="0"/>
-          </a:p>
-        </p:txBody>
-      </p:sp>
-      <p:sp>
-        <p:nvSpPr>
-          <p:cNvPr id="16" name="Text 14"/>
-          <p:cNvSpPr/>
-          <p:nvPr/>
-        </p:nvSpPr>
-        <p:spPr>
-          <a:xfrm>
-            <a:off x="9173718" y="2834640"/>
-            <a:ext cx="2283714" cy="1188720"/>
-          </a:xfrm>
-          <a:prstGeom prst="rect">
-            <a:avLst/>
-          </a:prstGeom>
-          <a:noFill/>
-          <a:ln/>
-        </p:spPr>
-        <p:txBody>
-          <a:bodyPr wrap="square" rtlCol="0" anchor="ctr"/>
-          <a:lstStyle/>
-          <a:p>
-            <a:pPr algn="ctr" indent="0" marL="0">
-              <a:lnSpc>
-                <a:spcPts val="1350"/>
-              </a:lnSpc>
-              <a:buNone/>
-            </a:pPr>
-            <a:r>
-              <a:rPr lang="en-US" sz="1000" dirty="0">
-                <a:solidFill>
-                  <a:srgbClr val="5B5B58"/>
-                </a:solidFill>
-              </a:rPr>
-              <a:t>patient names or donor phone numbers exposed in public views — masked by default</a:t>
-            </a:r>
-            <a:endParaRPr lang="en-US" sz="1000" dirty="0"/>
-          </a:p>
-        </p:txBody>
-      </p:sp>
-      <p:sp>
-        <p:nvSpPr>
-          <p:cNvPr id="17" name="Shape 15"/>
-          <p:cNvSpPr/>
-          <p:nvPr/>
-        </p:nvSpPr>
-        <p:spPr>
-          <a:xfrm>
-            <a:off x="566928" y="4434840"/>
-            <a:ext cx="11055096" cy="1600200"/>
-          </a:xfrm>
-          <a:prstGeom prst="roundRect">
-            <a:avLst>
-              <a:gd name="adj" fmla="val 5714"/>
+              <a:gd name="adj" fmla="val 6579"/>
             </a:avLst>
           </a:prstGeom>
           <a:solidFill>
@@ -4485,14 +5186,14 @@
       </p:sp>
       <p:sp>
         <p:nvSpPr>
-          <p:cNvPr id="18" name="Text 16"/>
-          <p:cNvSpPr/>
-          <p:nvPr/>
-        </p:nvSpPr>
-        <p:spPr>
-          <a:xfrm>
-            <a:off x="822960" y="4562856"/>
-            <a:ext cx="10543032" cy="1325880"/>
+          <p:cNvPr id="12" name="Text 9"/>
+          <p:cNvSpPr/>
+          <p:nvPr/>
+        </p:nvSpPr>
+        <p:spPr>
+          <a:xfrm>
+            <a:off x="5586984" y="3392424"/>
+            <a:ext cx="5815584" cy="329184"/>
           </a:xfrm>
           <a:prstGeom prst="rect">
             <a:avLst/>
@@ -4505,62 +5206,158 @@
           <a:lstStyle/>
           <a:p>
             <a:pPr indent="0" marL="0">
-              <a:lnSpc>
-                <a:spcPts val="1800"/>
-              </a:lnSpc>
-              <a:buNone/>
-            </a:pPr>
-            <a:r>
-              <a:rPr lang="en-US" sz="1300" b="1" dirty="0">
+              <a:buNone/>
+            </a:pPr>
+            <a:r>
+              <a:rPr lang="en-US" sz="1400" b="1" dirty="0">
+                <a:solidFill>
+                  <a:srgbClr val="0F766E"/>
+                </a:solidFill>
+              </a:rPr>
+              <a:t>Donors — screened at signup</a:t>
+            </a:r>
+            <a:endParaRPr lang="en-US" sz="1400" dirty="0"/>
+          </a:p>
+        </p:txBody>
+      </p:sp>
+      <p:sp>
+        <p:nvSpPr>
+          <p:cNvPr id="13" name="Text 10"/>
+          <p:cNvSpPr/>
+          <p:nvPr/>
+        </p:nvSpPr>
+        <p:spPr>
+          <a:xfrm>
+            <a:off x="5586984" y="3721608"/>
+            <a:ext cx="5815584" cy="786384"/>
+          </a:xfrm>
+          <a:prstGeom prst="rect">
+            <a:avLst/>
+          </a:prstGeom>
+          <a:noFill/>
+          <a:ln/>
+        </p:spPr>
+        <p:txBody>
+          <a:bodyPr wrap="square" rtlCol="0" anchor="t"/>
+          <a:lstStyle/>
+          <a:p>
+            <a:pPr indent="0" marL="0">
+              <a:lnSpc>
+                <a:spcPts val="1500"/>
+              </a:lnSpc>
+              <a:buNone/>
+            </a:pPr>
+            <a:r>
+              <a:rPr lang="en-US" sz="1100" dirty="0">
                 <a:solidFill>
                   <a:srgbClr val="0B4A44"/>
                 </a:solidFill>
               </a:rPr>
-              <a:t>Why it matters: </a:t>
-            </a:r>
-            <a:pPr indent="0" marL="0">
-              <a:lnSpc>
-                <a:spcPts val="1800"/>
-              </a:lnSpc>
-              <a:buNone/>
-            </a:pPr>
-            <a:r>
-              <a:rPr lang="en-US" sz="1300" dirty="0">
-                <a:solidFill>
-                  <a:srgbClr val="0B4A44"/>
-                </a:solidFill>
-              </a:rPr>
-              <a:t>every emergency that starts with a match instead of a phone tree saves the most expensive currency in medicine — time. And every blocked ineligible donor is a complication that never happens. The system also gets </a:t>
-            </a:r>
-            <a:pPr indent="0" marL="0">
-              <a:lnSpc>
-                <a:spcPts val="1800"/>
-              </a:lnSpc>
-              <a:buNone/>
-            </a:pPr>
-            <a:r>
-              <a:rPr lang="en-US" sz="1300" b="1" dirty="0">
-                <a:solidFill>
-                  <a:srgbClr val="0B4A44"/>
-                </a:solidFill>
-              </a:rPr>
-              <a:t>smarter with use</a:t>
-            </a:r>
-            <a:pPr indent="0" marL="0">
-              <a:lnSpc>
-                <a:spcPts val="1800"/>
-              </a:lnSpc>
-              <a:buNone/>
-            </a:pPr>
-            <a:r>
-              <a:rPr lang="en-US" sz="1300" dirty="0">
-                <a:solidFill>
-                  <a:srgbClr val="0B4A44"/>
-                </a:solidFill>
-              </a:rPr>
-              <a:t>: real requests and fulfillments feed the forecast model.</a:t>
-            </a:r>
-            <a:endParaRPr lang="en-US" sz="1300" dirty="0"/>
+              <a:t>Open registration with an 8-question health pre-screening (fever, HIV, hepatitis, chronic conditions, medication, recent procedures, pregnancy, malaria travel). Answers become safety flags — visible to staff only, never to other donors.</a:t>
+            </a:r>
+            <a:endParaRPr lang="en-US" sz="1100" dirty="0"/>
+          </a:p>
+        </p:txBody>
+      </p:sp>
+      <p:sp>
+        <p:nvSpPr>
+          <p:cNvPr id="14" name="Shape 11"/>
+          <p:cNvSpPr/>
+          <p:nvPr/>
+        </p:nvSpPr>
+        <p:spPr>
+          <a:xfrm>
+            <a:off x="5367528" y="4837176"/>
+            <a:ext cx="6254496" cy="1389888"/>
+          </a:xfrm>
+          <a:prstGeom prst="roundRect">
+            <a:avLst>
+              <a:gd name="adj" fmla="val 6579"/>
+            </a:avLst>
+          </a:prstGeom>
+          <a:solidFill>
+            <a:srgbClr val="FBF0DD"/>
+          </a:solidFill>
+          <a:ln w="15875">
+            <a:solidFill>
+              <a:srgbClr val="EBD6A8"/>
+            </a:solidFill>
+            <a:prstDash val="solid"/>
+          </a:ln>
+        </p:spPr>
+      </p:sp>
+      <p:sp>
+        <p:nvSpPr>
+          <p:cNvPr id="15" name="Text 12"/>
+          <p:cNvSpPr/>
+          <p:nvPr/>
+        </p:nvSpPr>
+        <p:spPr>
+          <a:xfrm>
+            <a:off x="5586984" y="4965192"/>
+            <a:ext cx="5815584" cy="329184"/>
+          </a:xfrm>
+          <a:prstGeom prst="rect">
+            <a:avLst/>
+          </a:prstGeom>
+          <a:noFill/>
+          <a:ln/>
+        </p:spPr>
+        <p:txBody>
+          <a:bodyPr wrap="square" rtlCol="0" anchor="ctr"/>
+          <a:lstStyle/>
+          <a:p>
+            <a:pPr indent="0" marL="0">
+              <a:buNone/>
+            </a:pPr>
+            <a:r>
+              <a:rPr lang="en-US" sz="1400" b="1" dirty="0">
+                <a:solidFill>
+                  <a:srgbClr val="B4740E"/>
+                </a:solidFill>
+              </a:rPr>
+              <a:t>Replacement donors</a:t>
+            </a:r>
+            <a:endParaRPr lang="en-US" sz="1400" dirty="0"/>
+          </a:p>
+        </p:txBody>
+      </p:sp>
+      <p:sp>
+        <p:nvSpPr>
+          <p:cNvPr id="16" name="Text 13"/>
+          <p:cNvSpPr/>
+          <p:nvPr/>
+        </p:nvSpPr>
+        <p:spPr>
+          <a:xfrm>
+            <a:off x="5586984" y="5294376"/>
+            <a:ext cx="5815584" cy="786384"/>
+          </a:xfrm>
+          <a:prstGeom prst="rect">
+            <a:avLst/>
+          </a:prstGeom>
+          <a:noFill/>
+          <a:ln/>
+        </p:spPr>
+        <p:txBody>
+          <a:bodyPr wrap="square" rtlCol="0" anchor="t"/>
+          <a:lstStyle/>
+          <a:p>
+            <a:pPr indent="0" marL="0">
+              <a:lnSpc>
+                <a:spcPts val="1500"/>
+              </a:lnSpc>
+              <a:buNone/>
+            </a:pPr>
+            <a:r>
+              <a:rPr lang="en-US" sz="1100" dirty="0">
+                <a:solidFill>
+                  <a:srgbClr val="7A5008"/>
+                </a:solidFill>
+              </a:rPr>
+              <a:t>Verified staff register walk-in donors brought by a patient’s family — tagged with the institution — so they join the matched pool for future requests.</a:t>
+            </a:r>
+            <a:endParaRPr lang="en-US" sz="1100" dirty="0"/>
           </a:p>
         </p:txBody>
       </p:sp>
@@ -4646,7 +5443,7 @@
                   <a:srgbClr val="C31F2E"/>
                 </a:solidFill>
               </a:rPr>
-              <a:t>INNOVATION 1 · SAFETY-FIRST MATCHING</a:t>
+              <a:t>THE NEED · THE IMPACT IT MAKES</a:t>
             </a:r>
             <a:endParaRPr lang="en-US" sz="1100" dirty="0"/>
           </a:p>
@@ -4685,7 +5482,7 @@
                   <a:srgbClr val="1B1B1D"/>
                 </a:solidFill>
               </a:rPr>
-              <a:t>Matching that </a:t>
+              <a:t>From a phone tree to a </a:t>
             </a:r>
             <a:pPr indent="0" marL="0">
               <a:lnSpc>
@@ -4699,7 +5496,7 @@
                   <a:srgbClr val="C31F2E"/>
                 </a:solidFill>
               </a:rPr>
-              <a:t>refuses</a:t>
+              <a:t>match in seconds</a:t>
             </a:r>
             <a:pPr indent="0" marL="0">
               <a:lnSpc>
@@ -4713,7 +5510,7 @@
                   <a:srgbClr val="1B1B1D"/>
                 </a:solidFill>
               </a:rPr>
-              <a:t> to recommend ineligible donors.</a:t>
+              <a:t> — with safety enforced by design.</a:t>
             </a:r>
             <a:endParaRPr lang="en-US" sz="2600" dirty="0"/>
           </a:p>
@@ -4727,16 +5524,16 @@
         </p:nvSpPr>
         <p:spPr>
           <a:xfrm>
-            <a:off x="512064" y="1636776"/>
-            <a:ext cx="6647688" cy="4195953"/>
+            <a:off x="566928" y="1783080"/>
+            <a:ext cx="2612898" cy="2377440"/>
           </a:xfrm>
           <a:prstGeom prst="roundRect">
             <a:avLst>
-              <a:gd name="adj" fmla="val 1743"/>
+              <a:gd name="adj" fmla="val 3846"/>
             </a:avLst>
           </a:prstGeom>
           <a:solidFill>
-            <a:srgbClr val="FAFAF8"/>
+            <a:srgbClr val="FFFFFF"/>
           </a:solidFill>
           <a:ln w="15875">
             <a:solidFill>
@@ -4746,40 +5543,16 @@
           </a:ln>
         </p:spPr>
       </p:sp>
-      <p:pic>
-        <p:nvPicPr>
-          <p:cNvPr id="6" name="Image 0" descr="C:\Users\SANA KHAN\Documents\Qoder\2026-09-03\chat-1\bloodbridge-ai\assets\donor-match.png">    </p:cNvPr>
-          <p:cNvPicPr>
-            <a:picLocks noChangeAspect="1"/>
-          </p:cNvPicPr>
-          <p:nvPr/>
-        </p:nvPicPr>
-        <p:blipFill>
-          <a:blip r:embed="rId1"/>
-          <a:stretch>
-            <a:fillRect/>
-          </a:stretch>
-        </p:blipFill>
-        <p:spPr>
-          <a:xfrm>
-            <a:off x="566928" y="1691640"/>
-            <a:ext cx="6537960" cy="4086225"/>
-          </a:xfrm>
-          <a:prstGeom prst="rect">
-            <a:avLst/>
-          </a:prstGeom>
-        </p:spPr>
-      </p:pic>
-      <p:sp>
-        <p:nvSpPr>
-          <p:cNvPr id="7" name="Text 4"/>
-          <p:cNvSpPr/>
-          <p:nvPr/>
-        </p:nvSpPr>
-        <p:spPr>
-          <a:xfrm>
-            <a:off x="512064" y="5887593"/>
-            <a:ext cx="6647688" cy="274320"/>
+      <p:sp>
+        <p:nvSpPr>
+          <p:cNvPr id="6" name="Text 4"/>
+          <p:cNvSpPr/>
+          <p:nvPr/>
+        </p:nvSpPr>
+        <p:spPr>
+          <a:xfrm>
+            <a:off x="566928" y="2011680"/>
+            <a:ext cx="2612898" cy="822960"/>
           </a:xfrm>
           <a:prstGeom prst="rect">
             <a:avLst/>
@@ -4795,35 +5568,74 @@
               <a:buNone/>
             </a:pPr>
             <a:r>
-              <a:rPr lang="en-US" sz="950" dirty="0">
-                <a:solidFill>
-                  <a:srgbClr val="8B8B87"/>
-                </a:solidFill>
-              </a:rPr>
-              <a:t>AI match results — ranked donors + live count of blocked ineligible donors</a:t>
-            </a:r>
-            <a:endParaRPr lang="en-US" sz="950" dirty="0"/>
-          </a:p>
-        </p:txBody>
-      </p:sp>
-      <p:sp>
-        <p:nvSpPr>
-          <p:cNvPr id="8" name="Shape 5"/>
-          <p:cNvSpPr/>
-          <p:nvPr/>
-        </p:nvSpPr>
-        <p:spPr>
-          <a:xfrm>
-            <a:off x="7424928" y="1691640"/>
-            <a:ext cx="4197096" cy="1481328"/>
+              <a:rPr lang="en-US" sz="3800" b="1" dirty="0">
+                <a:solidFill>
+                  <a:srgbClr val="C31F2E"/>
+                </a:solidFill>
+              </a:rPr>
+              <a:t>10</a:t>
+            </a:r>
+            <a:endParaRPr lang="en-US" sz="3800" dirty="0"/>
+          </a:p>
+        </p:txBody>
+      </p:sp>
+      <p:sp>
+        <p:nvSpPr>
+          <p:cNvPr id="7" name="Text 5"/>
+          <p:cNvSpPr/>
+          <p:nvPr/>
+        </p:nvSpPr>
+        <p:spPr>
+          <a:xfrm>
+            <a:off x="731520" y="2834640"/>
+            <a:ext cx="2283714" cy="1188720"/>
+          </a:xfrm>
+          <a:prstGeom prst="rect">
+            <a:avLst/>
+          </a:prstGeom>
+          <a:noFill/>
+          <a:ln/>
+        </p:spPr>
+        <p:txBody>
+          <a:bodyPr wrap="square" rtlCol="0" anchor="ctr"/>
+          <a:lstStyle/>
+          <a:p>
+            <a:pPr algn="ctr" indent="0" marL="0">
+              <a:lnSpc>
+                <a:spcPts val="1350"/>
+              </a:lnSpc>
+              <a:buNone/>
+            </a:pPr>
+            <a:r>
+              <a:rPr lang="en-US" sz="1000" dirty="0">
+                <a:solidFill>
+                  <a:srgbClr val="5B5B58"/>
+                </a:solidFill>
+              </a:rPr>
+              <a:t>ranked, medically eligible donors surfaced instantly per request — plus every donor registered in the last 24h is guaranteed visible</a:t>
+            </a:r>
+            <a:endParaRPr lang="en-US" sz="1000" dirty="0"/>
+          </a:p>
+        </p:txBody>
+      </p:sp>
+      <p:sp>
+        <p:nvSpPr>
+          <p:cNvPr id="8" name="Shape 6"/>
+          <p:cNvSpPr/>
+          <p:nvPr/>
+        </p:nvSpPr>
+        <p:spPr>
+          <a:xfrm>
+            <a:off x="3380994" y="1783080"/>
+            <a:ext cx="2612898" cy="2377440"/>
           </a:xfrm>
           <a:prstGeom prst="roundRect">
             <a:avLst>
-              <a:gd name="adj" fmla="val 6173"/>
+              <a:gd name="adj" fmla="val 3846"/>
             </a:avLst>
           </a:prstGeom>
           <a:solidFill>
-            <a:srgbClr val="FAFAF8"/>
+            <a:srgbClr val="FFFFFF"/>
           </a:solidFill>
           <a:ln w="15875">
             <a:solidFill>
@@ -4835,14 +5647,14 @@
       </p:sp>
       <p:sp>
         <p:nvSpPr>
-          <p:cNvPr id="9" name="Text 6"/>
-          <p:cNvSpPr/>
-          <p:nvPr/>
-        </p:nvSpPr>
-        <p:spPr>
-          <a:xfrm>
-            <a:off x="7644384" y="1819656"/>
-            <a:ext cx="3758184" cy="329184"/>
+          <p:cNvPr id="9" name="Text 7"/>
+          <p:cNvSpPr/>
+          <p:nvPr/>
+        </p:nvSpPr>
+        <p:spPr>
+          <a:xfrm>
+            <a:off x="3380994" y="2011680"/>
+            <a:ext cx="2612898" cy="822960"/>
           </a:xfrm>
           <a:prstGeom prst="rect">
             <a:avLst/>
@@ -4854,180 +5666,78 @@
           <a:bodyPr wrap="square" rtlCol="0" anchor="ctr"/>
           <a:lstStyle/>
           <a:p>
-            <a:pPr indent="0" marL="0">
-              <a:buNone/>
-            </a:pPr>
-            <a:r>
-              <a:rPr lang="en-US" sz="1400" b="1" dirty="0">
-                <a:solidFill>
-                  <a:srgbClr val="1B1B1D"/>
-                </a:solidFill>
-              </a:rPr>
-              <a:t>Weighted compatibility score</a:t>
-            </a:r>
-            <a:endParaRPr lang="en-US" sz="1400" dirty="0"/>
-          </a:p>
-        </p:txBody>
-      </p:sp>
-      <p:sp>
-        <p:nvSpPr>
-          <p:cNvPr id="10" name="Text 7"/>
-          <p:cNvSpPr/>
-          <p:nvPr/>
-        </p:nvSpPr>
-        <p:spPr>
-          <a:xfrm>
-            <a:off x="7644384" y="2148840"/>
-            <a:ext cx="3758184" cy="877824"/>
-          </a:xfrm>
-          <a:prstGeom prst="rect">
-            <a:avLst/>
-          </a:prstGeom>
-          <a:noFill/>
-          <a:ln/>
-        </p:spPr>
-        <p:txBody>
-          <a:bodyPr wrap="square" rtlCol="0" anchor="t"/>
-          <a:lstStyle/>
-          <a:p>
-            <a:pPr indent="0" marL="0">
-              <a:lnSpc>
-                <a:spcPts val="1500"/>
-              </a:lnSpc>
-              <a:buNone/>
-            </a:pPr>
-            <a:r>
-              <a:rPr lang="en-US" sz="1100" dirty="0">
+            <a:pPr algn="ctr" indent="0" marL="0">
+              <a:buNone/>
+            </a:pPr>
+            <a:r>
+              <a:rPr lang="en-US" sz="3800" b="1" dirty="0">
+                <a:solidFill>
+                  <a:srgbClr val="C31F2E"/>
+                </a:solidFill>
+              </a:rPr>
+              <a:t>8</a:t>
+            </a:r>
+            <a:endParaRPr lang="en-US" sz="3800" dirty="0"/>
+          </a:p>
+        </p:txBody>
+      </p:sp>
+      <p:sp>
+        <p:nvSpPr>
+          <p:cNvPr id="10" name="Text 8"/>
+          <p:cNvSpPr/>
+          <p:nvPr/>
+        </p:nvSpPr>
+        <p:spPr>
+          <a:xfrm>
+            <a:off x="3545586" y="2834640"/>
+            <a:ext cx="2283714" cy="1188720"/>
+          </a:xfrm>
+          <a:prstGeom prst="rect">
+            <a:avLst/>
+          </a:prstGeom>
+          <a:noFill/>
+          <a:ln/>
+        </p:spPr>
+        <p:txBody>
+          <a:bodyPr wrap="square" rtlCol="0" anchor="ctr"/>
+          <a:lstStyle/>
+          <a:p>
+            <a:pPr algn="ctr" indent="0" marL="0">
+              <a:lnSpc>
+                <a:spcPts val="1350"/>
+              </a:lnSpc>
+              <a:buNone/>
+            </a:pPr>
+            <a:r>
+              <a:rPr lang="en-US" sz="1000" dirty="0">
                 <a:solidFill>
                   <a:srgbClr val="5B5B58"/>
                 </a:solidFill>
               </a:rPr>
-              <a:t>Blood-type compatibility (40%) · haversine distance (30%) · donation recency (20%) · donor rating (10%). Critical requests re-weight toward distance.</a:t>
-            </a:r>
-            <a:endParaRPr lang="en-US" sz="1100" dirty="0"/>
-          </a:p>
-        </p:txBody>
-      </p:sp>
-      <p:sp>
-        <p:nvSpPr>
-          <p:cNvPr id="11" name="Shape 8"/>
-          <p:cNvSpPr/>
-          <p:nvPr/>
-        </p:nvSpPr>
-        <p:spPr>
-          <a:xfrm>
-            <a:off x="7424928" y="3355848"/>
-            <a:ext cx="4197096" cy="1481328"/>
+              <a:t>health screening questions answered by every donor at signup — flags for staff, invisible to other donors</a:t>
+            </a:r>
+            <a:endParaRPr lang="en-US" sz="1000" dirty="0"/>
+          </a:p>
+        </p:txBody>
+      </p:sp>
+      <p:sp>
+        <p:nvSpPr>
+          <p:cNvPr id="11" name="Shape 9"/>
+          <p:cNvSpPr/>
+          <p:nvPr/>
+        </p:nvSpPr>
+        <p:spPr>
+          <a:xfrm>
+            <a:off x="6195060" y="1783080"/>
+            <a:ext cx="2612898" cy="2377440"/>
           </a:xfrm>
           <a:prstGeom prst="roundRect">
             <a:avLst>
-              <a:gd name="adj" fmla="val 6173"/>
+              <a:gd name="adj" fmla="val 3846"/>
             </a:avLst>
           </a:prstGeom>
           <a:solidFill>
-            <a:srgbClr val="FBF0DD"/>
-          </a:solidFill>
-          <a:ln w="15875">
-            <a:solidFill>
-              <a:srgbClr val="EBD6A8"/>
-            </a:solidFill>
-            <a:prstDash val="solid"/>
-          </a:ln>
-        </p:spPr>
-      </p:sp>
-      <p:sp>
-        <p:nvSpPr>
-          <p:cNvPr id="12" name="Text 9"/>
-          <p:cNvSpPr/>
-          <p:nvPr/>
-        </p:nvSpPr>
-        <p:spPr>
-          <a:xfrm>
-            <a:off x="7644384" y="3483864"/>
-            <a:ext cx="3758184" cy="329184"/>
-          </a:xfrm>
-          <a:prstGeom prst="rect">
-            <a:avLst/>
-          </a:prstGeom>
-          <a:noFill/>
-          <a:ln/>
-        </p:spPr>
-        <p:txBody>
-          <a:bodyPr wrap="square" rtlCol="0" anchor="ctr"/>
-          <a:lstStyle/>
-          <a:p>
-            <a:pPr indent="0" marL="0">
-              <a:buNone/>
-            </a:pPr>
-            <a:r>
-              <a:rPr lang="en-US" sz="1400" b="1" dirty="0">
-                <a:solidFill>
-                  <a:srgbClr val="B4740E"/>
-                </a:solidFill>
-              </a:rPr>
-              <a:t>The hard safety rule</a:t>
-            </a:r>
-            <a:endParaRPr lang="en-US" sz="1400" dirty="0"/>
-          </a:p>
-        </p:txBody>
-      </p:sp>
-      <p:sp>
-        <p:nvSpPr>
-          <p:cNvPr id="13" name="Text 10"/>
-          <p:cNvSpPr/>
-          <p:nvPr/>
-        </p:nvSpPr>
-        <p:spPr>
-          <a:xfrm>
-            <a:off x="7644384" y="3813048"/>
-            <a:ext cx="3758184" cy="877824"/>
-          </a:xfrm>
-          <a:prstGeom prst="rect">
-            <a:avLst/>
-          </a:prstGeom>
-          <a:noFill/>
-          <a:ln/>
-        </p:spPr>
-        <p:txBody>
-          <a:bodyPr wrap="square" rtlCol="0" anchor="t"/>
-          <a:lstStyle/>
-          <a:p>
-            <a:pPr indent="0" marL="0">
-              <a:lnSpc>
-                <a:spcPts val="1500"/>
-              </a:lnSpc>
-              <a:buNone/>
-            </a:pPr>
-            <a:r>
-              <a:rPr lang="en-US" sz="1100" dirty="0">
-                <a:solidFill>
-                  <a:srgbClr val="7A5008"/>
-                </a:solidFill>
-              </a:rPr>
-              <a:t>Donors inside the 90-day (men) / 120-day (women) resting window are excluded entirely — never just ranked lower. The count is shown live on every match.</a:t>
-            </a:r>
-            <a:endParaRPr lang="en-US" sz="1100" dirty="0"/>
-          </a:p>
-        </p:txBody>
-      </p:sp>
-      <p:sp>
-        <p:nvSpPr>
-          <p:cNvPr id="14" name="Shape 11"/>
-          <p:cNvSpPr/>
-          <p:nvPr/>
-        </p:nvSpPr>
-        <p:spPr>
-          <a:xfrm>
-            <a:off x="7424928" y="5020056"/>
-            <a:ext cx="4197096" cy="1481328"/>
-          </a:xfrm>
-          <a:prstGeom prst="roundRect">
-            <a:avLst>
-              <a:gd name="adj" fmla="val 6173"/>
-            </a:avLst>
-          </a:prstGeom>
-          <a:solidFill>
-            <a:srgbClr val="FAFAF8"/>
+            <a:srgbClr val="FFFFFF"/>
           </a:solidFill>
           <a:ln w="15875">
             <a:solidFill>
@@ -5039,14 +5749,14 @@
       </p:sp>
       <p:sp>
         <p:nvSpPr>
-          <p:cNvPr id="15" name="Text 12"/>
-          <p:cNvSpPr/>
-          <p:nvPr/>
-        </p:nvSpPr>
-        <p:spPr>
-          <a:xfrm>
-            <a:off x="7644384" y="5148072"/>
-            <a:ext cx="3758184" cy="329184"/>
+          <p:cNvPr id="12" name="Text 10"/>
+          <p:cNvSpPr/>
+          <p:nvPr/>
+        </p:nvSpPr>
+        <p:spPr>
+          <a:xfrm>
+            <a:off x="6195060" y="2011680"/>
+            <a:ext cx="2612898" cy="822960"/>
           </a:xfrm>
           <a:prstGeom prst="rect">
             <a:avLst/>
@@ -5058,57 +5768,267 @@
           <a:bodyPr wrap="square" rtlCol="0" anchor="ctr"/>
           <a:lstStyle/>
           <a:p>
-            <a:pPr indent="0" marL="0">
-              <a:buNone/>
-            </a:pPr>
-            <a:r>
-              <a:rPr lang="en-US" sz="1400" b="1" dirty="0">
-                <a:solidFill>
-                  <a:srgbClr val="1B1B1D"/>
-                </a:solidFill>
-              </a:rPr>
-              <a:t>Closing the loop</a:t>
-            </a:r>
-            <a:endParaRPr lang="en-US" sz="1400" dirty="0"/>
-          </a:p>
-        </p:txBody>
-      </p:sp>
-      <p:sp>
-        <p:nvSpPr>
-          <p:cNvPr id="16" name="Text 13"/>
-          <p:cNvSpPr/>
-          <p:nvPr/>
-        </p:nvSpPr>
-        <p:spPr>
-          <a:xfrm>
-            <a:off x="7644384" y="5477256"/>
-            <a:ext cx="3758184" cy="877824"/>
-          </a:xfrm>
-          <a:prstGeom prst="rect">
-            <a:avLst/>
-          </a:prstGeom>
-          <a:noFill/>
-          <a:ln/>
-        </p:spPr>
-        <p:txBody>
-          <a:bodyPr wrap="square" rtlCol="0" anchor="t"/>
-          <a:lstStyle/>
-          <a:p>
-            <a:pPr indent="0" marL="0">
-              <a:lnSpc>
-                <a:spcPts val="1500"/>
-              </a:lnSpc>
-              <a:buNone/>
-            </a:pPr>
-            <a:r>
-              <a:rPr lang="en-US" sz="1100" dirty="0">
+            <a:pPr algn="ctr" indent="0" marL="0">
+              <a:buNone/>
+            </a:pPr>
+            <a:r>
+              <a:rPr lang="en-US" sz="3800" b="1" dirty="0">
+                <a:solidFill>
+                  <a:srgbClr val="C31F2E"/>
+                </a:solidFill>
+              </a:rPr>
+              <a:t>7 days</a:t>
+            </a:r>
+            <a:endParaRPr lang="en-US" sz="3800" dirty="0"/>
+          </a:p>
+        </p:txBody>
+      </p:sp>
+      <p:sp>
+        <p:nvSpPr>
+          <p:cNvPr id="13" name="Text 11"/>
+          <p:cNvSpPr/>
+          <p:nvPr/>
+        </p:nvSpPr>
+        <p:spPr>
+          <a:xfrm>
+            <a:off x="6359652" y="2834640"/>
+            <a:ext cx="2283714" cy="1188720"/>
+          </a:xfrm>
+          <a:prstGeom prst="rect">
+            <a:avLst/>
+          </a:prstGeom>
+          <a:noFill/>
+          <a:ln/>
+        </p:spPr>
+        <p:txBody>
+          <a:bodyPr wrap="square" rtlCol="0" anchor="ctr"/>
+          <a:lstStyle/>
+          <a:p>
+            <a:pPr algn="ctr" indent="0" marL="0">
+              <a:lnSpc>
+                <a:spcPts val="1350"/>
+              </a:lnSpc>
+              <a:buNone/>
+            </a:pPr>
+            <a:r>
+              <a:rPr lang="en-US" sz="1000" dirty="0">
                 <a:solidFill>
                   <a:srgbClr val="5B5B58"/>
                 </a:solidFill>
               </a:rPr>
-              <a:t>When staff confirm which donors actually donated, those donors automatically enter their resting window — the system keeps itself medically honest.</a:t>
-            </a:r>
-            <a:endParaRPr lang="en-US" sz="1100" dirty="0"/>
+              <a:t>of demand forecast per city &amp; blood group, with backtested ~80–84% accuracy shown live</a:t>
+            </a:r>
+            <a:endParaRPr lang="en-US" sz="1000" dirty="0"/>
+          </a:p>
+        </p:txBody>
+      </p:sp>
+      <p:sp>
+        <p:nvSpPr>
+          <p:cNvPr id="14" name="Shape 12"/>
+          <p:cNvSpPr/>
+          <p:nvPr/>
+        </p:nvSpPr>
+        <p:spPr>
+          <a:xfrm>
+            <a:off x="9009126" y="1783080"/>
+            <a:ext cx="2612898" cy="2377440"/>
+          </a:xfrm>
+          <a:prstGeom prst="roundRect">
+            <a:avLst>
+              <a:gd name="adj" fmla="val 3846"/>
+            </a:avLst>
+          </a:prstGeom>
+          <a:solidFill>
+            <a:srgbClr val="FFFFFF"/>
+          </a:solidFill>
+          <a:ln w="15875">
+            <a:solidFill>
+              <a:srgbClr val="E7E5E0"/>
+            </a:solidFill>
+            <a:prstDash val="solid"/>
+          </a:ln>
+        </p:spPr>
+      </p:sp>
+      <p:sp>
+        <p:nvSpPr>
+          <p:cNvPr id="15" name="Text 13"/>
+          <p:cNvSpPr/>
+          <p:nvPr/>
+        </p:nvSpPr>
+        <p:spPr>
+          <a:xfrm>
+            <a:off x="9009126" y="2011680"/>
+            <a:ext cx="2612898" cy="822960"/>
+          </a:xfrm>
+          <a:prstGeom prst="rect">
+            <a:avLst/>
+          </a:prstGeom>
+          <a:noFill/>
+          <a:ln/>
+        </p:spPr>
+        <p:txBody>
+          <a:bodyPr wrap="square" rtlCol="0" anchor="ctr"/>
+          <a:lstStyle/>
+          <a:p>
+            <a:pPr algn="ctr" indent="0" marL="0">
+              <a:buNone/>
+            </a:pPr>
+            <a:r>
+              <a:rPr lang="en-US" sz="3800" b="1" dirty="0">
+                <a:solidFill>
+                  <a:srgbClr val="C31F2E"/>
+                </a:solidFill>
+              </a:rPr>
+              <a:t>0</a:t>
+            </a:r>
+            <a:endParaRPr lang="en-US" sz="3800" dirty="0"/>
+          </a:p>
+        </p:txBody>
+      </p:sp>
+      <p:sp>
+        <p:nvSpPr>
+          <p:cNvPr id="16" name="Text 14"/>
+          <p:cNvSpPr/>
+          <p:nvPr/>
+        </p:nvSpPr>
+        <p:spPr>
+          <a:xfrm>
+            <a:off x="9173718" y="2834640"/>
+            <a:ext cx="2283714" cy="1188720"/>
+          </a:xfrm>
+          <a:prstGeom prst="rect">
+            <a:avLst/>
+          </a:prstGeom>
+          <a:noFill/>
+          <a:ln/>
+        </p:spPr>
+        <p:txBody>
+          <a:bodyPr wrap="square" rtlCol="0" anchor="ctr"/>
+          <a:lstStyle/>
+          <a:p>
+            <a:pPr algn="ctr" indent="0" marL="0">
+              <a:lnSpc>
+                <a:spcPts val="1350"/>
+              </a:lnSpc>
+              <a:buNone/>
+            </a:pPr>
+            <a:r>
+              <a:rPr lang="en-US" sz="1000" dirty="0">
+                <a:solidFill>
+                  <a:srgbClr val="5B5B58"/>
+                </a:solidFill>
+              </a:rPr>
+              <a:t>patient names or donor phone numbers exposed in public views — privacy by default</a:t>
+            </a:r>
+            <a:endParaRPr lang="en-US" sz="1000" dirty="0"/>
+          </a:p>
+        </p:txBody>
+      </p:sp>
+      <p:sp>
+        <p:nvSpPr>
+          <p:cNvPr id="17" name="Shape 15"/>
+          <p:cNvSpPr/>
+          <p:nvPr/>
+        </p:nvSpPr>
+        <p:spPr>
+          <a:xfrm>
+            <a:off x="566928" y="4434840"/>
+            <a:ext cx="11055096" cy="1600200"/>
+          </a:xfrm>
+          <a:prstGeom prst="roundRect">
+            <a:avLst>
+              <a:gd name="adj" fmla="val 5714"/>
+            </a:avLst>
+          </a:prstGeom>
+          <a:solidFill>
+            <a:srgbClr val="E6F5F3"/>
+          </a:solidFill>
+          <a:ln w="15875">
+            <a:solidFill>
+              <a:srgbClr val="BFE3DF"/>
+            </a:solidFill>
+            <a:prstDash val="solid"/>
+          </a:ln>
+        </p:spPr>
+      </p:sp>
+      <p:sp>
+        <p:nvSpPr>
+          <p:cNvPr id="18" name="Text 16"/>
+          <p:cNvSpPr/>
+          <p:nvPr/>
+        </p:nvSpPr>
+        <p:spPr>
+          <a:xfrm>
+            <a:off x="822960" y="4562856"/>
+            <a:ext cx="10543032" cy="1325880"/>
+          </a:xfrm>
+          <a:prstGeom prst="rect">
+            <a:avLst/>
+          </a:prstGeom>
+          <a:noFill/>
+          <a:ln/>
+        </p:spPr>
+        <p:txBody>
+          <a:bodyPr wrap="square" rtlCol="0" anchor="ctr"/>
+          <a:lstStyle/>
+          <a:p>
+            <a:pPr indent="0" marL="0">
+              <a:lnSpc>
+                <a:spcPts val="1800"/>
+              </a:lnSpc>
+              <a:buNone/>
+            </a:pPr>
+            <a:r>
+              <a:rPr lang="en-US" sz="1300" b="1" dirty="0">
+                <a:solidFill>
+                  <a:srgbClr val="0B4A44"/>
+                </a:solidFill>
+              </a:rPr>
+              <a:t>Why it matters: </a:t>
+            </a:r>
+            <a:pPr indent="0" marL="0">
+              <a:lnSpc>
+                <a:spcPts val="1800"/>
+              </a:lnSpc>
+              <a:buNone/>
+            </a:pPr>
+            <a:r>
+              <a:rPr lang="en-US" sz="1300" dirty="0">
+                <a:solidFill>
+                  <a:srgbClr val="0B4A44"/>
+                </a:solidFill>
+              </a:rPr>
+              <a:t>every emergency that starts with a match instead of a phone tree saves the most expensive currency in medicine — time. Only verified institutions can ask for blood, every donor is health-screened before entering the pool, and every blocked ineligible donor is a complication that never happens. The system also gets </a:t>
+            </a:r>
+            <a:pPr indent="0" marL="0">
+              <a:lnSpc>
+                <a:spcPts val="1800"/>
+              </a:lnSpc>
+              <a:buNone/>
+            </a:pPr>
+            <a:r>
+              <a:rPr lang="en-US" sz="1300" b="1" dirty="0">
+                <a:solidFill>
+                  <a:srgbClr val="0B4A44"/>
+                </a:solidFill>
+              </a:rPr>
+              <a:t>smarter with use</a:t>
+            </a:r>
+            <a:pPr indent="0" marL="0">
+              <a:lnSpc>
+                <a:spcPts val="1800"/>
+              </a:lnSpc>
+              <a:buNone/>
+            </a:pPr>
+            <a:r>
+              <a:rPr lang="en-US" sz="1300" dirty="0">
+                <a:solidFill>
+                  <a:srgbClr val="0B4A44"/>
+                </a:solidFill>
+              </a:rPr>
+              <a:t>: real requests and fulfillments feed the forecast model.</a:t>
+            </a:r>
+            <a:endParaRPr lang="en-US" sz="1300" dirty="0"/>
           </a:p>
         </p:txBody>
       </p:sp>
@@ -5194,7 +6114,7 @@
                   <a:srgbClr val="C31F2E"/>
                 </a:solidFill>
               </a:rPr>
-              <a:t>INNOVATION 2 · SELF-VERIFYING FORECASTS</a:t>
+              <a:t>INNOVATION 1 · SAFETY-FIRST MATCHING</a:t>
             </a:r>
             <a:endParaRPr lang="en-US" sz="1100" dirty="0"/>
           </a:p>
@@ -5233,7 +6153,7 @@
                   <a:srgbClr val="1B1B1D"/>
                 </a:solidFill>
               </a:rPr>
-              <a:t>Predictions that </a:t>
+              <a:t>Matching that </a:t>
             </a:r>
             <a:pPr indent="0" marL="0">
               <a:lnSpc>
@@ -5247,7 +6167,21 @@
                   <a:srgbClr val="C31F2E"/>
                 </a:solidFill>
               </a:rPr>
-              <a:t>prove their own accuracy.</a:t>
+              <a:t>refuses</a:t>
+            </a:r>
+            <a:pPr indent="0" marL="0">
+              <a:lnSpc>
+                <a:spcPts val="3000"/>
+              </a:lnSpc>
+              <a:buNone/>
+            </a:pPr>
+            <a:r>
+              <a:rPr lang="en-US" sz="2600" b="1" dirty="0">
+                <a:solidFill>
+                  <a:srgbClr val="1B1B1D"/>
+                </a:solidFill>
+              </a:rPr>
+              <a:t> to recommend ineligible donors.</a:t>
             </a:r>
             <a:endParaRPr lang="en-US" sz="2600" dirty="0"/>
           </a:p>
@@ -5282,7 +6216,7 @@
       </p:sp>
       <p:pic>
         <p:nvPicPr>
-          <p:cNvPr id="6" name="Image 0" descr="C:\Users\SANA KHAN\Documents\Qoder\2026-09-03\chat-1\bloodbridge-ai\assets\analytics.png">    </p:cNvPr>
+          <p:cNvPr id="6" name="Image 0" descr="C:\Users\SANA KHAN\Documents\Qoder\2026-09-03\chat-1\bloodbridge-ai\assets\donor-match.png">    </p:cNvPr>
           <p:cNvPicPr>
             <a:picLocks noChangeAspect="1"/>
           </p:cNvPicPr>
@@ -5334,7 +6268,7 @@
                   <a:srgbClr val="8B8B87"/>
                 </a:solidFill>
               </a:rPr>
-              <a:t>Analytics — 7-day forecast with live backtested accuracy card</a:t>
+              <a:t>Live AI match — ranked donors, blocked count, and no patient name anywhere</a:t>
             </a:r>
             <a:endParaRPr lang="en-US" sz="950" dirty="0"/>
           </a:p>
@@ -5397,7 +6331,7 @@
                   <a:srgbClr val="1B1B1D"/>
                 </a:solidFill>
               </a:rPr>
-              <a:t>The model</a:t>
+              <a:t>Weighted compatibility score</a:t>
             </a:r>
             <a:endParaRPr lang="en-US" sz="1400" dirty="0"/>
           </a:p>
@@ -5436,7 +6370,7 @@
                   <a:srgbClr val="5B5B58"/>
                 </a:solidFill>
               </a:rPr>
-              <a:t>Weighted 14-day moving average + linear-regression trend + weekday seasonality, per city and blood group — explainable by design.</a:t>
+              <a:t>Blood-type compatibility (40%) · haversine distance (30%) · donation recency (20%) · donor rating (10%). Critical requests re-weight toward distance. O- universal donors matched to every group.</a:t>
             </a:r>
             <a:endParaRPr lang="en-US" sz="1100" dirty="0"/>
           </a:p>
@@ -5459,11 +6393,11 @@
             </a:avLst>
           </a:prstGeom>
           <a:solidFill>
-            <a:srgbClr val="E6F5F3"/>
+            <a:srgbClr val="FBF0DD"/>
           </a:solidFill>
           <a:ln w="15875">
             <a:solidFill>
-              <a:srgbClr val="BFE3DF"/>
+              <a:srgbClr val="EBD6A8"/>
             </a:solidFill>
             <a:prstDash val="solid"/>
           </a:ln>
@@ -5496,10 +6430,10 @@
             <a:r>
               <a:rPr lang="en-US" sz="1400" b="1" dirty="0">
                 <a:solidFill>
-                  <a:srgbClr val="0F766E"/>
-                </a:solidFill>
-              </a:rPr>
-              <a:t>Backtested, not just claimed</a:t>
+                  <a:srgbClr val="B4740E"/>
+                </a:solidFill>
+              </a:rPr>
+              <a:t>The hard safety rule</a:t>
             </a:r>
             <a:endParaRPr lang="en-US" sz="1400" dirty="0"/>
           </a:p>
@@ -5535,10 +6469,10 @@
             <a:r>
               <a:rPr lang="en-US" sz="1100" dirty="0">
                 <a:solidFill>
-                  <a:srgbClr val="0B4A44"/>
-                </a:solidFill>
-              </a:rPr>
-              <a:t>The model is re-run on past days using only prior history, then compared with what actually happened — ~80–84% accuracy across 112 forecasts, displayed live in the product.</a:t>
+                  <a:srgbClr val="7A5008"/>
+                </a:solidFill>
+              </a:rPr>
+              <a:t>Donors inside the 90-day (men) / 120-day (women) resting window are excluded entirely — never just ranked lower. The blocked count is shown live on every match.</a:t>
             </a:r>
             <a:endParaRPr lang="en-US" sz="1100" dirty="0"/>
           </a:p>
@@ -5601,7 +6535,7 @@
                   <a:srgbClr val="1B1B1D"/>
                 </a:solidFill>
               </a:rPr>
-              <a:t>Learns from reality</a:t>
+              <a:t>New donors are never invisible</a:t>
             </a:r>
             <a:endParaRPr lang="en-US" sz="1400" dirty="0"/>
           </a:p>
@@ -5640,7 +6574,7 @@
                   <a:srgbClr val="5B5B58"/>
                 </a:solidFill>
               </a:rPr>
-              <a:t>Every real request and fulfillment updates demand history — the forecast improves as the system is used, instead of living on seed data.</a:t>
+              <a:t>Anyone registered in the last 24h is guaranteed a place in results — beyond the top-10 if needed — badged “New Donor”. Results also re-rank live on every view, so a donor who signs up after a request is posted still appears.</a:t>
             </a:r>
             <a:endParaRPr lang="en-US" sz="1100" dirty="0"/>
           </a:p>
@@ -5728,7 +6662,7 @@
                   <a:srgbClr val="C31F2E"/>
                 </a:solidFill>
               </a:rPr>
-              <a:t>INNOVATION 3 · CLOSED LOOP &amp; PRIVACY</a:t>
+              <a:t>INNOVATION 2 · SELF-VERIFYING FORECASTS</a:t>
             </a:r>
             <a:endParaRPr lang="en-US" sz="1100" dirty="0"/>
           </a:p>
@@ -5767,7 +6701,7 @@
                   <a:srgbClr val="1B1B1D"/>
                 </a:solidFill>
               </a:rPr>
-              <a:t>A data loop that keeps the system truthful — </a:t>
+              <a:t>Predictions that </a:t>
             </a:r>
             <a:pPr indent="0" marL="0">
               <a:lnSpc>
@@ -5781,7 +6715,7 @@
                   <a:srgbClr val="C31F2E"/>
                 </a:solidFill>
               </a:rPr>
-              <a:t>and privacy by default.</a:t>
+              <a:t>prove their own accuracy.</a:t>
             </a:r>
             <a:endParaRPr lang="en-US" sz="2600" dirty="0"/>
           </a:p>
@@ -5795,528 +6729,12 @@
         </p:nvSpPr>
         <p:spPr>
           <a:xfrm>
-            <a:off x="566928" y="1783080"/>
-            <a:ext cx="2578608" cy="1170432"/>
+            <a:off x="512064" y="1636776"/>
+            <a:ext cx="6647688" cy="4195953"/>
           </a:xfrm>
           <a:prstGeom prst="roundRect">
             <a:avLst>
-              <a:gd name="adj" fmla="val 7813"/>
-            </a:avLst>
-          </a:prstGeom>
-          <a:solidFill>
-            <a:srgbClr val="FFFFFF"/>
-          </a:solidFill>
-          <a:ln w="15875">
-            <a:solidFill>
-              <a:srgbClr val="E7E5E0"/>
-            </a:solidFill>
-            <a:prstDash val="solid"/>
-          </a:ln>
-        </p:spPr>
-      </p:sp>
-      <p:sp>
-        <p:nvSpPr>
-          <p:cNvPr id="6" name="Text 4"/>
-          <p:cNvSpPr/>
-          <p:nvPr/>
-        </p:nvSpPr>
-        <p:spPr>
-          <a:xfrm>
-            <a:off x="694944" y="1892808"/>
-            <a:ext cx="2322576" cy="310896"/>
-          </a:xfrm>
-          <a:prstGeom prst="rect">
-            <a:avLst/>
-          </a:prstGeom>
-          <a:noFill/>
-          <a:ln/>
-        </p:spPr>
-        <p:txBody>
-          <a:bodyPr wrap="square" rtlCol="0" anchor="ctr"/>
-          <a:lstStyle/>
-          <a:p>
-            <a:pPr algn="ctr" indent="0" marL="0">
-              <a:buNone/>
-            </a:pPr>
-            <a:r>
-              <a:rPr lang="en-US" sz="1250" b="1" dirty="0">
-                <a:solidFill>
-                  <a:srgbClr val="1B1B1D"/>
-                </a:solidFill>
-              </a:rPr>
-              <a:t>Blood request</a:t>
-            </a:r>
-            <a:endParaRPr lang="en-US" sz="1250" dirty="0"/>
-          </a:p>
-        </p:txBody>
-      </p:sp>
-      <p:sp>
-        <p:nvSpPr>
-          <p:cNvPr id="7" name="Text 5"/>
-          <p:cNvSpPr/>
-          <p:nvPr/>
-        </p:nvSpPr>
-        <p:spPr>
-          <a:xfrm>
-            <a:off x="694944" y="2203704"/>
-            <a:ext cx="2322576" cy="640080"/>
-          </a:xfrm>
-          <a:prstGeom prst="rect">
-            <a:avLst/>
-          </a:prstGeom>
-          <a:noFill/>
-          <a:ln/>
-        </p:spPr>
-        <p:txBody>
-          <a:bodyPr wrap="square" rtlCol="0" anchor="ctr"/>
-          <a:lstStyle/>
-          <a:p>
-            <a:pPr algn="ctr" indent="0" marL="0">
-              <a:lnSpc>
-                <a:spcPts val="1150"/>
-              </a:lnSpc>
-              <a:buNone/>
-            </a:pPr>
-            <a:r>
-              <a:rPr lang="en-US" sz="900" dirty="0">
-                <a:solidFill>
-                  <a:srgbClr val="5B5B58"/>
-                </a:solidFill>
-              </a:rPr>
-              <a:t>validated: blood group, units 1–20, PK phone format, real hospital</a:t>
-            </a:r>
-            <a:endParaRPr lang="en-US" sz="900" dirty="0"/>
-          </a:p>
-        </p:txBody>
-      </p:sp>
-      <p:sp>
-        <p:nvSpPr>
-          <p:cNvPr id="8" name="Text 6"/>
-          <p:cNvSpPr/>
-          <p:nvPr/>
-        </p:nvSpPr>
-        <p:spPr>
-          <a:xfrm>
-            <a:off x="3127248" y="2112264"/>
-            <a:ext cx="329184" cy="457200"/>
-          </a:xfrm>
-          <a:prstGeom prst="rect">
-            <a:avLst/>
-          </a:prstGeom>
-          <a:noFill/>
-          <a:ln/>
-        </p:spPr>
-        <p:txBody>
-          <a:bodyPr wrap="square" rtlCol="0" anchor="ctr"/>
-          <a:lstStyle/>
-          <a:p>
-            <a:pPr algn="ctr" indent="0" marL="0">
-              <a:buNone/>
-            </a:pPr>
-            <a:r>
-              <a:rPr lang="en-US" sz="2000" b="1" dirty="0">
-                <a:solidFill>
-                  <a:srgbClr val="C31F2E"/>
-                </a:solidFill>
-              </a:rPr>
-              <a:t>→</a:t>
-            </a:r>
-            <a:endParaRPr lang="en-US" sz="2000" dirty="0"/>
-          </a:p>
-        </p:txBody>
-      </p:sp>
-      <p:sp>
-        <p:nvSpPr>
-          <p:cNvPr id="9" name="Shape 7"/>
-          <p:cNvSpPr/>
-          <p:nvPr/>
-        </p:nvSpPr>
-        <p:spPr>
-          <a:xfrm>
-            <a:off x="3438144" y="1783080"/>
-            <a:ext cx="2578608" cy="1170432"/>
-          </a:xfrm>
-          <a:prstGeom prst="roundRect">
-            <a:avLst>
-              <a:gd name="adj" fmla="val 7813"/>
-            </a:avLst>
-          </a:prstGeom>
-          <a:solidFill>
-            <a:srgbClr val="FFFFFF"/>
-          </a:solidFill>
-          <a:ln w="15875">
-            <a:solidFill>
-              <a:srgbClr val="E7E5E0"/>
-            </a:solidFill>
-            <a:prstDash val="solid"/>
-          </a:ln>
-        </p:spPr>
-      </p:sp>
-      <p:sp>
-        <p:nvSpPr>
-          <p:cNvPr id="10" name="Text 8"/>
-          <p:cNvSpPr/>
-          <p:nvPr/>
-        </p:nvSpPr>
-        <p:spPr>
-          <a:xfrm>
-            <a:off x="3566160" y="1892808"/>
-            <a:ext cx="2322576" cy="310896"/>
-          </a:xfrm>
-          <a:prstGeom prst="rect">
-            <a:avLst/>
-          </a:prstGeom>
-          <a:noFill/>
-          <a:ln/>
-        </p:spPr>
-        <p:txBody>
-          <a:bodyPr wrap="square" rtlCol="0" anchor="ctr"/>
-          <a:lstStyle/>
-          <a:p>
-            <a:pPr algn="ctr" indent="0" marL="0">
-              <a:buNone/>
-            </a:pPr>
-            <a:r>
-              <a:rPr lang="en-US" sz="1250" b="1" dirty="0">
-                <a:solidFill>
-                  <a:srgbClr val="1B1B1D"/>
-                </a:solidFill>
-              </a:rPr>
-              <a:t>AI match</a:t>
-            </a:r>
-            <a:endParaRPr lang="en-US" sz="1250" dirty="0"/>
-          </a:p>
-        </p:txBody>
-      </p:sp>
-      <p:sp>
-        <p:nvSpPr>
-          <p:cNvPr id="11" name="Text 9"/>
-          <p:cNvSpPr/>
-          <p:nvPr/>
-        </p:nvSpPr>
-        <p:spPr>
-          <a:xfrm>
-            <a:off x="3566160" y="2203704"/>
-            <a:ext cx="2322576" cy="640080"/>
-          </a:xfrm>
-          <a:prstGeom prst="rect">
-            <a:avLst/>
-          </a:prstGeom>
-          <a:noFill/>
-          <a:ln/>
-        </p:spPr>
-        <p:txBody>
-          <a:bodyPr wrap="square" rtlCol="0" anchor="ctr"/>
-          <a:lstStyle/>
-          <a:p>
-            <a:pPr algn="ctr" indent="0" marL="0">
-              <a:lnSpc>
-                <a:spcPts val="1150"/>
-              </a:lnSpc>
-              <a:buNone/>
-            </a:pPr>
-            <a:r>
-              <a:rPr lang="en-US" sz="900" dirty="0">
-                <a:solidFill>
-                  <a:srgbClr val="5B5B58"/>
-                </a:solidFill>
-              </a:rPr>
-              <a:t>eligible donors ranked; ineligible ones hard-blocked</a:t>
-            </a:r>
-            <a:endParaRPr lang="en-US" sz="900" dirty="0"/>
-          </a:p>
-        </p:txBody>
-      </p:sp>
-      <p:sp>
-        <p:nvSpPr>
-          <p:cNvPr id="12" name="Text 10"/>
-          <p:cNvSpPr/>
-          <p:nvPr/>
-        </p:nvSpPr>
-        <p:spPr>
-          <a:xfrm>
-            <a:off x="5998464" y="2112264"/>
-            <a:ext cx="329184" cy="457200"/>
-          </a:xfrm>
-          <a:prstGeom prst="rect">
-            <a:avLst/>
-          </a:prstGeom>
-          <a:noFill/>
-          <a:ln/>
-        </p:spPr>
-        <p:txBody>
-          <a:bodyPr wrap="square" rtlCol="0" anchor="ctr"/>
-          <a:lstStyle/>
-          <a:p>
-            <a:pPr algn="ctr" indent="0" marL="0">
-              <a:buNone/>
-            </a:pPr>
-            <a:r>
-              <a:rPr lang="en-US" sz="2000" b="1" dirty="0">
-                <a:solidFill>
-                  <a:srgbClr val="C31F2E"/>
-                </a:solidFill>
-              </a:rPr>
-              <a:t>→</a:t>
-            </a:r>
-            <a:endParaRPr lang="en-US" sz="2000" dirty="0"/>
-          </a:p>
-        </p:txBody>
-      </p:sp>
-      <p:sp>
-        <p:nvSpPr>
-          <p:cNvPr id="13" name="Shape 11"/>
-          <p:cNvSpPr/>
-          <p:nvPr/>
-        </p:nvSpPr>
-        <p:spPr>
-          <a:xfrm>
-            <a:off x="6309360" y="1783080"/>
-            <a:ext cx="2578608" cy="1170432"/>
-          </a:xfrm>
-          <a:prstGeom prst="roundRect">
-            <a:avLst>
-              <a:gd name="adj" fmla="val 7813"/>
-            </a:avLst>
-          </a:prstGeom>
-          <a:solidFill>
-            <a:srgbClr val="FFFFFF"/>
-          </a:solidFill>
-          <a:ln w="15875">
-            <a:solidFill>
-              <a:srgbClr val="E7E5E0"/>
-            </a:solidFill>
-            <a:prstDash val="solid"/>
-          </a:ln>
-        </p:spPr>
-      </p:sp>
-      <p:sp>
-        <p:nvSpPr>
-          <p:cNvPr id="14" name="Text 12"/>
-          <p:cNvSpPr/>
-          <p:nvPr/>
-        </p:nvSpPr>
-        <p:spPr>
-          <a:xfrm>
-            <a:off x="6437376" y="1892808"/>
-            <a:ext cx="2322576" cy="310896"/>
-          </a:xfrm>
-          <a:prstGeom prst="rect">
-            <a:avLst/>
-          </a:prstGeom>
-          <a:noFill/>
-          <a:ln/>
-        </p:spPr>
-        <p:txBody>
-          <a:bodyPr wrap="square" rtlCol="0" anchor="ctr"/>
-          <a:lstStyle/>
-          <a:p>
-            <a:pPr algn="ctr" indent="0" marL="0">
-              <a:buNone/>
-            </a:pPr>
-            <a:r>
-              <a:rPr lang="en-US" sz="1250" b="1" dirty="0">
-                <a:solidFill>
-                  <a:srgbClr val="1B1B1D"/>
-                </a:solidFill>
-              </a:rPr>
-              <a:t>Transfusion</a:t>
-            </a:r>
-            <a:endParaRPr lang="en-US" sz="1250" dirty="0"/>
-          </a:p>
-        </p:txBody>
-      </p:sp>
-      <p:sp>
-        <p:nvSpPr>
-          <p:cNvPr id="15" name="Text 13"/>
-          <p:cNvSpPr/>
-          <p:nvPr/>
-        </p:nvSpPr>
-        <p:spPr>
-          <a:xfrm>
-            <a:off x="6437376" y="2203704"/>
-            <a:ext cx="2322576" cy="640080"/>
-          </a:xfrm>
-          <a:prstGeom prst="rect">
-            <a:avLst/>
-          </a:prstGeom>
-          <a:noFill/>
-          <a:ln/>
-        </p:spPr>
-        <p:txBody>
-          <a:bodyPr wrap="square" rtlCol="0" anchor="ctr"/>
-          <a:lstStyle/>
-          <a:p>
-            <a:pPr algn="ctr" indent="0" marL="0">
-              <a:lnSpc>
-                <a:spcPts val="1150"/>
-              </a:lnSpc>
-              <a:buNone/>
-            </a:pPr>
-            <a:r>
-              <a:rPr lang="en-US" sz="900" dirty="0">
-                <a:solidFill>
-                  <a:srgbClr val="5B5B58"/>
-                </a:solidFill>
-              </a:rPr>
-              <a:t>staff call matched donors — full numbers only here</a:t>
-            </a:r>
-            <a:endParaRPr lang="en-US" sz="900" dirty="0"/>
-          </a:p>
-        </p:txBody>
-      </p:sp>
-      <p:sp>
-        <p:nvSpPr>
-          <p:cNvPr id="16" name="Text 14"/>
-          <p:cNvSpPr/>
-          <p:nvPr/>
-        </p:nvSpPr>
-        <p:spPr>
-          <a:xfrm>
-            <a:off x="8869680" y="2112264"/>
-            <a:ext cx="329184" cy="457200"/>
-          </a:xfrm>
-          <a:prstGeom prst="rect">
-            <a:avLst/>
-          </a:prstGeom>
-          <a:noFill/>
-          <a:ln/>
-        </p:spPr>
-        <p:txBody>
-          <a:bodyPr wrap="square" rtlCol="0" anchor="ctr"/>
-          <a:lstStyle/>
-          <a:p>
-            <a:pPr algn="ctr" indent="0" marL="0">
-              <a:buNone/>
-            </a:pPr>
-            <a:r>
-              <a:rPr lang="en-US" sz="2000" b="1" dirty="0">
-                <a:solidFill>
-                  <a:srgbClr val="C31F2E"/>
-                </a:solidFill>
-              </a:rPr>
-              <a:t>→</a:t>
-            </a:r>
-            <a:endParaRPr lang="en-US" sz="2000" dirty="0"/>
-          </a:p>
-        </p:txBody>
-      </p:sp>
-      <p:sp>
-        <p:nvSpPr>
-          <p:cNvPr id="17" name="Shape 15"/>
-          <p:cNvSpPr/>
-          <p:nvPr/>
-        </p:nvSpPr>
-        <p:spPr>
-          <a:xfrm>
-            <a:off x="9180576" y="1783080"/>
-            <a:ext cx="2578608" cy="1170432"/>
-          </a:xfrm>
-          <a:prstGeom prst="roundRect">
-            <a:avLst>
-              <a:gd name="adj" fmla="val 7813"/>
-            </a:avLst>
-          </a:prstGeom>
-          <a:solidFill>
-            <a:srgbClr val="FFFFFF"/>
-          </a:solidFill>
-          <a:ln w="15875">
-            <a:solidFill>
-              <a:srgbClr val="E7E5E0"/>
-            </a:solidFill>
-            <a:prstDash val="solid"/>
-          </a:ln>
-        </p:spPr>
-      </p:sp>
-      <p:sp>
-        <p:nvSpPr>
-          <p:cNvPr id="18" name="Text 16"/>
-          <p:cNvSpPr/>
-          <p:nvPr/>
-        </p:nvSpPr>
-        <p:spPr>
-          <a:xfrm>
-            <a:off x="9308592" y="1892808"/>
-            <a:ext cx="2322576" cy="310896"/>
-          </a:xfrm>
-          <a:prstGeom prst="rect">
-            <a:avLst/>
-          </a:prstGeom>
-          <a:noFill/>
-          <a:ln/>
-        </p:spPr>
-        <p:txBody>
-          <a:bodyPr wrap="square" rtlCol="0" anchor="ctr"/>
-          <a:lstStyle/>
-          <a:p>
-            <a:pPr algn="ctr" indent="0" marL="0">
-              <a:buNone/>
-            </a:pPr>
-            <a:r>
-              <a:rPr lang="en-US" sz="1250" b="1" dirty="0">
-                <a:solidFill>
-                  <a:srgbClr val="1B1B1D"/>
-                </a:solidFill>
-              </a:rPr>
-              <a:t>Fulfillment confirmed</a:t>
-            </a:r>
-            <a:endParaRPr lang="en-US" sz="1250" dirty="0"/>
-          </a:p>
-        </p:txBody>
-      </p:sp>
-      <p:sp>
-        <p:nvSpPr>
-          <p:cNvPr id="19" name="Text 17"/>
-          <p:cNvSpPr/>
-          <p:nvPr/>
-        </p:nvSpPr>
-        <p:spPr>
-          <a:xfrm>
-            <a:off x="9308592" y="2203704"/>
-            <a:ext cx="2322576" cy="640080"/>
-          </a:xfrm>
-          <a:prstGeom prst="rect">
-            <a:avLst/>
-          </a:prstGeom>
-          <a:noFill/>
-          <a:ln/>
-        </p:spPr>
-        <p:txBody>
-          <a:bodyPr wrap="square" rtlCol="0" anchor="ctr"/>
-          <a:lstStyle/>
-          <a:p>
-            <a:pPr algn="ctr" indent="0" marL="0">
-              <a:lnSpc>
-                <a:spcPts val="1150"/>
-              </a:lnSpc>
-              <a:buNone/>
-            </a:pPr>
-            <a:r>
-              <a:rPr lang="en-US" sz="900" dirty="0">
-                <a:solidFill>
-                  <a:srgbClr val="5B5B58"/>
-                </a:solidFill>
-              </a:rPr>
-              <a:t>donors enter resting window · surplus restocks the bank · demand history updated</a:t>
-            </a:r>
-            <a:endParaRPr lang="en-US" sz="900" dirty="0"/>
-          </a:p>
-        </p:txBody>
-      </p:sp>
-      <p:sp>
-        <p:nvSpPr>
-          <p:cNvPr id="20" name="Shape 18"/>
-          <p:cNvSpPr/>
-          <p:nvPr/>
-        </p:nvSpPr>
-        <p:spPr>
-          <a:xfrm>
-            <a:off x="566928" y="3246120"/>
-            <a:ext cx="5367528" cy="2697480"/>
-          </a:xfrm>
-          <a:prstGeom prst="roundRect">
-            <a:avLst>
-              <a:gd name="adj" fmla="val 3390"/>
+              <a:gd name="adj" fmla="val 1743"/>
             </a:avLst>
           </a:prstGeom>
           <a:solidFill>
@@ -6330,16 +6748,40 @@
           </a:ln>
         </p:spPr>
       </p:sp>
-      <p:sp>
-        <p:nvSpPr>
-          <p:cNvPr id="21" name="Text 19"/>
-          <p:cNvSpPr/>
-          <p:nvPr/>
-        </p:nvSpPr>
-        <p:spPr>
-          <a:xfrm>
-            <a:off x="786384" y="3374136"/>
-            <a:ext cx="4928616" cy="320040"/>
+      <p:pic>
+        <p:nvPicPr>
+          <p:cNvPr id="6" name="Image 0" descr="C:\Users\SANA KHAN\Documents\Qoder\2026-09-03\chat-1\bloodbridge-ai\assets\analytics.png">    </p:cNvPr>
+          <p:cNvPicPr>
+            <a:picLocks noChangeAspect="1"/>
+          </p:cNvPicPr>
+          <p:nvPr/>
+        </p:nvPicPr>
+        <p:blipFill>
+          <a:blip r:embed="rId1"/>
+          <a:stretch>
+            <a:fillRect/>
+          </a:stretch>
+        </p:blipFill>
+        <p:spPr>
+          <a:xfrm>
+            <a:off x="566928" y="1691640"/>
+            <a:ext cx="6537960" cy="4086225"/>
+          </a:xfrm>
+          <a:prstGeom prst="rect">
+            <a:avLst/>
+          </a:prstGeom>
+        </p:spPr>
+      </p:pic>
+      <p:sp>
+        <p:nvSpPr>
+          <p:cNvPr id="7" name="Text 4"/>
+          <p:cNvSpPr/>
+          <p:nvPr/>
+        </p:nvSpPr>
+        <p:spPr>
+          <a:xfrm>
+            <a:off x="512064" y="5887593"/>
+            <a:ext cx="6647688" cy="274320"/>
           </a:xfrm>
           <a:prstGeom prst="rect">
             <a:avLst/>
@@ -6351,210 +6793,43 @@
           <a:bodyPr wrap="square" rtlCol="0" anchor="ctr"/>
           <a:lstStyle/>
           <a:p>
-            <a:pPr indent="0" marL="0">
-              <a:buNone/>
-            </a:pPr>
-            <a:r>
-              <a:rPr lang="en-US" sz="1400" b="1" dirty="0">
-                <a:solidFill>
-                  <a:srgbClr val="1B1B1D"/>
-                </a:solidFill>
-              </a:rPr>
-              <a:t>Privacy by default</a:t>
-            </a:r>
-            <a:endParaRPr lang="en-US" sz="1400" dirty="0"/>
-          </a:p>
-        </p:txBody>
-      </p:sp>
-      <p:sp>
-        <p:nvSpPr>
-          <p:cNvPr id="22" name="Text 20"/>
-          <p:cNvSpPr/>
-          <p:nvPr/>
-        </p:nvSpPr>
-        <p:spPr>
-          <a:xfrm>
-            <a:off x="786384" y="3721608"/>
-            <a:ext cx="4928616" cy="2057400"/>
-          </a:xfrm>
-          <a:prstGeom prst="rect">
-            <a:avLst/>
-          </a:prstGeom>
-          <a:noFill/>
-          <a:ln/>
-        </p:spPr>
-        <p:txBody>
-          <a:bodyPr wrap="square" rtlCol="0" anchor="t"/>
-          <a:lstStyle/>
-          <a:p>
-            <a:pPr indent="0" marL="0">
-              <a:lnSpc>
-                <a:spcPts val="1600"/>
-              </a:lnSpc>
-              <a:buNone/>
-            </a:pPr>
-            <a:r>
-              <a:rPr lang="en-US" sz="1050" b="1" dirty="0">
-                <a:solidFill>
-                  <a:srgbClr val="0F766E"/>
-                </a:solidFill>
-              </a:rPr>
-              <a:t>✓  </a:t>
-            </a:r>
-            <a:pPr indent="0" marL="0">
-              <a:lnSpc>
-                <a:spcPts val="1600"/>
-              </a:lnSpc>
-              <a:buNone/>
-            </a:pPr>
-            <a:r>
-              <a:rPr lang="en-US" sz="1050" dirty="0">
-                <a:solidFill>
-                  <a:srgbClr val="5B5B58"/>
-                </a:solidFill>
-              </a:rPr>
-              <a:t>Patient names masked everywhere public: </a:t>
-            </a:r>
-            <a:pPr indent="0" marL="0">
-              <a:lnSpc>
-                <a:spcPts val="1600"/>
-              </a:lnSpc>
-              <a:buNone/>
-            </a:pPr>
-            <a:r>
-              <a:rPr lang="en-US" sz="1050" b="1" dirty="0">
-                <a:solidFill>
-                  <a:srgbClr val="1B1B1D"/>
-                </a:solidFill>
-              </a:rPr>
-              <a:t>“M*** B***”</a:t>
-            </a:r>
-            <a:pPr indent="0" marL="0">
-              <a:lnSpc>
-                <a:spcPts val="1600"/>
-              </a:lnSpc>
-              <a:buNone/>
-            </a:pPr>
-            <a:r>
-              <a:rPr lang="en-US" sz="1050" dirty="0">
-                <a:solidFill>
-                  <a:srgbClr val="5B5B58"/>
-                </a:solidFill>
-              </a:rPr>
-              <a:t> — contact numbers never returned
-</a:t>
-            </a:r>
-            <a:pPr indent="0" marL="0">
-              <a:lnSpc>
-                <a:spcPts val="1600"/>
-              </a:lnSpc>
-              <a:buNone/>
-            </a:pPr>
-            <a:r>
-              <a:rPr lang="en-US" sz="1050" b="1" dirty="0">
-                <a:solidFill>
-                  <a:srgbClr val="0F766E"/>
-                </a:solidFill>
-              </a:rPr>
-              <a:t>✓  </a:t>
-            </a:r>
-            <a:pPr indent="0" marL="0">
-              <a:lnSpc>
-                <a:spcPts val="1600"/>
-              </a:lnSpc>
-              <a:buNone/>
-            </a:pPr>
-            <a:r>
-              <a:rPr lang="en-US" sz="1050" dirty="0">
-                <a:solidFill>
-                  <a:srgbClr val="5B5B58"/>
-                </a:solidFill>
-              </a:rPr>
-              <a:t>Donor phones masked in the directory: </a:t>
-            </a:r>
-            <a:pPr indent="0" marL="0">
-              <a:lnSpc>
-                <a:spcPts val="1600"/>
-              </a:lnSpc>
-              <a:buNone/>
-            </a:pPr>
-            <a:r>
-              <a:rPr lang="en-US" sz="1050" b="1" dirty="0">
-                <a:solidFill>
-                  <a:srgbClr val="1B1B1D"/>
-                </a:solidFill>
-              </a:rPr>
-              <a:t>0335•••••••</a:t>
-            </a:r>
-            <a:pPr indent="0" marL="0">
-              <a:lnSpc>
-                <a:spcPts val="1600"/>
-              </a:lnSpc>
-              <a:buNone/>
-            </a:pPr>
-            <a:r>
-              <a:rPr lang="en-US" sz="1050" dirty="0">
-                <a:solidFill>
-                  <a:srgbClr val="5B5B58"/>
-                </a:solidFill>
-              </a:rPr>
-              <a:t> — real numbers revealed only through the AI match for an active request
-</a:t>
-            </a:r>
-            <a:pPr indent="0" marL="0">
-              <a:lnSpc>
-                <a:spcPts val="1600"/>
-              </a:lnSpc>
-              <a:buNone/>
-            </a:pPr>
-            <a:r>
-              <a:rPr lang="en-US" sz="1050" b="1" dirty="0">
-                <a:solidFill>
-                  <a:srgbClr val="0F766E"/>
-                </a:solidFill>
-              </a:rPr>
-              <a:t>✓  </a:t>
-            </a:r>
-            <a:pPr indent="0" marL="0">
-              <a:lnSpc>
-                <a:spcPts val="1600"/>
-              </a:lnSpc>
-              <a:buNone/>
-            </a:pPr>
-            <a:r>
-              <a:rPr lang="en-US" sz="1050" dirty="0">
-                <a:solidFill>
-                  <a:srgbClr val="5B5B58"/>
-                </a:solidFill>
-              </a:rPr>
-              <a:t>All inputs validated at the API boundary — malformed or malicious data is rejected with clear errors</a:t>
-            </a:r>
-            <a:endParaRPr lang="en-US" sz="1050" dirty="0"/>
-          </a:p>
-        </p:txBody>
-      </p:sp>
-      <p:sp>
-        <p:nvSpPr>
-          <p:cNvPr id="23" name="Shape 21"/>
-          <p:cNvSpPr/>
-          <p:nvPr/>
-        </p:nvSpPr>
-        <p:spPr>
-          <a:xfrm>
-            <a:off x="6254496" y="3246120"/>
-            <a:ext cx="5367528" cy="2697480"/>
+            <a:pPr algn="ctr" indent="0" marL="0">
+              <a:buNone/>
+            </a:pPr>
+            <a:r>
+              <a:rPr lang="en-US" sz="950" dirty="0">
+                <a:solidFill>
+                  <a:srgbClr val="8B8B87"/>
+                </a:solidFill>
+              </a:rPr>
+              <a:t>Analytics — 7-day forecast with live backtested accuracy card</a:t>
+            </a:r>
+            <a:endParaRPr lang="en-US" sz="950" dirty="0"/>
+          </a:p>
+        </p:txBody>
+      </p:sp>
+      <p:sp>
+        <p:nvSpPr>
+          <p:cNvPr id="8" name="Shape 5"/>
+          <p:cNvSpPr/>
+          <p:nvPr/>
+        </p:nvSpPr>
+        <p:spPr>
+          <a:xfrm>
+            <a:off x="7424928" y="1691640"/>
+            <a:ext cx="4197096" cy="1481328"/>
           </a:xfrm>
           <a:prstGeom prst="roundRect">
             <a:avLst>
-              <a:gd name="adj" fmla="val 3390"/>
+              <a:gd name="adj" fmla="val 6173"/>
             </a:avLst>
           </a:prstGeom>
           <a:solidFill>
-            <a:srgbClr val="FDECEE"/>
+            <a:srgbClr val="FAFAF8"/>
           </a:solidFill>
           <a:ln w="15875">
             <a:solidFill>
-              <a:srgbClr val="F0C7CB"/>
+              <a:srgbClr val="E7E5E0"/>
             </a:solidFill>
             <a:prstDash val="solid"/>
           </a:ln>
@@ -6562,14 +6837,14 @@
       </p:sp>
       <p:sp>
         <p:nvSpPr>
-          <p:cNvPr id="24" name="Text 22"/>
-          <p:cNvSpPr/>
-          <p:nvPr/>
-        </p:nvSpPr>
-        <p:spPr>
-          <a:xfrm>
-            <a:off x="6473952" y="3374136"/>
-            <a:ext cx="4928616" cy="320040"/>
+          <p:cNvPr id="9" name="Text 6"/>
+          <p:cNvSpPr/>
+          <p:nvPr/>
+        </p:nvSpPr>
+        <p:spPr>
+          <a:xfrm>
+            <a:off x="7644384" y="1819656"/>
+            <a:ext cx="3758184" cy="329184"/>
           </a:xfrm>
           <a:prstGeom prst="rect">
             <a:avLst/>
@@ -6587,10 +6862,10 @@
             <a:r>
               <a:rPr lang="en-US" sz="1400" b="1" dirty="0">
                 <a:solidFill>
-                  <a:srgbClr val="8F1620"/>
-                </a:solidFill>
-              </a:rPr>
-              <a:t>Trust model (mobile prototype)</a:t>
+                  <a:srgbClr val="1B1B1D"/>
+                </a:solidFill>
+              </a:rPr>
+              <a:t>The model</a:t>
             </a:r>
             <a:endParaRPr lang="en-US" sz="1400" dirty="0"/>
           </a:p>
@@ -6598,14 +6873,14 @@
       </p:sp>
       <p:sp>
         <p:nvSpPr>
-          <p:cNvPr id="25" name="Text 23"/>
-          <p:cNvSpPr/>
-          <p:nvPr/>
-        </p:nvSpPr>
-        <p:spPr>
-          <a:xfrm>
-            <a:off x="6473952" y="3721608"/>
-            <a:ext cx="4928616" cy="2057400"/>
+          <p:cNvPr id="10" name="Text 7"/>
+          <p:cNvSpPr/>
+          <p:nvPr/>
+        </p:nvSpPr>
+        <p:spPr>
+          <a:xfrm>
+            <a:off x="7644384" y="2148840"/>
+            <a:ext cx="3758184" cy="877824"/>
           </a:xfrm>
           <a:prstGeom prst="rect">
             <a:avLst/>
@@ -6619,147 +6894,223 @@
           <a:p>
             <a:pPr indent="0" marL="0">
               <a:lnSpc>
-                <a:spcPts val="1600"/>
-              </a:lnSpc>
-              <a:buNone/>
-            </a:pPr>
-            <a:r>
-              <a:rPr lang="en-US" sz="1050" b="1" dirty="0">
-                <a:solidFill>
-                  <a:srgbClr val="8F1620"/>
-                </a:solidFill>
-              </a:rPr>
-              <a:t>✓  </a:t>
-            </a:r>
-            <a:pPr indent="0" marL="0">
-              <a:lnSpc>
-                <a:spcPts val="1600"/>
-              </a:lnSpc>
-              <a:buNone/>
-            </a:pPr>
-            <a:r>
-              <a:rPr lang="en-US" sz="1050" dirty="0">
+                <a:spcPts val="1500"/>
+              </a:lnSpc>
+              <a:buNone/>
+            </a:pPr>
+            <a:r>
+              <a:rPr lang="en-US" sz="1100" dirty="0">
                 <a:solidFill>
                   <a:srgbClr val="5B5B58"/>
                 </a:solidFill>
               </a:rPr>
-              <a:t>Only </a:t>
-            </a:r>
-            <a:pPr indent="0" marL="0">
-              <a:lnSpc>
-                <a:spcPts val="1600"/>
-              </a:lnSpc>
-              <a:buNone/>
-            </a:pPr>
-            <a:r>
-              <a:rPr lang="en-US" sz="1050" b="1" dirty="0">
+              <a:t>Weighted 14-day moving average + linear-regression trend + weekday seasonality, per city and blood group — explainable by design.</a:t>
+            </a:r>
+            <a:endParaRPr lang="en-US" sz="1100" dirty="0"/>
+          </a:p>
+        </p:txBody>
+      </p:sp>
+      <p:sp>
+        <p:nvSpPr>
+          <p:cNvPr id="11" name="Shape 8"/>
+          <p:cNvSpPr/>
+          <p:nvPr/>
+        </p:nvSpPr>
+        <p:spPr>
+          <a:xfrm>
+            <a:off x="7424928" y="3355848"/>
+            <a:ext cx="4197096" cy="1481328"/>
+          </a:xfrm>
+          <a:prstGeom prst="roundRect">
+            <a:avLst>
+              <a:gd name="adj" fmla="val 6173"/>
+            </a:avLst>
+          </a:prstGeom>
+          <a:solidFill>
+            <a:srgbClr val="E6F5F3"/>
+          </a:solidFill>
+          <a:ln w="15875">
+            <a:solidFill>
+              <a:srgbClr val="BFE3DF"/>
+            </a:solidFill>
+            <a:prstDash val="solid"/>
+          </a:ln>
+        </p:spPr>
+      </p:sp>
+      <p:sp>
+        <p:nvSpPr>
+          <p:cNvPr id="12" name="Text 9"/>
+          <p:cNvSpPr/>
+          <p:nvPr/>
+        </p:nvSpPr>
+        <p:spPr>
+          <a:xfrm>
+            <a:off x="7644384" y="3483864"/>
+            <a:ext cx="3758184" cy="329184"/>
+          </a:xfrm>
+          <a:prstGeom prst="rect">
+            <a:avLst/>
+          </a:prstGeom>
+          <a:noFill/>
+          <a:ln/>
+        </p:spPr>
+        <p:txBody>
+          <a:bodyPr wrap="square" rtlCol="0" anchor="ctr"/>
+          <a:lstStyle/>
+          <a:p>
+            <a:pPr indent="0" marL="0">
+              <a:buNone/>
+            </a:pPr>
+            <a:r>
+              <a:rPr lang="en-US" sz="1400" b="1" dirty="0">
+                <a:solidFill>
+                  <a:srgbClr val="0F766E"/>
+                </a:solidFill>
+              </a:rPr>
+              <a:t>Backtested, not just claimed</a:t>
+            </a:r>
+            <a:endParaRPr lang="en-US" sz="1400" dirty="0"/>
+          </a:p>
+        </p:txBody>
+      </p:sp>
+      <p:sp>
+        <p:nvSpPr>
+          <p:cNvPr id="13" name="Text 10"/>
+          <p:cNvSpPr/>
+          <p:nvPr/>
+        </p:nvSpPr>
+        <p:spPr>
+          <a:xfrm>
+            <a:off x="7644384" y="3813048"/>
+            <a:ext cx="3758184" cy="877824"/>
+          </a:xfrm>
+          <a:prstGeom prst="rect">
+            <a:avLst/>
+          </a:prstGeom>
+          <a:noFill/>
+          <a:ln/>
+        </p:spPr>
+        <p:txBody>
+          <a:bodyPr wrap="square" rtlCol="0" anchor="t"/>
+          <a:lstStyle/>
+          <a:p>
+            <a:pPr indent="0" marL="0">
+              <a:lnSpc>
+                <a:spcPts val="1500"/>
+              </a:lnSpc>
+              <a:buNone/>
+            </a:pPr>
+            <a:r>
+              <a:rPr lang="en-US" sz="1100" dirty="0">
+                <a:solidFill>
+                  <a:srgbClr val="0B4A44"/>
+                </a:solidFill>
+              </a:rPr>
+              <a:t>The model is re-run on past days using only prior history, then compared with what actually happened — ~80–84% accuracy across 112 forecasts, displayed live in the product.</a:t>
+            </a:r>
+            <a:endParaRPr lang="en-US" sz="1100" dirty="0"/>
+          </a:p>
+        </p:txBody>
+      </p:sp>
+      <p:sp>
+        <p:nvSpPr>
+          <p:cNvPr id="14" name="Shape 11"/>
+          <p:cNvSpPr/>
+          <p:nvPr/>
+        </p:nvSpPr>
+        <p:spPr>
+          <a:xfrm>
+            <a:off x="7424928" y="5020056"/>
+            <a:ext cx="4197096" cy="1481328"/>
+          </a:xfrm>
+          <a:prstGeom prst="roundRect">
+            <a:avLst>
+              <a:gd name="adj" fmla="val 6173"/>
+            </a:avLst>
+          </a:prstGeom>
+          <a:solidFill>
+            <a:srgbClr val="FAFAF8"/>
+          </a:solidFill>
+          <a:ln w="15875">
+            <a:solidFill>
+              <a:srgbClr val="E7E5E0"/>
+            </a:solidFill>
+            <a:prstDash val="solid"/>
+          </a:ln>
+        </p:spPr>
+      </p:sp>
+      <p:sp>
+        <p:nvSpPr>
+          <p:cNvPr id="15" name="Text 12"/>
+          <p:cNvSpPr/>
+          <p:nvPr/>
+        </p:nvSpPr>
+        <p:spPr>
+          <a:xfrm>
+            <a:off x="7644384" y="5148072"/>
+            <a:ext cx="3758184" cy="329184"/>
+          </a:xfrm>
+          <a:prstGeom prst="rect">
+            <a:avLst/>
+          </a:prstGeom>
+          <a:noFill/>
+          <a:ln/>
+        </p:spPr>
+        <p:txBody>
+          <a:bodyPr wrap="square" rtlCol="0" anchor="ctr"/>
+          <a:lstStyle/>
+          <a:p>
+            <a:pPr indent="0" marL="0">
+              <a:buNone/>
+            </a:pPr>
+            <a:r>
+              <a:rPr lang="en-US" sz="1400" b="1" dirty="0">
                 <a:solidFill>
                   <a:srgbClr val="1B1B1D"/>
                 </a:solidFill>
               </a:rPr>
-              <a:t>verified hospital / blood-bank staff</a:t>
-            </a:r>
-            <a:pPr indent="0" marL="0">
-              <a:lnSpc>
-                <a:spcPts val="1600"/>
-              </a:lnSpc>
-              <a:buNone/>
-            </a:pPr>
-            <a:r>
-              <a:rPr lang="en-US" sz="1050" dirty="0">
+              <a:t>Learns from reality</a:t>
+            </a:r>
+            <a:endParaRPr lang="en-US" sz="1400" dirty="0"/>
+          </a:p>
+        </p:txBody>
+      </p:sp>
+      <p:sp>
+        <p:nvSpPr>
+          <p:cNvPr id="16" name="Text 13"/>
+          <p:cNvSpPr/>
+          <p:nvPr/>
+        </p:nvSpPr>
+        <p:spPr>
+          <a:xfrm>
+            <a:off x="7644384" y="5477256"/>
+            <a:ext cx="3758184" cy="877824"/>
+          </a:xfrm>
+          <a:prstGeom prst="rect">
+            <a:avLst/>
+          </a:prstGeom>
+          <a:noFill/>
+          <a:ln/>
+        </p:spPr>
+        <p:txBody>
+          <a:bodyPr wrap="square" rtlCol="0" anchor="t"/>
+          <a:lstStyle/>
+          <a:p>
+            <a:pPr indent="0" marL="0">
+              <a:lnSpc>
+                <a:spcPts val="1500"/>
+              </a:lnSpc>
+              <a:buNone/>
+            </a:pPr>
+            <a:r>
+              <a:rPr lang="en-US" sz="1100" dirty="0">
                 <a:solidFill>
                   <a:srgbClr val="5B5B58"/>
                 </a:solidFill>
               </a:rPr>
-              <a:t> can post requests — institutions submit registration numbers
-</a:t>
-            </a:r>
-            <a:pPr indent="0" marL="0">
-              <a:lnSpc>
-                <a:spcPts val="1600"/>
-              </a:lnSpc>
-              <a:buNone/>
-            </a:pPr>
-            <a:r>
-              <a:rPr lang="en-US" sz="1050" b="1" dirty="0">
-                <a:solidFill>
-                  <a:srgbClr val="8F1620"/>
-                </a:solidFill>
-              </a:rPr>
-              <a:t>✓  </a:t>
-            </a:r>
-            <a:pPr indent="0" marL="0">
-              <a:lnSpc>
-                <a:spcPts val="1600"/>
-              </a:lnSpc>
-              <a:buNone/>
-            </a:pPr>
-            <a:r>
-              <a:rPr lang="en-US" sz="1050" dirty="0">
-                <a:solidFill>
-                  <a:srgbClr val="5B5B58"/>
-                </a:solidFill>
-              </a:rPr>
-              <a:t>Donors complete an </a:t>
-            </a:r>
-            <a:pPr indent="0" marL="0">
-              <a:lnSpc>
-                <a:spcPts val="1600"/>
-              </a:lnSpc>
-              <a:buNone/>
-            </a:pPr>
-            <a:r>
-              <a:rPr lang="en-US" sz="1050" b="1" dirty="0">
-                <a:solidFill>
-                  <a:srgbClr val="1B1B1D"/>
-                </a:solidFill>
-              </a:rPr>
-              <a:t>8-point health self-screening</a:t>
-            </a:r>
-            <a:pPr indent="0" marL="0">
-              <a:lnSpc>
-                <a:spcPts val="1600"/>
-              </a:lnSpc>
-              <a:buNone/>
-            </a:pPr>
-            <a:r>
-              <a:rPr lang="en-US" sz="1050" dirty="0">
-                <a:solidFill>
-                  <a:srgbClr val="5B5B58"/>
-                </a:solidFill>
-              </a:rPr>
-              <a:t> (re-screened in person at the bank, as required)
-</a:t>
-            </a:r>
-            <a:pPr indent="0" marL="0">
-              <a:lnSpc>
-                <a:spcPts val="1600"/>
-              </a:lnSpc>
-              <a:buNone/>
-            </a:pPr>
-            <a:r>
-              <a:rPr lang="en-US" sz="1050" b="1" dirty="0">
-                <a:solidFill>
-                  <a:srgbClr val="8F1620"/>
-                </a:solidFill>
-              </a:rPr>
-              <a:t>✓  </a:t>
-            </a:r>
-            <a:pPr indent="0" marL="0">
-              <a:lnSpc>
-                <a:spcPts val="1600"/>
-              </a:lnSpc>
-              <a:buNone/>
-            </a:pPr>
-            <a:r>
-              <a:rPr lang="en-US" sz="1050" dirty="0">
-                <a:solidFill>
-                  <a:srgbClr val="5B5B58"/>
-                </a:solidFill>
-              </a:rPr>
-              <a:t>Patient identity replaced by a private internal reference on the shared feed</a:t>
-            </a:r>
-            <a:endParaRPr lang="en-US" sz="1050" dirty="0"/>
+              <a:t>Every real request and fulfillment updates demand history — the forecast improves as the system is used, instead of living on seed data.</a:t>
+            </a:r>
+            <a:endParaRPr lang="en-US" sz="1100" dirty="0"/>
           </a:p>
         </p:txBody>
       </p:sp>
@@ -6845,7 +7196,7 @@
                   <a:srgbClr val="C31F2E"/>
                 </a:solidFill>
               </a:rPr>
-              <a:t>THE TECHNOLOGY</a:t>
+              <a:t>INNOVATION 3 · CLOSED LOOP &amp; PRIVACY</a:t>
             </a:r>
             <a:endParaRPr lang="en-US" sz="1100" dirty="0"/>
           </a:p>
@@ -6884,7 +7235,21 @@
                   <a:srgbClr val="1B1B1D"/>
                 </a:solidFill>
               </a:rPr>
-              <a:t>Simple stack, engineered honestly.</a:t>
+              <a:t>A data loop that keeps the system truthful — </a:t>
+            </a:r>
+            <a:pPr indent="0" marL="0">
+              <a:lnSpc>
+                <a:spcPts val="3000"/>
+              </a:lnSpc>
+              <a:buNone/>
+            </a:pPr>
+            <a:r>
+              <a:rPr lang="en-US" sz="2600" b="1" dirty="0">
+                <a:solidFill>
+                  <a:srgbClr val="C31F2E"/>
+                </a:solidFill>
+              </a:rPr>
+              <a:t>and privacy by default.</a:t>
             </a:r>
             <a:endParaRPr lang="en-US" sz="2600" dirty="0"/>
           </a:p>
@@ -6898,12 +7263,528 @@
         </p:nvSpPr>
         <p:spPr>
           <a:xfrm>
-            <a:off x="566928" y="1691640"/>
-            <a:ext cx="5669280" cy="1426464"/>
+            <a:off x="566928" y="1783080"/>
+            <a:ext cx="2578608" cy="1170432"/>
           </a:xfrm>
           <a:prstGeom prst="roundRect">
             <a:avLst>
-              <a:gd name="adj" fmla="val 6410"/>
+              <a:gd name="adj" fmla="val 7813"/>
+            </a:avLst>
+          </a:prstGeom>
+          <a:solidFill>
+            <a:srgbClr val="FFFFFF"/>
+          </a:solidFill>
+          <a:ln w="15875">
+            <a:solidFill>
+              <a:srgbClr val="E7E5E0"/>
+            </a:solidFill>
+            <a:prstDash val="solid"/>
+          </a:ln>
+        </p:spPr>
+      </p:sp>
+      <p:sp>
+        <p:nvSpPr>
+          <p:cNvPr id="6" name="Text 4"/>
+          <p:cNvSpPr/>
+          <p:nvPr/>
+        </p:nvSpPr>
+        <p:spPr>
+          <a:xfrm>
+            <a:off x="694944" y="1892808"/>
+            <a:ext cx="2322576" cy="310896"/>
+          </a:xfrm>
+          <a:prstGeom prst="rect">
+            <a:avLst/>
+          </a:prstGeom>
+          <a:noFill/>
+          <a:ln/>
+        </p:spPr>
+        <p:txBody>
+          <a:bodyPr wrap="square" rtlCol="0" anchor="ctr"/>
+          <a:lstStyle/>
+          <a:p>
+            <a:pPr algn="ctr" indent="0" marL="0">
+              <a:buNone/>
+            </a:pPr>
+            <a:r>
+              <a:rPr lang="en-US" sz="1250" b="1" dirty="0">
+                <a:solidFill>
+                  <a:srgbClr val="1B1B1D"/>
+                </a:solidFill>
+              </a:rPr>
+              <a:t>Verified request</a:t>
+            </a:r>
+            <a:endParaRPr lang="en-US" sz="1250" dirty="0"/>
+          </a:p>
+        </p:txBody>
+      </p:sp>
+      <p:sp>
+        <p:nvSpPr>
+          <p:cNvPr id="7" name="Text 5"/>
+          <p:cNvSpPr/>
+          <p:nvPr/>
+        </p:nvSpPr>
+        <p:spPr>
+          <a:xfrm>
+            <a:off x="694944" y="2203704"/>
+            <a:ext cx="2322576" cy="640080"/>
+          </a:xfrm>
+          <a:prstGeom prst="rect">
+            <a:avLst/>
+          </a:prstGeom>
+          <a:noFill/>
+          <a:ln/>
+        </p:spPr>
+        <p:txBody>
+          <a:bodyPr wrap="square" rtlCol="0" anchor="ctr"/>
+          <a:lstStyle/>
+          <a:p>
+            <a:pPr algn="ctr" indent="0" marL="0">
+              <a:lnSpc>
+                <a:spcPts val="1150"/>
+              </a:lnSpc>
+              <a:buNone/>
+            </a:pPr>
+            <a:r>
+              <a:rPr lang="en-US" sz="900" dirty="0">
+                <a:solidFill>
+                  <a:srgbClr val="5B5B58"/>
+                </a:solidFill>
+              </a:rPr>
+              <a:t>posted by approved staff only, with a private internal reference</a:t>
+            </a:r>
+            <a:endParaRPr lang="en-US" sz="900" dirty="0"/>
+          </a:p>
+        </p:txBody>
+      </p:sp>
+      <p:sp>
+        <p:nvSpPr>
+          <p:cNvPr id="8" name="Text 6"/>
+          <p:cNvSpPr/>
+          <p:nvPr/>
+        </p:nvSpPr>
+        <p:spPr>
+          <a:xfrm>
+            <a:off x="3127248" y="2112264"/>
+            <a:ext cx="329184" cy="457200"/>
+          </a:xfrm>
+          <a:prstGeom prst="rect">
+            <a:avLst/>
+          </a:prstGeom>
+          <a:noFill/>
+          <a:ln/>
+        </p:spPr>
+        <p:txBody>
+          <a:bodyPr wrap="square" rtlCol="0" anchor="ctr"/>
+          <a:lstStyle/>
+          <a:p>
+            <a:pPr algn="ctr" indent="0" marL="0">
+              <a:buNone/>
+            </a:pPr>
+            <a:r>
+              <a:rPr lang="en-US" sz="2000" b="1" dirty="0">
+                <a:solidFill>
+                  <a:srgbClr val="C31F2E"/>
+                </a:solidFill>
+              </a:rPr>
+              <a:t>→</a:t>
+            </a:r>
+            <a:endParaRPr lang="en-US" sz="2000" dirty="0"/>
+          </a:p>
+        </p:txBody>
+      </p:sp>
+      <p:sp>
+        <p:nvSpPr>
+          <p:cNvPr id="9" name="Shape 7"/>
+          <p:cNvSpPr/>
+          <p:nvPr/>
+        </p:nvSpPr>
+        <p:spPr>
+          <a:xfrm>
+            <a:off x="3438144" y="1783080"/>
+            <a:ext cx="2578608" cy="1170432"/>
+          </a:xfrm>
+          <a:prstGeom prst="roundRect">
+            <a:avLst>
+              <a:gd name="adj" fmla="val 7813"/>
+            </a:avLst>
+          </a:prstGeom>
+          <a:solidFill>
+            <a:srgbClr val="FFFFFF"/>
+          </a:solidFill>
+          <a:ln w="15875">
+            <a:solidFill>
+              <a:srgbClr val="E7E5E0"/>
+            </a:solidFill>
+            <a:prstDash val="solid"/>
+          </a:ln>
+        </p:spPr>
+      </p:sp>
+      <p:sp>
+        <p:nvSpPr>
+          <p:cNvPr id="10" name="Text 8"/>
+          <p:cNvSpPr/>
+          <p:nvPr/>
+        </p:nvSpPr>
+        <p:spPr>
+          <a:xfrm>
+            <a:off x="3566160" y="1892808"/>
+            <a:ext cx="2322576" cy="310896"/>
+          </a:xfrm>
+          <a:prstGeom prst="rect">
+            <a:avLst/>
+          </a:prstGeom>
+          <a:noFill/>
+          <a:ln/>
+        </p:spPr>
+        <p:txBody>
+          <a:bodyPr wrap="square" rtlCol="0" anchor="ctr"/>
+          <a:lstStyle/>
+          <a:p>
+            <a:pPr algn="ctr" indent="0" marL="0">
+              <a:buNone/>
+            </a:pPr>
+            <a:r>
+              <a:rPr lang="en-US" sz="1250" b="1" dirty="0">
+                <a:solidFill>
+                  <a:srgbClr val="1B1B1D"/>
+                </a:solidFill>
+              </a:rPr>
+              <a:t>AI match</a:t>
+            </a:r>
+            <a:endParaRPr lang="en-US" sz="1250" dirty="0"/>
+          </a:p>
+        </p:txBody>
+      </p:sp>
+      <p:sp>
+        <p:nvSpPr>
+          <p:cNvPr id="11" name="Text 9"/>
+          <p:cNvSpPr/>
+          <p:nvPr/>
+        </p:nvSpPr>
+        <p:spPr>
+          <a:xfrm>
+            <a:off x="3566160" y="2203704"/>
+            <a:ext cx="2322576" cy="640080"/>
+          </a:xfrm>
+          <a:prstGeom prst="rect">
+            <a:avLst/>
+          </a:prstGeom>
+          <a:noFill/>
+          <a:ln/>
+        </p:spPr>
+        <p:txBody>
+          <a:bodyPr wrap="square" rtlCol="0" anchor="ctr"/>
+          <a:lstStyle/>
+          <a:p>
+            <a:pPr algn="ctr" indent="0" marL="0">
+              <a:lnSpc>
+                <a:spcPts val="1150"/>
+              </a:lnSpc>
+              <a:buNone/>
+            </a:pPr>
+            <a:r>
+              <a:rPr lang="en-US" sz="900" dirty="0">
+                <a:solidFill>
+                  <a:srgbClr val="5B5B58"/>
+                </a:solidFill>
+              </a:rPr>
+              <a:t>eligible donors ranked; ineligible ones hard-blocked</a:t>
+            </a:r>
+            <a:endParaRPr lang="en-US" sz="900" dirty="0"/>
+          </a:p>
+        </p:txBody>
+      </p:sp>
+      <p:sp>
+        <p:nvSpPr>
+          <p:cNvPr id="12" name="Text 10"/>
+          <p:cNvSpPr/>
+          <p:nvPr/>
+        </p:nvSpPr>
+        <p:spPr>
+          <a:xfrm>
+            <a:off x="5998464" y="2112264"/>
+            <a:ext cx="329184" cy="457200"/>
+          </a:xfrm>
+          <a:prstGeom prst="rect">
+            <a:avLst/>
+          </a:prstGeom>
+          <a:noFill/>
+          <a:ln/>
+        </p:spPr>
+        <p:txBody>
+          <a:bodyPr wrap="square" rtlCol="0" anchor="ctr"/>
+          <a:lstStyle/>
+          <a:p>
+            <a:pPr algn="ctr" indent="0" marL="0">
+              <a:buNone/>
+            </a:pPr>
+            <a:r>
+              <a:rPr lang="en-US" sz="2000" b="1" dirty="0">
+                <a:solidFill>
+                  <a:srgbClr val="C31F2E"/>
+                </a:solidFill>
+              </a:rPr>
+              <a:t>→</a:t>
+            </a:r>
+            <a:endParaRPr lang="en-US" sz="2000" dirty="0"/>
+          </a:p>
+        </p:txBody>
+      </p:sp>
+      <p:sp>
+        <p:nvSpPr>
+          <p:cNvPr id="13" name="Shape 11"/>
+          <p:cNvSpPr/>
+          <p:nvPr/>
+        </p:nvSpPr>
+        <p:spPr>
+          <a:xfrm>
+            <a:off x="6309360" y="1783080"/>
+            <a:ext cx="2578608" cy="1170432"/>
+          </a:xfrm>
+          <a:prstGeom prst="roundRect">
+            <a:avLst>
+              <a:gd name="adj" fmla="val 7813"/>
+            </a:avLst>
+          </a:prstGeom>
+          <a:solidFill>
+            <a:srgbClr val="FFFFFF"/>
+          </a:solidFill>
+          <a:ln w="15875">
+            <a:solidFill>
+              <a:srgbClr val="E7E5E0"/>
+            </a:solidFill>
+            <a:prstDash val="solid"/>
+          </a:ln>
+        </p:spPr>
+      </p:sp>
+      <p:sp>
+        <p:nvSpPr>
+          <p:cNvPr id="14" name="Text 12"/>
+          <p:cNvSpPr/>
+          <p:nvPr/>
+        </p:nvSpPr>
+        <p:spPr>
+          <a:xfrm>
+            <a:off x="6437376" y="1892808"/>
+            <a:ext cx="2322576" cy="310896"/>
+          </a:xfrm>
+          <a:prstGeom prst="rect">
+            <a:avLst/>
+          </a:prstGeom>
+          <a:noFill/>
+          <a:ln/>
+        </p:spPr>
+        <p:txBody>
+          <a:bodyPr wrap="square" rtlCol="0" anchor="ctr"/>
+          <a:lstStyle/>
+          <a:p>
+            <a:pPr algn="ctr" indent="0" marL="0">
+              <a:buNone/>
+            </a:pPr>
+            <a:r>
+              <a:rPr lang="en-US" sz="1250" b="1" dirty="0">
+                <a:solidFill>
+                  <a:srgbClr val="1B1B1D"/>
+                </a:solidFill>
+              </a:rPr>
+              <a:t>Contact &amp; response</a:t>
+            </a:r>
+            <a:endParaRPr lang="en-US" sz="1250" dirty="0"/>
+          </a:p>
+        </p:txBody>
+      </p:sp>
+      <p:sp>
+        <p:nvSpPr>
+          <p:cNvPr id="15" name="Text 13"/>
+          <p:cNvSpPr/>
+          <p:nvPr/>
+        </p:nvSpPr>
+        <p:spPr>
+          <a:xfrm>
+            <a:off x="6437376" y="2203704"/>
+            <a:ext cx="2322576" cy="640080"/>
+          </a:xfrm>
+          <a:prstGeom prst="rect">
+            <a:avLst/>
+          </a:prstGeom>
+          <a:noFill/>
+          <a:ln/>
+        </p:spPr>
+        <p:txBody>
+          <a:bodyPr wrap="square" rtlCol="0" anchor="ctr"/>
+          <a:lstStyle/>
+          <a:p>
+            <a:pPr algn="ctr" indent="0" marL="0">
+              <a:lnSpc>
+                <a:spcPts val="1150"/>
+              </a:lnSpc>
+              <a:buNone/>
+            </a:pPr>
+            <a:r>
+              <a:rPr lang="en-US" sz="900" dirty="0">
+                <a:solidFill>
+                  <a:srgbClr val="5B5B58"/>
+                </a:solidFill>
+              </a:rPr>
+              <a:t>donor contact visible only to the posting staff member</a:t>
+            </a:r>
+            <a:endParaRPr lang="en-US" sz="900" dirty="0"/>
+          </a:p>
+        </p:txBody>
+      </p:sp>
+      <p:sp>
+        <p:nvSpPr>
+          <p:cNvPr id="16" name="Text 14"/>
+          <p:cNvSpPr/>
+          <p:nvPr/>
+        </p:nvSpPr>
+        <p:spPr>
+          <a:xfrm>
+            <a:off x="8869680" y="2112264"/>
+            <a:ext cx="329184" cy="457200"/>
+          </a:xfrm>
+          <a:prstGeom prst="rect">
+            <a:avLst/>
+          </a:prstGeom>
+          <a:noFill/>
+          <a:ln/>
+        </p:spPr>
+        <p:txBody>
+          <a:bodyPr wrap="square" rtlCol="0" anchor="ctr"/>
+          <a:lstStyle/>
+          <a:p>
+            <a:pPr algn="ctr" indent="0" marL="0">
+              <a:buNone/>
+            </a:pPr>
+            <a:r>
+              <a:rPr lang="en-US" sz="2000" b="1" dirty="0">
+                <a:solidFill>
+                  <a:srgbClr val="C31F2E"/>
+                </a:solidFill>
+              </a:rPr>
+              <a:t>→</a:t>
+            </a:r>
+            <a:endParaRPr lang="en-US" sz="2000" dirty="0"/>
+          </a:p>
+        </p:txBody>
+      </p:sp>
+      <p:sp>
+        <p:nvSpPr>
+          <p:cNvPr id="17" name="Shape 15"/>
+          <p:cNvSpPr/>
+          <p:nvPr/>
+        </p:nvSpPr>
+        <p:spPr>
+          <a:xfrm>
+            <a:off x="9180576" y="1783080"/>
+            <a:ext cx="2578608" cy="1170432"/>
+          </a:xfrm>
+          <a:prstGeom prst="roundRect">
+            <a:avLst>
+              <a:gd name="adj" fmla="val 7813"/>
+            </a:avLst>
+          </a:prstGeom>
+          <a:solidFill>
+            <a:srgbClr val="FFFFFF"/>
+          </a:solidFill>
+          <a:ln w="15875">
+            <a:solidFill>
+              <a:srgbClr val="E7E5E0"/>
+            </a:solidFill>
+            <a:prstDash val="solid"/>
+          </a:ln>
+        </p:spPr>
+      </p:sp>
+      <p:sp>
+        <p:nvSpPr>
+          <p:cNvPr id="18" name="Text 16"/>
+          <p:cNvSpPr/>
+          <p:nvPr/>
+        </p:nvSpPr>
+        <p:spPr>
+          <a:xfrm>
+            <a:off x="9308592" y="1892808"/>
+            <a:ext cx="2322576" cy="310896"/>
+          </a:xfrm>
+          <a:prstGeom prst="rect">
+            <a:avLst/>
+          </a:prstGeom>
+          <a:noFill/>
+          <a:ln/>
+        </p:spPr>
+        <p:txBody>
+          <a:bodyPr wrap="square" rtlCol="0" anchor="ctr"/>
+          <a:lstStyle/>
+          <a:p>
+            <a:pPr algn="ctr" indent="0" marL="0">
+              <a:buNone/>
+            </a:pPr>
+            <a:r>
+              <a:rPr lang="en-US" sz="1250" b="1" dirty="0">
+                <a:solidFill>
+                  <a:srgbClr val="1B1B1D"/>
+                </a:solidFill>
+              </a:rPr>
+              <a:t>Fulfillment confirmed</a:t>
+            </a:r>
+            <a:endParaRPr lang="en-US" sz="1250" dirty="0"/>
+          </a:p>
+        </p:txBody>
+      </p:sp>
+      <p:sp>
+        <p:nvSpPr>
+          <p:cNvPr id="19" name="Text 17"/>
+          <p:cNvSpPr/>
+          <p:nvPr/>
+        </p:nvSpPr>
+        <p:spPr>
+          <a:xfrm>
+            <a:off x="9308592" y="2203704"/>
+            <a:ext cx="2322576" cy="640080"/>
+          </a:xfrm>
+          <a:prstGeom prst="rect">
+            <a:avLst/>
+          </a:prstGeom>
+          <a:noFill/>
+          <a:ln/>
+        </p:spPr>
+        <p:txBody>
+          <a:bodyPr wrap="square" rtlCol="0" anchor="ctr"/>
+          <a:lstStyle/>
+          <a:p>
+            <a:pPr algn="ctr" indent="0" marL="0">
+              <a:lnSpc>
+                <a:spcPts val="1150"/>
+              </a:lnSpc>
+              <a:buNone/>
+            </a:pPr>
+            <a:r>
+              <a:rPr lang="en-US" sz="900" dirty="0">
+                <a:solidFill>
+                  <a:srgbClr val="5B5B58"/>
+                </a:solidFill>
+              </a:rPr>
+              <a:t>donors enter resting window · bank restocks · demand history updated</a:t>
+            </a:r>
+            <a:endParaRPr lang="en-US" sz="900" dirty="0"/>
+          </a:p>
+        </p:txBody>
+      </p:sp>
+      <p:sp>
+        <p:nvSpPr>
+          <p:cNvPr id="20" name="Shape 18"/>
+          <p:cNvSpPr/>
+          <p:nvPr/>
+        </p:nvSpPr>
+        <p:spPr>
+          <a:xfrm>
+            <a:off x="566928" y="3246120"/>
+            <a:ext cx="5367528" cy="2697480"/>
+          </a:xfrm>
+          <a:prstGeom prst="roundRect">
+            <a:avLst>
+              <a:gd name="adj" fmla="val 3390"/>
             </a:avLst>
           </a:prstGeom>
           <a:solidFill>
@@ -6919,14 +7800,14 @@
       </p:sp>
       <p:sp>
         <p:nvSpPr>
-          <p:cNvPr id="6" name="Text 4"/>
-          <p:cNvSpPr/>
-          <p:nvPr/>
-        </p:nvSpPr>
-        <p:spPr>
-          <a:xfrm>
-            <a:off x="786384" y="1819656"/>
-            <a:ext cx="5230368" cy="329184"/>
+          <p:cNvPr id="21" name="Text 19"/>
+          <p:cNvSpPr/>
+          <p:nvPr/>
+        </p:nvSpPr>
+        <p:spPr>
+          <a:xfrm>
+            <a:off x="786384" y="3374136"/>
+            <a:ext cx="4928616" cy="320040"/>
           </a:xfrm>
           <a:prstGeom prst="rect">
             <a:avLst/>
@@ -6944,10 +7825,10 @@
             <a:r>
               <a:rPr lang="en-US" sz="1400" b="1" dirty="0">
                 <a:solidFill>
-                  <a:srgbClr val="000000"/>
-                </a:solidFill>
-              </a:rPr>
-              <a:t>Architecture</a:t>
+                  <a:srgbClr val="1B1B1D"/>
+                </a:solidFill>
+              </a:rPr>
+              <a:t>Privacy by default</a:t>
             </a:r>
             <a:endParaRPr lang="en-US" sz="1400" dirty="0"/>
           </a:p>
@@ -6955,14 +7836,14 @@
       </p:sp>
       <p:sp>
         <p:nvSpPr>
-          <p:cNvPr id="7" name="Text 5"/>
-          <p:cNvSpPr/>
-          <p:nvPr/>
-        </p:nvSpPr>
-        <p:spPr>
-          <a:xfrm>
-            <a:off x="786384" y="2148840"/>
-            <a:ext cx="5230368" cy="822960"/>
+          <p:cNvPr id="22" name="Text 20"/>
+          <p:cNvSpPr/>
+          <p:nvPr/>
+        </p:nvSpPr>
+        <p:spPr>
+          <a:xfrm>
+            <a:off x="786384" y="3721608"/>
+            <a:ext cx="4928616" cy="2057400"/>
           </a:xfrm>
           <a:prstGeom prst="rect">
             <a:avLst/>
@@ -6976,44 +7857,173 @@
           <a:p>
             <a:pPr indent="0" marL="0">
               <a:lnSpc>
-                <a:spcPts val="1500"/>
-              </a:lnSpc>
-              <a:buNone/>
-            </a:pPr>
-            <a:r>
-              <a:rPr lang="en-US" sz="1100" dirty="0">
-                <a:solidFill>
-                  <a:srgbClr val="000000"/>
-                </a:solidFill>
-              </a:rPr>
-              <a:t>React 19 + Vite + Tailwind + Recharts single-page app → Node.js / Express API → in-memory store with automatic disk persistence (survives restarts; Mongoose-ready schemas for a MongoDB upgrade).</a:t>
-            </a:r>
-            <a:endParaRPr lang="en-US" sz="1100" dirty="0"/>
-          </a:p>
-        </p:txBody>
-      </p:sp>
-      <p:sp>
-        <p:nvSpPr>
-          <p:cNvPr id="8" name="Shape 6"/>
-          <p:cNvSpPr/>
-          <p:nvPr/>
-        </p:nvSpPr>
-        <p:spPr>
-          <a:xfrm>
-            <a:off x="566928" y="3300984"/>
-            <a:ext cx="5669280" cy="1426464"/>
+                <a:spcPts val="1600"/>
+              </a:lnSpc>
+              <a:buNone/>
+            </a:pPr>
+            <a:r>
+              <a:rPr lang="en-US" sz="1050" b="1" dirty="0">
+                <a:solidFill>
+                  <a:srgbClr val="0F766E"/>
+                </a:solidFill>
+              </a:rPr>
+              <a:t>✓  </a:t>
+            </a:r>
+            <a:pPr indent="0" marL="0">
+              <a:lnSpc>
+                <a:spcPts val="1600"/>
+              </a:lnSpc>
+              <a:buNone/>
+            </a:pPr>
+            <a:r>
+              <a:rPr lang="en-US" sz="1050" dirty="0">
+                <a:solidFill>
+                  <a:srgbClr val="5B5B58"/>
+                </a:solidFill>
+              </a:rPr>
+              <a:t>Patient names never leave the staff side — the public feed shows only blood group, units, hospital, city and urgency
+</a:t>
+            </a:r>
+            <a:pPr indent="0" marL="0">
+              <a:lnSpc>
+                <a:spcPts val="1600"/>
+              </a:lnSpc>
+              <a:buNone/>
+            </a:pPr>
+            <a:r>
+              <a:rPr lang="en-US" sz="1050" b="1" dirty="0">
+                <a:solidFill>
+                  <a:srgbClr val="0F766E"/>
+                </a:solidFill>
+              </a:rPr>
+              <a:t>✓  </a:t>
+            </a:r>
+            <a:pPr indent="0" marL="0">
+              <a:lnSpc>
+                <a:spcPts val="1600"/>
+              </a:lnSpc>
+              <a:buNone/>
+            </a:pPr>
+            <a:r>
+              <a:rPr lang="en-US" sz="1050" dirty="0">
+                <a:solidFill>
+                  <a:srgbClr val="5B5B58"/>
+                </a:solidFill>
+              </a:rPr>
+              <a:t>Donor phones masked in the directory: </a:t>
+            </a:r>
+            <a:pPr indent="0" marL="0">
+              <a:lnSpc>
+                <a:spcPts val="1600"/>
+              </a:lnSpc>
+              <a:buNone/>
+            </a:pPr>
+            <a:r>
+              <a:rPr lang="en-US" sz="1050" b="1" dirty="0">
+                <a:solidFill>
+                  <a:srgbClr val="1B1B1D"/>
+                </a:solidFill>
+              </a:rPr>
+              <a:t>0335•••••••</a:t>
+            </a:r>
+            <a:pPr indent="0" marL="0">
+              <a:lnSpc>
+                <a:spcPts val="1600"/>
+              </a:lnSpc>
+              <a:buNone/>
+            </a:pPr>
+            <a:r>
+              <a:rPr lang="en-US" sz="1050" dirty="0">
+                <a:solidFill>
+                  <a:srgbClr val="5B5B58"/>
+                </a:solidFill>
+              </a:rPr>
+              <a:t> — full contact revealed only to the staff who posted that request
+</a:t>
+            </a:r>
+            <a:pPr indent="0" marL="0">
+              <a:lnSpc>
+                <a:spcPts val="1600"/>
+              </a:lnSpc>
+              <a:buNone/>
+            </a:pPr>
+            <a:r>
+              <a:rPr lang="en-US" sz="1050" b="1" dirty="0">
+                <a:solidFill>
+                  <a:srgbClr val="0F766E"/>
+                </a:solidFill>
+              </a:rPr>
+              <a:t>✓  </a:t>
+            </a:r>
+            <a:pPr indent="0" marL="0">
+              <a:lnSpc>
+                <a:spcPts val="1600"/>
+              </a:lnSpc>
+              <a:buNone/>
+            </a:pPr>
+            <a:r>
+              <a:rPr lang="en-US" sz="1050" dirty="0">
+                <a:solidFill>
+                  <a:srgbClr val="5B5B58"/>
+                </a:solidFill>
+              </a:rPr>
+              <a:t>Health screening answers become staff-only flags — donors never see each other’s data
+</a:t>
+            </a:r>
+            <a:pPr indent="0" marL="0">
+              <a:lnSpc>
+                <a:spcPts val="1600"/>
+              </a:lnSpc>
+              <a:buNone/>
+            </a:pPr>
+            <a:r>
+              <a:rPr lang="en-US" sz="1050" b="1" dirty="0">
+                <a:solidFill>
+                  <a:srgbClr val="0F766E"/>
+                </a:solidFill>
+              </a:rPr>
+              <a:t>✓  </a:t>
+            </a:r>
+            <a:pPr indent="0" marL="0">
+              <a:lnSpc>
+                <a:spcPts val="1600"/>
+              </a:lnSpc>
+              <a:buNone/>
+            </a:pPr>
+            <a:r>
+              <a:rPr lang="en-US" sz="1050" dirty="0">
+                <a:solidFill>
+                  <a:srgbClr val="5B5B58"/>
+                </a:solidFill>
+              </a:rPr>
+              <a:t>All inputs validated at the API boundary — malformed or malicious data is rejected with clear errors</a:t>
+            </a:r>
+            <a:endParaRPr lang="en-US" sz="1050" dirty="0"/>
+          </a:p>
+        </p:txBody>
+      </p:sp>
+      <p:sp>
+        <p:nvSpPr>
+          <p:cNvPr id="23" name="Shape 21"/>
+          <p:cNvSpPr/>
+          <p:nvPr/>
+        </p:nvSpPr>
+        <p:spPr>
+          <a:xfrm>
+            <a:off x="6254496" y="3246120"/>
+            <a:ext cx="5367528" cy="2697480"/>
           </a:xfrm>
           <a:prstGeom prst="roundRect">
             <a:avLst>
-              <a:gd name="adj" fmla="val 6410"/>
+              <a:gd name="adj" fmla="val 3390"/>
             </a:avLst>
           </a:prstGeom>
           <a:solidFill>
-            <a:srgbClr val="FAFAF8"/>
+            <a:srgbClr val="FDECEE"/>
           </a:solidFill>
           <a:ln w="15875">
             <a:solidFill>
-              <a:srgbClr val="E7E5E0"/>
+              <a:srgbClr val="F0C7CB"/>
             </a:solidFill>
             <a:prstDash val="solid"/>
           </a:ln>
@@ -7021,14 +8031,14 @@
       </p:sp>
       <p:sp>
         <p:nvSpPr>
-          <p:cNvPr id="9" name="Text 7"/>
-          <p:cNvSpPr/>
-          <p:nvPr/>
-        </p:nvSpPr>
-        <p:spPr>
-          <a:xfrm>
-            <a:off x="786384" y="3429000"/>
-            <a:ext cx="5230368" cy="329184"/>
+          <p:cNvPr id="24" name="Text 22"/>
+          <p:cNvSpPr/>
+          <p:nvPr/>
+        </p:nvSpPr>
+        <p:spPr>
+          <a:xfrm>
+            <a:off x="6473952" y="3374136"/>
+            <a:ext cx="4928616" cy="320040"/>
           </a:xfrm>
           <a:prstGeom prst="rect">
             <a:avLst/>
@@ -7046,10 +8056,10 @@
             <a:r>
               <a:rPr lang="en-US" sz="1400" b="1" dirty="0">
                 <a:solidFill>
-                  <a:srgbClr val="000000"/>
-                </a:solidFill>
-              </a:rPr>
-              <a:t>Quality engineering</a:t>
+                  <a:srgbClr val="8F1620"/>
+                </a:solidFill>
+              </a:rPr>
+              <a:t>Verified access — live in the product</a:t>
             </a:r>
             <a:endParaRPr lang="en-US" sz="1400" dirty="0"/>
           </a:p>
@@ -7057,14 +8067,14 @@
       </p:sp>
       <p:sp>
         <p:nvSpPr>
-          <p:cNvPr id="10" name="Text 8"/>
-          <p:cNvSpPr/>
-          <p:nvPr/>
-        </p:nvSpPr>
-        <p:spPr>
-          <a:xfrm>
-            <a:off x="786384" y="3758184"/>
-            <a:ext cx="5230368" cy="822960"/>
+          <p:cNvPr id="25" name="Text 23"/>
+          <p:cNvSpPr/>
+          <p:nvPr/>
+        </p:nvSpPr>
+        <p:spPr>
+          <a:xfrm>
+            <a:off x="6473952" y="3721608"/>
+            <a:ext cx="4928616" cy="2057400"/>
           </a:xfrm>
           <a:prstGeom prst="rect">
             <a:avLst/>
@@ -7078,208 +8088,176 @@
           <a:p>
             <a:pPr indent="0" marL="0">
               <a:lnSpc>
-                <a:spcPts val="1500"/>
-              </a:lnSpc>
-              <a:buNone/>
-            </a:pPr>
-            <a:r>
-              <a:rPr lang="en-US" sz="1100" dirty="0">
-                <a:solidFill>
-                  <a:srgbClr val="000000"/>
-                </a:solidFill>
-              </a:rPr>
-              <a:t>21-test automated API suite covering the full lifecycle (request → match → fulfill → backtest) — all passing. Input validation, masking and eligibility live on the server side, so the rules can’t be bypassed from the browser.</a:t>
-            </a:r>
-            <a:endParaRPr lang="en-US" sz="1100" dirty="0"/>
-          </a:p>
-        </p:txBody>
-      </p:sp>
-      <p:sp>
-        <p:nvSpPr>
-          <p:cNvPr id="11" name="Shape 9"/>
-          <p:cNvSpPr/>
-          <p:nvPr/>
-        </p:nvSpPr>
-        <p:spPr>
-          <a:xfrm>
-            <a:off x="566928" y="4910328"/>
-            <a:ext cx="5669280" cy="1426464"/>
-          </a:xfrm>
-          <a:prstGeom prst="roundRect">
-            <a:avLst>
-              <a:gd name="adj" fmla="val 6410"/>
-            </a:avLst>
-          </a:prstGeom>
-          <a:solidFill>
-            <a:srgbClr val="FAFAF8"/>
-          </a:solidFill>
-          <a:ln w="15875">
-            <a:solidFill>
-              <a:srgbClr val="E7E5E0"/>
-            </a:solidFill>
-            <a:prstDash val="solid"/>
-          </a:ln>
-        </p:spPr>
-      </p:sp>
-      <p:sp>
-        <p:nvSpPr>
-          <p:cNvPr id="12" name="Text 10"/>
-          <p:cNvSpPr/>
-          <p:nvPr/>
-        </p:nvSpPr>
-        <p:spPr>
-          <a:xfrm>
-            <a:off x="786384" y="5038344"/>
-            <a:ext cx="5230368" cy="329184"/>
-          </a:xfrm>
-          <a:prstGeom prst="rect">
-            <a:avLst/>
-          </a:prstGeom>
-          <a:noFill/>
-          <a:ln/>
-        </p:spPr>
-        <p:txBody>
-          <a:bodyPr wrap="square" rtlCol="0" anchor="ctr"/>
-          <a:lstStyle/>
-          <a:p>
-            <a:pPr indent="0" marL="0">
-              <a:buNone/>
-            </a:pPr>
-            <a:r>
-              <a:rPr lang="en-US" sz="1400" b="1" dirty="0">
-                <a:solidFill>
-                  <a:srgbClr val="000000"/>
-                </a:solidFill>
-              </a:rPr>
-              <a:t>Realistic dataset</a:t>
-            </a:r>
-            <a:endParaRPr lang="en-US" sz="1400" dirty="0"/>
-          </a:p>
-        </p:txBody>
-      </p:sp>
-      <p:sp>
-        <p:nvSpPr>
-          <p:cNvPr id="13" name="Text 11"/>
-          <p:cNvSpPr/>
-          <p:nvPr/>
-        </p:nvSpPr>
-        <p:spPr>
-          <a:xfrm>
-            <a:off x="786384" y="5367528"/>
-            <a:ext cx="5230368" cy="822960"/>
-          </a:xfrm>
-          <a:prstGeom prst="rect">
-            <a:avLst/>
-          </a:prstGeom>
-          <a:noFill/>
-          <a:ln/>
-        </p:spPr>
-        <p:txBody>
-          <a:bodyPr wrap="square" rtlCol="0" anchor="t"/>
-          <a:lstStyle/>
-          <a:p>
-            <a:pPr indent="0" marL="0">
-              <a:lnSpc>
-                <a:spcPts val="1500"/>
-              </a:lnSpc>
-              <a:buNone/>
-            </a:pPr>
-            <a:r>
-              <a:rPr lang="en-US" sz="1100" dirty="0">
-                <a:solidFill>
-                  <a:srgbClr val="000000"/>
-                </a:solidFill>
-              </a:rPr>
-              <a:t>150 donors, 19 real hospitals &amp; blood banks, 90 days of demand history across Lahore, Karachi, Islamabad, Rawalpindi, Faisalabad and Multan.</a:t>
-            </a:r>
-            <a:endParaRPr lang="en-US" sz="1100" dirty="0"/>
-          </a:p>
-        </p:txBody>
-      </p:sp>
-      <p:sp>
-        <p:nvSpPr>
-          <p:cNvPr id="14" name="Shape 12"/>
-          <p:cNvSpPr/>
-          <p:nvPr/>
-        </p:nvSpPr>
-        <p:spPr>
-          <a:xfrm>
-            <a:off x="6473952" y="1773936"/>
-            <a:ext cx="5202936" cy="3292983"/>
-          </a:xfrm>
-          <a:prstGeom prst="roundRect">
-            <a:avLst>
-              <a:gd name="adj" fmla="val 2221"/>
-            </a:avLst>
-          </a:prstGeom>
-          <a:solidFill>
-            <a:srgbClr val="FAFAF8"/>
-          </a:solidFill>
-          <a:ln w="15875">
-            <a:solidFill>
-              <a:srgbClr val="E7E5E0"/>
-            </a:solidFill>
-            <a:prstDash val="solid"/>
-          </a:ln>
-        </p:spPr>
-      </p:sp>
-      <p:pic>
-        <p:nvPicPr>
-          <p:cNvPr id="15" name="Image 0" descr="C:\Users\SANA KHAN\Documents\Qoder\2026-09-03\chat-1\bloodbridge-ai\assets\donors.png">    </p:cNvPr>
-          <p:cNvPicPr>
-            <a:picLocks noChangeAspect="1"/>
-          </p:cNvPicPr>
-          <p:nvPr/>
-        </p:nvPicPr>
-        <p:blipFill>
-          <a:blip r:embed="rId1"/>
-          <a:stretch>
-            <a:fillRect/>
-          </a:stretch>
-        </p:blipFill>
-        <p:spPr>
-          <a:xfrm>
-            <a:off x="6528816" y="1828800"/>
-            <a:ext cx="5093208" cy="3183255"/>
-          </a:xfrm>
-          <a:prstGeom prst="rect">
-            <a:avLst/>
-          </a:prstGeom>
-        </p:spPr>
-      </p:pic>
-      <p:sp>
-        <p:nvSpPr>
-          <p:cNvPr id="16" name="Text 13"/>
-          <p:cNvSpPr/>
-          <p:nvPr/>
-        </p:nvSpPr>
-        <p:spPr>
-          <a:xfrm>
-            <a:off x="6473952" y="5121783"/>
-            <a:ext cx="5202936" cy="274320"/>
-          </a:xfrm>
-          <a:prstGeom prst="rect">
-            <a:avLst/>
-          </a:prstGeom>
-          <a:noFill/>
-          <a:ln/>
-        </p:spPr>
-        <p:txBody>
-          <a:bodyPr wrap="square" rtlCol="0" anchor="ctr"/>
-          <a:lstStyle/>
-          <a:p>
-            <a:pPr algn="ctr" indent="0" marL="0">
-              <a:buNone/>
-            </a:pPr>
-            <a:r>
-              <a:rPr lang="en-US" sz="950" dirty="0">
-                <a:solidFill>
-                  <a:srgbClr val="8B8B87"/>
-                </a:solidFill>
-              </a:rPr>
-              <a:t>Donor directory — masked phones, live eligibility status per donor</a:t>
-            </a:r>
-            <a:endParaRPr lang="en-US" sz="950" dirty="0"/>
+                <a:spcPts val="1600"/>
+              </a:lnSpc>
+              <a:buNone/>
+            </a:pPr>
+            <a:r>
+              <a:rPr lang="en-US" sz="1050" b="1" dirty="0">
+                <a:solidFill>
+                  <a:srgbClr val="8F1620"/>
+                </a:solidFill>
+              </a:rPr>
+              <a:t>✓  </a:t>
+            </a:r>
+            <a:pPr indent="0" marL="0">
+              <a:lnSpc>
+                <a:spcPts val="1600"/>
+              </a:lnSpc>
+              <a:buNone/>
+            </a:pPr>
+            <a:r>
+              <a:rPr lang="en-US" sz="1050" dirty="0">
+                <a:solidFill>
+                  <a:srgbClr val="5B5B58"/>
+                </a:solidFill>
+              </a:rPr>
+              <a:t>JWT authentication with bcrypt-hashed passwords — two roles: staff and donor
+</a:t>
+            </a:r>
+            <a:pPr indent="0" marL="0">
+              <a:lnSpc>
+                <a:spcPts val="1600"/>
+              </a:lnSpc>
+              <a:buNone/>
+            </a:pPr>
+            <a:r>
+              <a:rPr lang="en-US" sz="1050" b="1" dirty="0">
+                <a:solidFill>
+                  <a:srgbClr val="8F1620"/>
+                </a:solidFill>
+              </a:rPr>
+              <a:t>✓  </a:t>
+            </a:r>
+            <a:pPr indent="0" marL="0">
+              <a:lnSpc>
+                <a:spcPts val="1600"/>
+              </a:lnSpc>
+              <a:buNone/>
+            </a:pPr>
+            <a:r>
+              <a:rPr lang="en-US" sz="1050" dirty="0">
+                <a:solidFill>
+                  <a:srgbClr val="5B5B58"/>
+                </a:solidFill>
+              </a:rPr>
+              <a:t>Institutions submit license numbers and stay </a:t>
+            </a:r>
+            <a:pPr indent="0" marL="0">
+              <a:lnSpc>
+                <a:spcPts val="1600"/>
+              </a:lnSpc>
+              <a:buNone/>
+            </a:pPr>
+            <a:r>
+              <a:rPr lang="en-US" sz="1050" b="1" dirty="0">
+                <a:solidFill>
+                  <a:srgbClr val="1B1B1D"/>
+                </a:solidFill>
+              </a:rPr>
+              <a:t>pending until an admin approves</a:t>
+            </a:r>
+            <a:pPr indent="0" marL="0">
+              <a:lnSpc>
+                <a:spcPts val="1600"/>
+              </a:lnSpc>
+              <a:buNone/>
+            </a:pPr>
+            <a:r>
+              <a:rPr lang="en-US" sz="1050" dirty="0">
+                <a:solidFill>
+                  <a:srgbClr val="5B5B58"/>
+                </a:solidFill>
+              </a:rPr>
+              <a:t> — only then can they post requests
+</a:t>
+            </a:r>
+            <a:pPr indent="0" marL="0">
+              <a:lnSpc>
+                <a:spcPts val="1600"/>
+              </a:lnSpc>
+              <a:buNone/>
+            </a:pPr>
+            <a:r>
+              <a:rPr lang="en-US" sz="1050" b="1" dirty="0">
+                <a:solidFill>
+                  <a:srgbClr val="8F1620"/>
+                </a:solidFill>
+              </a:rPr>
+              <a:t>✓  </a:t>
+            </a:r>
+            <a:pPr indent="0" marL="0">
+              <a:lnSpc>
+                <a:spcPts val="1600"/>
+              </a:lnSpc>
+              <a:buNone/>
+            </a:pPr>
+            <a:r>
+              <a:rPr lang="en-US" sz="1050" dirty="0">
+                <a:solidFill>
+                  <a:srgbClr val="5B5B58"/>
+                </a:solidFill>
+              </a:rPr>
+              <a:t>Patient identity replaced by a private </a:t>
+            </a:r>
+            <a:pPr indent="0" marL="0">
+              <a:lnSpc>
+                <a:spcPts val="1600"/>
+              </a:lnSpc>
+              <a:buNone/>
+            </a:pPr>
+            <a:r>
+              <a:rPr lang="en-US" sz="1050" b="1" dirty="0">
+                <a:solidFill>
+                  <a:srgbClr val="1B1B1D"/>
+                </a:solidFill>
+              </a:rPr>
+              <a:t>internal reference</a:t>
+            </a:r>
+            <a:pPr indent="0" marL="0">
+              <a:lnSpc>
+                <a:spcPts val="1600"/>
+              </a:lnSpc>
+              <a:buNone/>
+            </a:pPr>
+            <a:r>
+              <a:rPr lang="en-US" sz="1050" dirty="0">
+                <a:solidFill>
+                  <a:srgbClr val="5B5B58"/>
+                </a:solidFill>
+              </a:rPr>
+              <a:t> in the staff’s own records
+</a:t>
+            </a:r>
+            <a:pPr indent="0" marL="0">
+              <a:lnSpc>
+                <a:spcPts val="1600"/>
+              </a:lnSpc>
+              <a:buNone/>
+            </a:pPr>
+            <a:r>
+              <a:rPr lang="en-US" sz="1050" b="1" dirty="0">
+                <a:solidFill>
+                  <a:srgbClr val="8F1620"/>
+                </a:solidFill>
+              </a:rPr>
+              <a:t>✓  </a:t>
+            </a:r>
+            <a:pPr indent="0" marL="0">
+              <a:lnSpc>
+                <a:spcPts val="1600"/>
+              </a:lnSpc>
+              <a:buNone/>
+            </a:pPr>
+            <a:r>
+              <a:rPr lang="en-US" sz="1050" dirty="0">
+                <a:solidFill>
+                  <a:srgbClr val="5B5B58"/>
+                </a:solidFill>
+              </a:rPr>
+              <a:t>Walk-in replacement donors registered by staff, tagged with their institution</a:t>
+            </a:r>
+            <a:endParaRPr lang="en-US" sz="1050" dirty="0"/>
           </a:p>
         </p:txBody>
       </p:sp>
@@ -7365,7 +8343,7 @@
                   <a:srgbClr val="C31F2E"/>
                 </a:solidFill>
               </a:rPr>
-              <a:t>FEASIBILITY · WHAT WE ACTUALLY BUILT</a:t>
+              <a:t>THE TECHNOLOGY</a:t>
             </a:r>
             <a:endParaRPr lang="en-US" sz="1100" dirty="0"/>
           </a:p>
@@ -7404,35 +8382,7 @@
                   <a:srgbClr val="1B1B1D"/>
                 </a:solidFill>
               </a:rPr>
-              <a:t>Everything in this deck </a:t>
-            </a:r>
-            <a:pPr indent="0" marL="0">
-              <a:lnSpc>
-                <a:spcPts val="3000"/>
-              </a:lnSpc>
-              <a:buNone/>
-            </a:pPr>
-            <a:r>
-              <a:rPr lang="en-US" sz="2600" b="1" dirty="0">
-                <a:solidFill>
-                  <a:srgbClr val="C31F2E"/>
-                </a:solidFill>
-              </a:rPr>
-              <a:t>runs today</a:t>
-            </a:r>
-            <a:pPr indent="0" marL="0">
-              <a:lnSpc>
-                <a:spcPts val="3000"/>
-              </a:lnSpc>
-              <a:buNone/>
-            </a:pPr>
-            <a:r>
-              <a:rPr lang="en-US" sz="2600" b="1" dirty="0">
-                <a:solidFill>
-                  <a:srgbClr val="1B1B1D"/>
-                </a:solidFill>
-              </a:rPr>
-              <a:t>, from the repo.</a:t>
+              <a:t>Simple stack, engineered honestly.</a:t>
             </a:r>
             <a:endParaRPr lang="en-US" sz="2600" dirty="0"/>
           </a:p>
@@ -7446,12 +8396,12 @@
         </p:nvSpPr>
         <p:spPr>
           <a:xfrm>
-            <a:off x="566928" y="1737360"/>
-            <a:ext cx="6309360" cy="4297680"/>
+            <a:off x="566928" y="1691640"/>
+            <a:ext cx="5669280" cy="1426464"/>
           </a:xfrm>
           <a:prstGeom prst="roundRect">
             <a:avLst>
-              <a:gd name="adj" fmla="val 2128"/>
+              <a:gd name="adj" fmla="val 6410"/>
             </a:avLst>
           </a:prstGeom>
           <a:solidFill>
@@ -7473,8 +8423,44 @@
         </p:nvSpPr>
         <p:spPr>
           <a:xfrm>
-            <a:off x="822960" y="1938528"/>
-            <a:ext cx="5797296" cy="777240"/>
+            <a:off x="786384" y="1819656"/>
+            <a:ext cx="5230368" cy="329184"/>
+          </a:xfrm>
+          <a:prstGeom prst="rect">
+            <a:avLst/>
+          </a:prstGeom>
+          <a:noFill/>
+          <a:ln/>
+        </p:spPr>
+        <p:txBody>
+          <a:bodyPr wrap="square" rtlCol="0" anchor="ctr"/>
+          <a:lstStyle/>
+          <a:p>
+            <a:pPr indent="0" marL="0">
+              <a:buNone/>
+            </a:pPr>
+            <a:r>
+              <a:rPr lang="en-US" sz="1400" b="1" dirty="0">
+                <a:solidFill>
+                  <a:srgbClr val="000000"/>
+                </a:solidFill>
+              </a:rPr>
+              <a:t>Architecture</a:t>
+            </a:r>
+            <a:endParaRPr lang="en-US" sz="1400" dirty="0"/>
+          </a:p>
+        </p:txBody>
+      </p:sp>
+      <p:sp>
+        <p:nvSpPr>
+          <p:cNvPr id="7" name="Text 5"/>
+          <p:cNvSpPr/>
+          <p:nvPr/>
+        </p:nvSpPr>
+        <p:spPr>
+          <a:xfrm>
+            <a:off x="786384" y="2148840"/>
+            <a:ext cx="5230368" cy="822960"/>
           </a:xfrm>
           <a:prstGeom prst="rect">
             <a:avLst/>
@@ -7493,335 +8479,39 @@
               <a:buNone/>
             </a:pPr>
             <a:r>
-              <a:rPr lang="en-US" sz="1300" b="1" dirty="0">
-                <a:solidFill>
-                  <a:srgbClr val="0F766E"/>
-                </a:solidFill>
-              </a:rPr>
-              <a:t>✓  </a:t>
-            </a:r>
-            <a:pPr indent="0" marL="0">
-              <a:lnSpc>
-                <a:spcPts val="1500"/>
-              </a:lnSpc>
-              <a:buNone/>
-            </a:pPr>
-            <a:r>
-              <a:rPr lang="en-US" sz="1150" b="1" dirty="0">
-                <a:solidFill>
-                  <a:srgbClr val="1B1B1D"/>
-                </a:solidFill>
-              </a:rPr>
-              <a:t>Full working app</a:t>
-            </a:r>
-            <a:pPr indent="0" marL="0">
-              <a:lnSpc>
-                <a:spcPts val="1500"/>
-              </a:lnSpc>
-              <a:buNone/>
-            </a:pPr>
-            <a:r>
-              <a:rPr lang="en-US" sz="1150" dirty="0">
-                <a:solidFill>
-                  <a:srgbClr val="5B5B58"/>
-                </a:solidFill>
-              </a:rPr>
-              <a:t> — 6 pages, 10+ API endpoints, chatbot, live matching &amp; forecasting; two commands to run locally (npm run install:all, npm run dev)</a:t>
-            </a:r>
-            <a:endParaRPr lang="en-US" sz="1150" dirty="0"/>
-          </a:p>
-        </p:txBody>
-      </p:sp>
-      <p:sp>
-        <p:nvSpPr>
-          <p:cNvPr id="7" name="Text 5"/>
-          <p:cNvSpPr/>
-          <p:nvPr/>
-        </p:nvSpPr>
-        <p:spPr>
-          <a:xfrm>
-            <a:off x="822960" y="2743200"/>
-            <a:ext cx="5797296" cy="777240"/>
-          </a:xfrm>
-          <a:prstGeom prst="rect">
-            <a:avLst/>
-          </a:prstGeom>
-          <a:noFill/>
-          <a:ln/>
-        </p:spPr>
-        <p:txBody>
-          <a:bodyPr wrap="square" rtlCol="0" anchor="t"/>
-          <a:lstStyle/>
-          <a:p>
-            <a:pPr indent="0" marL="0">
-              <a:lnSpc>
-                <a:spcPts val="1500"/>
-              </a:lnSpc>
-              <a:buNone/>
-            </a:pPr>
-            <a:r>
-              <a:rPr lang="en-US" sz="1300" b="1" dirty="0">
-                <a:solidFill>
-                  <a:srgbClr val="0F766E"/>
-                </a:solidFill>
-              </a:rPr>
-              <a:t>✓  </a:t>
-            </a:r>
-            <a:pPr indent="0" marL="0">
-              <a:lnSpc>
-                <a:spcPts val="1500"/>
-              </a:lnSpc>
-              <a:buNone/>
-            </a:pPr>
-            <a:r>
-              <a:rPr lang="en-US" sz="1150" b="1" dirty="0">
-                <a:solidFill>
-                  <a:srgbClr val="1B1B1D"/>
-                </a:solidFill>
-              </a:rPr>
-              <a:t>Complete request lifecycle</a:t>
-            </a:r>
-            <a:pPr indent="0" marL="0">
-              <a:lnSpc>
-                <a:spcPts val="1500"/>
-              </a:lnSpc>
-              <a:buNone/>
-            </a:pPr>
-            <a:r>
-              <a:rPr lang="en-US" sz="1150" dirty="0">
-                <a:solidFill>
-                  <a:srgbClr val="5B5B58"/>
-                </a:solidFill>
-              </a:rPr>
-              <a:t> — create → AI match → call donors → confirm fulfillment → donors rest, bank restocks, model learns</a:t>
-            </a:r>
-            <a:endParaRPr lang="en-US" sz="1150" dirty="0"/>
-          </a:p>
-        </p:txBody>
-      </p:sp>
-      <p:sp>
-        <p:nvSpPr>
-          <p:cNvPr id="8" name="Text 6"/>
-          <p:cNvSpPr/>
-          <p:nvPr/>
-        </p:nvSpPr>
-        <p:spPr>
-          <a:xfrm>
-            <a:off x="822960" y="3547872"/>
-            <a:ext cx="5797296" cy="777240"/>
-          </a:xfrm>
-          <a:prstGeom prst="rect">
-            <a:avLst/>
-          </a:prstGeom>
-          <a:noFill/>
-          <a:ln/>
-        </p:spPr>
-        <p:txBody>
-          <a:bodyPr wrap="square" rtlCol="0" anchor="t"/>
-          <a:lstStyle/>
-          <a:p>
-            <a:pPr indent="0" marL="0">
-              <a:lnSpc>
-                <a:spcPts val="1500"/>
-              </a:lnSpc>
-              <a:buNone/>
-            </a:pPr>
-            <a:r>
-              <a:rPr lang="en-US" sz="1300" b="1" dirty="0">
-                <a:solidFill>
-                  <a:srgbClr val="0F766E"/>
-                </a:solidFill>
-              </a:rPr>
-              <a:t>✓  </a:t>
-            </a:r>
-            <a:pPr indent="0" marL="0">
-              <a:lnSpc>
-                <a:spcPts val="1500"/>
-              </a:lnSpc>
-              <a:buNone/>
-            </a:pPr>
-            <a:r>
-              <a:rPr lang="en-US" sz="1150" b="1" dirty="0">
-                <a:solidFill>
-                  <a:srgbClr val="1B1B1D"/>
-                </a:solidFill>
-              </a:rPr>
-              <a:t>Tested end-to-end</a:t>
-            </a:r>
-            <a:pPr indent="0" marL="0">
-              <a:lnSpc>
-                <a:spcPts val="1500"/>
-              </a:lnSpc>
-              <a:buNone/>
-            </a:pPr>
-            <a:r>
-              <a:rPr lang="en-US" sz="1150" dirty="0">
-                <a:solidFill>
-                  <a:srgbClr val="5B5B58"/>
-                </a:solidFill>
-              </a:rPr>
-              <a:t> — 21 automated API tests, all passing, included in the repo</a:t>
-            </a:r>
-            <a:endParaRPr lang="en-US" sz="1150" dirty="0"/>
-          </a:p>
-        </p:txBody>
-      </p:sp>
-      <p:sp>
-        <p:nvSpPr>
-          <p:cNvPr id="9" name="Text 7"/>
-          <p:cNvSpPr/>
-          <p:nvPr/>
-        </p:nvSpPr>
-        <p:spPr>
-          <a:xfrm>
-            <a:off x="822960" y="4352544"/>
-            <a:ext cx="5797296" cy="777240"/>
-          </a:xfrm>
-          <a:prstGeom prst="rect">
-            <a:avLst/>
-          </a:prstGeom>
-          <a:noFill/>
-          <a:ln/>
-        </p:spPr>
-        <p:txBody>
-          <a:bodyPr wrap="square" rtlCol="0" anchor="t"/>
-          <a:lstStyle/>
-          <a:p>
-            <a:pPr indent="0" marL="0">
-              <a:lnSpc>
-                <a:spcPts val="1500"/>
-              </a:lnSpc>
-              <a:buNone/>
-            </a:pPr>
-            <a:r>
-              <a:rPr lang="en-US" sz="1300" b="1" dirty="0">
-                <a:solidFill>
-                  <a:srgbClr val="0F766E"/>
-                </a:solidFill>
-              </a:rPr>
-              <a:t>✓  </a:t>
-            </a:r>
-            <a:pPr indent="0" marL="0">
-              <a:lnSpc>
-                <a:spcPts val="1500"/>
-              </a:lnSpc>
-              <a:buNone/>
-            </a:pPr>
-            <a:r>
-              <a:rPr lang="en-US" sz="1150" b="1" dirty="0">
-                <a:solidFill>
-                  <a:srgbClr val="1B1B1D"/>
-                </a:solidFill>
-              </a:rPr>
-              <a:t>Second working prototype</a:t>
-            </a:r>
-            <a:pPr indent="0" marL="0">
-              <a:lnSpc>
-                <a:spcPts val="1500"/>
-              </a:lnSpc>
-              <a:buNone/>
-            </a:pPr>
-            <a:r>
-              <a:rPr lang="en-US" sz="1150" dirty="0">
-                <a:solidFill>
-                  <a:srgbClr val="5B5B58"/>
-                </a:solidFill>
-              </a:rPr>
-              <a:t> — the mobile trust model (role onboarding, institution verification, donor screening) runs standalone in any browser</a:t>
-            </a:r>
-            <a:endParaRPr lang="en-US" sz="1150" dirty="0"/>
-          </a:p>
-        </p:txBody>
-      </p:sp>
-      <p:sp>
-        <p:nvSpPr>
-          <p:cNvPr id="10" name="Text 8"/>
-          <p:cNvSpPr/>
-          <p:nvPr/>
-        </p:nvSpPr>
-        <p:spPr>
-          <a:xfrm>
-            <a:off x="822960" y="5157216"/>
-            <a:ext cx="5797296" cy="777240"/>
-          </a:xfrm>
-          <a:prstGeom prst="rect">
-            <a:avLst/>
-          </a:prstGeom>
-          <a:noFill/>
-          <a:ln/>
-        </p:spPr>
-        <p:txBody>
-          <a:bodyPr wrap="square" rtlCol="0" anchor="t"/>
-          <a:lstStyle/>
-          <a:p>
-            <a:pPr indent="0" marL="0">
-              <a:lnSpc>
-                <a:spcPts val="1500"/>
-              </a:lnSpc>
-              <a:buNone/>
-            </a:pPr>
-            <a:r>
-              <a:rPr lang="en-US" sz="1300" b="1" dirty="0">
-                <a:solidFill>
-                  <a:srgbClr val="0F766E"/>
-                </a:solidFill>
-              </a:rPr>
-              <a:t>✓  </a:t>
-            </a:r>
-            <a:pPr indent="0" marL="0">
-              <a:lnSpc>
-                <a:spcPts val="1500"/>
-              </a:lnSpc>
-              <a:buNone/>
-            </a:pPr>
-            <a:r>
-              <a:rPr lang="en-US" sz="1150" b="1" dirty="0">
-                <a:solidFill>
-                  <a:srgbClr val="1B1B1D"/>
-                </a:solidFill>
-              </a:rPr>
-              <a:t>Honest scope</a:t>
-            </a:r>
-            <a:pPr indent="0" marL="0">
-              <a:lnSpc>
-                <a:spcPts val="1500"/>
-              </a:lnSpc>
-              <a:buNone/>
-            </a:pPr>
-            <a:r>
-              <a:rPr lang="en-US" sz="1150" dirty="0">
-                <a:solidFill>
-                  <a:srgbClr val="5B5B58"/>
-                </a:solidFill>
-              </a:rPr>
-              <a:t> — prototype persistence is JSON-on-disk; production needs auth, SMS alerts and hospital integration. We say so in the README — and the roadmap is concrete.</a:t>
-            </a:r>
-            <a:endParaRPr lang="en-US" sz="1150" dirty="0"/>
-          </a:p>
-        </p:txBody>
-      </p:sp>
-      <p:sp>
-        <p:nvSpPr>
-          <p:cNvPr id="11" name="Shape 9"/>
-          <p:cNvSpPr/>
-          <p:nvPr/>
-        </p:nvSpPr>
-        <p:spPr>
-          <a:xfrm>
-            <a:off x="7168896" y="1737360"/>
-            <a:ext cx="4453128" cy="4297680"/>
+              <a:rPr lang="en-US" sz="1100" dirty="0">
+                <a:solidFill>
+                  <a:srgbClr val="000000"/>
+                </a:solidFill>
+              </a:rPr>
+              <a:t>React 19 + Vite + Tailwind + Recharts single-page app → Node.js / Express API → in-memory store with disk persistence (Mongoose-ready schemas for a MongoDB upgrade).</a:t>
+            </a:r>
+            <a:endParaRPr lang="en-US" sz="1100" dirty="0"/>
+          </a:p>
+        </p:txBody>
+      </p:sp>
+      <p:sp>
+        <p:nvSpPr>
+          <p:cNvPr id="8" name="Shape 6"/>
+          <p:cNvSpPr/>
+          <p:nvPr/>
+        </p:nvSpPr>
+        <p:spPr>
+          <a:xfrm>
+            <a:off x="566928" y="3300984"/>
+            <a:ext cx="5669280" cy="1426464"/>
           </a:xfrm>
           <a:prstGeom prst="roundRect">
             <a:avLst>
-              <a:gd name="adj" fmla="val 2128"/>
+              <a:gd name="adj" fmla="val 6410"/>
             </a:avLst>
           </a:prstGeom>
           <a:solidFill>
-            <a:srgbClr val="E6F5F3"/>
+            <a:srgbClr val="FAFAF8"/>
           </a:solidFill>
           <a:ln w="15875">
             <a:solidFill>
-              <a:srgbClr val="BFE3DF"/>
+              <a:srgbClr val="E7E5E0"/>
             </a:solidFill>
             <a:prstDash val="solid"/>
           </a:ln>
@@ -7829,14 +8519,116 @@
       </p:sp>
       <p:sp>
         <p:nvSpPr>
+          <p:cNvPr id="9" name="Text 7"/>
+          <p:cNvSpPr/>
+          <p:nvPr/>
+        </p:nvSpPr>
+        <p:spPr>
+          <a:xfrm>
+            <a:off x="786384" y="3429000"/>
+            <a:ext cx="5230368" cy="329184"/>
+          </a:xfrm>
+          <a:prstGeom prst="rect">
+            <a:avLst/>
+          </a:prstGeom>
+          <a:noFill/>
+          <a:ln/>
+        </p:spPr>
+        <p:txBody>
+          <a:bodyPr wrap="square" rtlCol="0" anchor="ctr"/>
+          <a:lstStyle/>
+          <a:p>
+            <a:pPr indent="0" marL="0">
+              <a:buNone/>
+            </a:pPr>
+            <a:r>
+              <a:rPr lang="en-US" sz="1400" b="1" dirty="0">
+                <a:solidFill>
+                  <a:srgbClr val="000000"/>
+                </a:solidFill>
+              </a:rPr>
+              <a:t>Security engineering</a:t>
+            </a:r>
+            <a:endParaRPr lang="en-US" sz="1400" dirty="0"/>
+          </a:p>
+        </p:txBody>
+      </p:sp>
+      <p:sp>
+        <p:nvSpPr>
+          <p:cNvPr id="10" name="Text 8"/>
+          <p:cNvSpPr/>
+          <p:nvPr/>
+        </p:nvSpPr>
+        <p:spPr>
+          <a:xfrm>
+            <a:off x="786384" y="3758184"/>
+            <a:ext cx="5230368" cy="822960"/>
+          </a:xfrm>
+          <a:prstGeom prst="rect">
+            <a:avLst/>
+          </a:prstGeom>
+          <a:noFill/>
+          <a:ln/>
+        </p:spPr>
+        <p:txBody>
+          <a:bodyPr wrap="square" rtlCol="0" anchor="t"/>
+          <a:lstStyle/>
+          <a:p>
+            <a:pPr indent="0" marL="0">
+              <a:lnSpc>
+                <a:spcPts val="1500"/>
+              </a:lnSpc>
+              <a:buNone/>
+            </a:pPr>
+            <a:r>
+              <a:rPr lang="en-US" sz="1100" dirty="0">
+                <a:solidFill>
+                  <a:srgbClr val="000000"/>
+                </a:solidFill>
+              </a:rPr>
+              <a:t>JWT authentication, bcrypt password hashing, and role-based guards on both server and client. Verification, masking, eligibility and validation rules live server-side — they cannot be bypassed from the browser.</a:t>
+            </a:r>
+            <a:endParaRPr lang="en-US" sz="1100" dirty="0"/>
+          </a:p>
+        </p:txBody>
+      </p:sp>
+      <p:sp>
+        <p:nvSpPr>
+          <p:cNvPr id="11" name="Shape 9"/>
+          <p:cNvSpPr/>
+          <p:nvPr/>
+        </p:nvSpPr>
+        <p:spPr>
+          <a:xfrm>
+            <a:off x="566928" y="4910328"/>
+            <a:ext cx="5669280" cy="1426464"/>
+          </a:xfrm>
+          <a:prstGeom prst="roundRect">
+            <a:avLst>
+              <a:gd name="adj" fmla="val 6410"/>
+            </a:avLst>
+          </a:prstGeom>
+          <a:solidFill>
+            <a:srgbClr val="FAFAF8"/>
+          </a:solidFill>
+          <a:ln w="15875">
+            <a:solidFill>
+              <a:srgbClr val="E7E5E0"/>
+            </a:solidFill>
+            <a:prstDash val="solid"/>
+          </a:ln>
+        </p:spPr>
+      </p:sp>
+      <p:sp>
+        <p:nvSpPr>
           <p:cNvPr id="12" name="Text 10"/>
           <p:cNvSpPr/>
           <p:nvPr/>
         </p:nvSpPr>
         <p:spPr>
           <a:xfrm>
-            <a:off x="7388352" y="1901952"/>
-            <a:ext cx="4014216" cy="365760"/>
+            <a:off x="786384" y="5038344"/>
+            <a:ext cx="5230368" cy="329184"/>
           </a:xfrm>
           <a:prstGeom prst="rect">
             <a:avLst/>
@@ -7852,14 +8644,14 @@
               <a:buNone/>
             </a:pPr>
             <a:r>
-              <a:rPr lang="en-US" sz="1450" b="1" dirty="0">
-                <a:solidFill>
-                  <a:srgbClr val="0F766E"/>
-                </a:solidFill>
-              </a:rPr>
-              <a:t>Judges can verify in 2 minutes</a:t>
-            </a:r>
-            <a:endParaRPr lang="en-US" sz="1450" dirty="0"/>
+              <a:rPr lang="en-US" sz="1400" b="1" dirty="0">
+                <a:solidFill>
+                  <a:srgbClr val="000000"/>
+                </a:solidFill>
+              </a:rPr>
+              <a:t>Deployed &amp; versioned</a:t>
+            </a:r>
+            <a:endParaRPr lang="en-US" sz="1400" dirty="0"/>
           </a:p>
         </p:txBody>
       </p:sp>
@@ -7871,8 +8663,8 @@
         </p:nvSpPr>
         <p:spPr>
           <a:xfrm>
-            <a:off x="7424928" y="2359152"/>
-            <a:ext cx="3941064" cy="621792"/>
+            <a:off x="786384" y="5367528"/>
+            <a:ext cx="5230368" cy="822960"/>
           </a:xfrm>
           <a:prstGeom prst="rect">
             <a:avLst/>
@@ -7886,245 +8678,106 @@
           <a:p>
             <a:pPr indent="0" marL="0">
               <a:lnSpc>
-                <a:spcPts val="1400"/>
-              </a:lnSpc>
-              <a:buNone/>
-            </a:pPr>
-            <a:r>
-              <a:rPr lang="en-US" sz="1150" b="1" dirty="0">
-                <a:solidFill>
-                  <a:srgbClr val="0F766E"/>
-                </a:solidFill>
-              </a:rPr>
-              <a:t>1.  </a:t>
-            </a:r>
-            <a:pPr indent="0" marL="0">
-              <a:lnSpc>
-                <a:spcPts val="1400"/>
-              </a:lnSpc>
-              <a:buNone/>
-            </a:pPr>
-            <a:r>
-              <a:rPr lang="en-US" sz="1150" dirty="0">
-                <a:solidFill>
-                  <a:srgbClr val="0B4A44"/>
-                </a:solidFill>
-              </a:rPr>
-              <a:t>Clone the repo, run two commands</a:t>
-            </a:r>
-            <a:endParaRPr lang="en-US" sz="1150" dirty="0"/>
-          </a:p>
-        </p:txBody>
-      </p:sp>
-      <p:sp>
-        <p:nvSpPr>
-          <p:cNvPr id="14" name="Text 12"/>
-          <p:cNvSpPr/>
-          <p:nvPr/>
-        </p:nvSpPr>
-        <p:spPr>
-          <a:xfrm>
-            <a:off x="7424928" y="3017520"/>
-            <a:ext cx="3941064" cy="621792"/>
-          </a:xfrm>
-          <a:prstGeom prst="rect">
-            <a:avLst/>
-          </a:prstGeom>
-          <a:noFill/>
-          <a:ln/>
-        </p:spPr>
-        <p:txBody>
-          <a:bodyPr wrap="square" rtlCol="0" anchor="t"/>
-          <a:lstStyle/>
-          <a:p>
-            <a:pPr indent="0" marL="0">
-              <a:lnSpc>
-                <a:spcPts val="1400"/>
-              </a:lnSpc>
-              <a:buNone/>
-            </a:pPr>
-            <a:r>
-              <a:rPr lang="en-US" sz="1150" b="1" dirty="0">
-                <a:solidFill>
-                  <a:srgbClr val="0F766E"/>
-                </a:solidFill>
-              </a:rPr>
-              <a:t>2.  </a:t>
-            </a:r>
-            <a:pPr indent="0" marL="0">
-              <a:lnSpc>
-                <a:spcPts val="1400"/>
-              </a:lnSpc>
-              <a:buNone/>
-            </a:pPr>
-            <a:r>
-              <a:rPr lang="en-US" sz="1150" dirty="0">
-                <a:solidFill>
-                  <a:srgbClr val="0B4A44"/>
-                </a:solidFill>
-              </a:rPr>
-              <a:t>Submit a request in the UI</a:t>
-            </a:r>
-            <a:endParaRPr lang="en-US" sz="1150" dirty="0"/>
-          </a:p>
-        </p:txBody>
-      </p:sp>
-      <p:sp>
-        <p:nvSpPr>
-          <p:cNvPr id="15" name="Text 13"/>
-          <p:cNvSpPr/>
-          <p:nvPr/>
-        </p:nvSpPr>
-        <p:spPr>
-          <a:xfrm>
-            <a:off x="7424928" y="3675888"/>
-            <a:ext cx="3941064" cy="621792"/>
-          </a:xfrm>
-          <a:prstGeom prst="rect">
-            <a:avLst/>
-          </a:prstGeom>
-          <a:noFill/>
-          <a:ln/>
-        </p:spPr>
-        <p:txBody>
-          <a:bodyPr wrap="square" rtlCol="0" anchor="t"/>
-          <a:lstStyle/>
-          <a:p>
-            <a:pPr indent="0" marL="0">
-              <a:lnSpc>
-                <a:spcPts val="1400"/>
-              </a:lnSpc>
-              <a:buNone/>
-            </a:pPr>
-            <a:r>
-              <a:rPr lang="en-US" sz="1150" b="1" dirty="0">
-                <a:solidFill>
-                  <a:srgbClr val="0F766E"/>
-                </a:solidFill>
-              </a:rPr>
-              <a:t>3.  </a:t>
-            </a:r>
-            <a:pPr indent="0" marL="0">
-              <a:lnSpc>
-                <a:spcPts val="1400"/>
-              </a:lnSpc>
-              <a:buNone/>
-            </a:pPr>
-            <a:r>
-              <a:rPr lang="en-US" sz="1150" dirty="0">
-                <a:solidFill>
-                  <a:srgbClr val="0B4A44"/>
-                </a:solidFill>
-              </a:rPr>
-              <a:t>Watch the AI match — with ineligible donors blocked</a:t>
-            </a:r>
-            <a:endParaRPr lang="en-US" sz="1150" dirty="0"/>
-          </a:p>
-        </p:txBody>
-      </p:sp>
-      <p:sp>
-        <p:nvSpPr>
-          <p:cNvPr id="16" name="Text 14"/>
-          <p:cNvSpPr/>
-          <p:nvPr/>
-        </p:nvSpPr>
-        <p:spPr>
-          <a:xfrm>
-            <a:off x="7424928" y="4334256"/>
-            <a:ext cx="3941064" cy="621792"/>
-          </a:xfrm>
-          <a:prstGeom prst="rect">
-            <a:avLst/>
-          </a:prstGeom>
-          <a:noFill/>
-          <a:ln/>
-        </p:spPr>
-        <p:txBody>
-          <a:bodyPr wrap="square" rtlCol="0" anchor="t"/>
-          <a:lstStyle/>
-          <a:p>
-            <a:pPr indent="0" marL="0">
-              <a:lnSpc>
-                <a:spcPts val="1400"/>
-              </a:lnSpc>
-              <a:buNone/>
-            </a:pPr>
-            <a:r>
-              <a:rPr lang="en-US" sz="1150" b="1" dirty="0">
-                <a:solidFill>
-                  <a:srgbClr val="0F766E"/>
-                </a:solidFill>
-              </a:rPr>
-              <a:t>4.  </a:t>
-            </a:r>
-            <a:pPr indent="0" marL="0">
-              <a:lnSpc>
-                <a:spcPts val="1400"/>
-              </a:lnSpc>
-              <a:buNone/>
-            </a:pPr>
-            <a:r>
-              <a:rPr lang="en-US" sz="1150" dirty="0">
-                <a:solidFill>
-                  <a:srgbClr val="0B4A44"/>
-                </a:solidFill>
-              </a:rPr>
-              <a:t>Check Analytics — accuracy is backtested, live</a:t>
-            </a:r>
-            <a:endParaRPr lang="en-US" sz="1150" dirty="0"/>
-          </a:p>
-        </p:txBody>
-      </p:sp>
-      <p:sp>
-        <p:nvSpPr>
-          <p:cNvPr id="17" name="Text 15"/>
-          <p:cNvSpPr/>
-          <p:nvPr/>
-        </p:nvSpPr>
-        <p:spPr>
-          <a:xfrm>
-            <a:off x="7424928" y="4992624"/>
-            <a:ext cx="3941064" cy="621792"/>
-          </a:xfrm>
-          <a:prstGeom prst="rect">
-            <a:avLst/>
-          </a:prstGeom>
-          <a:noFill/>
-          <a:ln/>
-        </p:spPr>
-        <p:txBody>
-          <a:bodyPr wrap="square" rtlCol="0" anchor="t"/>
-          <a:lstStyle/>
-          <a:p>
-            <a:pPr indent="0" marL="0">
-              <a:lnSpc>
-                <a:spcPts val="1400"/>
-              </a:lnSpc>
-              <a:buNone/>
-            </a:pPr>
-            <a:r>
-              <a:rPr lang="en-US" sz="1150" b="1" dirty="0">
-                <a:solidFill>
-                  <a:srgbClr val="0F766E"/>
-                </a:solidFill>
-              </a:rPr>
-              <a:t>5.  </a:t>
-            </a:r>
-            <a:pPr indent="0" marL="0">
-              <a:lnSpc>
-                <a:spcPts val="1400"/>
-              </a:lnSpc>
-              <a:buNone/>
-            </a:pPr>
-            <a:r>
-              <a:rPr lang="en-US" sz="1150" dirty="0">
-                <a:solidFill>
-                  <a:srgbClr val="0B4A44"/>
-                </a:solidFill>
-              </a:rPr>
-              <a:t>Run node server/smoke-test.js — 21 green checks</a:t>
-            </a:r>
-            <a:endParaRPr lang="en-US" sz="1150" dirty="0"/>
+                <a:spcPts val="1500"/>
+              </a:lnSpc>
+              <a:buNone/>
+            </a:pPr>
+            <a:r>
+              <a:rPr lang="en-US" sz="1100" dirty="0">
+                <a:solidFill>
+                  <a:srgbClr val="000000"/>
+                </a:solidFill>
+              </a:rPr>
+              <a:t>Live on Vercel (serverless) at bloodbridge-ai-two.vercel.app · full source on GitHub (github.com/sana1234-tech/bloodbridge-AI) · one command ships a new production build. Realistic dataset: 150 donors, 19 real hospitals, 90 days of demand history across 6 cities.</a:t>
+            </a:r>
+            <a:endParaRPr lang="en-US" sz="1100" dirty="0"/>
+          </a:p>
+        </p:txBody>
+      </p:sp>
+      <p:sp>
+        <p:nvSpPr>
+          <p:cNvPr id="14" name="Shape 12"/>
+          <p:cNvSpPr/>
+          <p:nvPr/>
+        </p:nvSpPr>
+        <p:spPr>
+          <a:xfrm>
+            <a:off x="6473952" y="1773936"/>
+            <a:ext cx="5202936" cy="3292983"/>
+          </a:xfrm>
+          <a:prstGeom prst="roundRect">
+            <a:avLst>
+              <a:gd name="adj" fmla="val 2221"/>
+            </a:avLst>
+          </a:prstGeom>
+          <a:solidFill>
+            <a:srgbClr val="FAFAF8"/>
+          </a:solidFill>
+          <a:ln w="15875">
+            <a:solidFill>
+              <a:srgbClr val="E7E5E0"/>
+            </a:solidFill>
+            <a:prstDash val="solid"/>
+          </a:ln>
+        </p:spPr>
+      </p:sp>
+      <p:pic>
+        <p:nvPicPr>
+          <p:cNvPr id="15" name="Image 0" descr="C:\Users\SANA KHAN\Documents\Qoder\2026-09-03\chat-1\bloodbridge-ai\assets\donors.png">    </p:cNvPr>
+          <p:cNvPicPr>
+            <a:picLocks noChangeAspect="1"/>
+          </p:cNvPicPr>
+          <p:nvPr/>
+        </p:nvPicPr>
+        <p:blipFill>
+          <a:blip r:embed="rId1"/>
+          <a:stretch>
+            <a:fillRect/>
+          </a:stretch>
+        </p:blipFill>
+        <p:spPr>
+          <a:xfrm>
+            <a:off x="6528816" y="1828800"/>
+            <a:ext cx="5093208" cy="3183255"/>
+          </a:xfrm>
+          <a:prstGeom prst="rect">
+            <a:avLst/>
+          </a:prstGeom>
+        </p:spPr>
+      </p:pic>
+      <p:sp>
+        <p:nvSpPr>
+          <p:cNvPr id="16" name="Text 13"/>
+          <p:cNvSpPr/>
+          <p:nvPr/>
+        </p:nvSpPr>
+        <p:spPr>
+          <a:xfrm>
+            <a:off x="6473952" y="5121783"/>
+            <a:ext cx="5202936" cy="274320"/>
+          </a:xfrm>
+          <a:prstGeom prst="rect">
+            <a:avLst/>
+          </a:prstGeom>
+          <a:noFill/>
+          <a:ln/>
+        </p:spPr>
+        <p:txBody>
+          <a:bodyPr wrap="square" rtlCol="0" anchor="ctr"/>
+          <a:lstStyle/>
+          <a:p>
+            <a:pPr algn="ctr" indent="0" marL="0">
+              <a:buNone/>
+            </a:pPr>
+            <a:r>
+              <a:rPr lang="en-US" sz="950" dirty="0">
+                <a:solidFill>
+                  <a:srgbClr val="8B8B87"/>
+                </a:solidFill>
+              </a:rPr>
+              <a:t>Donor directory — masked phones, live eligibility status per donor</a:t>
+            </a:r>
+            <a:endParaRPr lang="en-US" sz="950" dirty="0"/>
           </a:p>
         </p:txBody>
       </p:sp>

--- a/presentation/BloodBridge-AI-Presentation.pptx
+++ b/presentation/BloodBridge-AI-Presentation.pptx
@@ -5816,7 +5816,7 @@
                   <a:srgbClr val="5B5B58"/>
                 </a:solidFill>
               </a:rPr>
-              <a:t>of demand forecast per city &amp; blood group, with backtested ~80–84% accuracy shown live</a:t>
+              <a:t>of demand forecast per city &amp; blood group — accuracy backtested daily against real demand, shown live</a:t>
             </a:r>
             <a:endParaRPr lang="en-US" sz="1000" dirty="0"/>
           </a:p>
@@ -7006,7 +7006,7 @@
                   <a:srgbClr val="0B4A44"/>
                 </a:solidFill>
               </a:rPr>
-              <a:t>The model is re-run on past days using only prior history, then compared with what actually happened — ~80–84% accuracy across 112 forecasts, displayed live in the product.</a:t>
+              <a:t>The model is re-run on past days using only prior history, then compared with what actually happened — accuracy across 672 backtested forecasts is displayed live in the product, per city and blood group.</a:t>
             </a:r>
             <a:endParaRPr lang="en-US" sz="1100" dirty="0"/>
           </a:p>
